--- a/Materjalid/Day9 Andmekorraldus Dim Fakt/9-paev-andmetarkus-esitlus.pptx
+++ b/Materjalid/Day9 Andmekorraldus Dim Fakt/9-paev-andmetarkus-esitlus.pptx
@@ -5,10 +5,10 @@
     <p:sldMasterId id="2147483648" r:id="rId4"/>
   </p:sldMasterIdLst>
   <p:notesMasterIdLst>
-    <p:notesMasterId r:id="rId34"/>
+    <p:notesMasterId r:id="rId33"/>
   </p:notesMasterIdLst>
   <p:handoutMasterIdLst>
-    <p:handoutMasterId r:id="rId35"/>
+    <p:handoutMasterId r:id="rId34"/>
   </p:handoutMasterIdLst>
   <p:sldIdLst>
     <p:sldId id="417" r:id="rId5"/>
@@ -20,59 +20,58 @@
     <p:sldId id="656" r:id="rId11"/>
     <p:sldId id="458" r:id="rId12"/>
     <p:sldId id="498" r:id="rId13"/>
-    <p:sldId id="613" r:id="rId14"/>
-    <p:sldId id="455" r:id="rId15"/>
-    <p:sldId id="456" r:id="rId16"/>
-    <p:sldId id="509" r:id="rId17"/>
-    <p:sldId id="562" r:id="rId18"/>
-    <p:sldId id="452" r:id="rId19"/>
-    <p:sldId id="453" r:id="rId20"/>
-    <p:sldId id="454" r:id="rId21"/>
-    <p:sldId id="496" r:id="rId22"/>
-    <p:sldId id="500" r:id="rId23"/>
-    <p:sldId id="510" r:id="rId24"/>
-    <p:sldId id="502" r:id="rId25"/>
-    <p:sldId id="497" r:id="rId26"/>
-    <p:sldId id="561" r:id="rId27"/>
-    <p:sldId id="574" r:id="rId28"/>
-    <p:sldId id="659" r:id="rId29"/>
-    <p:sldId id="660" r:id="rId30"/>
-    <p:sldId id="657" r:id="rId31"/>
-    <p:sldId id="621" r:id="rId32"/>
-    <p:sldId id="658" r:id="rId33"/>
+    <p:sldId id="455" r:id="rId14"/>
+    <p:sldId id="456" r:id="rId15"/>
+    <p:sldId id="509" r:id="rId16"/>
+    <p:sldId id="562" r:id="rId17"/>
+    <p:sldId id="452" r:id="rId18"/>
+    <p:sldId id="453" r:id="rId19"/>
+    <p:sldId id="454" r:id="rId20"/>
+    <p:sldId id="496" r:id="rId21"/>
+    <p:sldId id="500" r:id="rId22"/>
+    <p:sldId id="510" r:id="rId23"/>
+    <p:sldId id="502" r:id="rId24"/>
+    <p:sldId id="497" r:id="rId25"/>
+    <p:sldId id="561" r:id="rId26"/>
+    <p:sldId id="574" r:id="rId27"/>
+    <p:sldId id="659" r:id="rId28"/>
+    <p:sldId id="660" r:id="rId29"/>
+    <p:sldId id="657" r:id="rId30"/>
+    <p:sldId id="621" r:id="rId31"/>
+    <p:sldId id="658" r:id="rId32"/>
   </p:sldIdLst>
   <p:sldSz cx="12192000" cy="6858000"/>
   <p:notesSz cx="6858000" cy="9144000"/>
   <p:embeddedFontLst>
     <p:embeddedFont>
       <p:font typeface="Inter" panose="020B0604020202020204" charset="0"/>
-      <p:regular r:id="rId36"/>
-      <p:bold r:id="rId37"/>
-      <p:italic r:id="rId38"/>
-      <p:boldItalic r:id="rId39"/>
+      <p:regular r:id="rId35"/>
+      <p:bold r:id="rId36"/>
+      <p:italic r:id="rId37"/>
+      <p:boldItalic r:id="rId38"/>
     </p:embeddedFont>
     <p:embeddedFont>
       <p:font typeface="Inter Bold" panose="020B0604020202020204" charset="0"/>
-      <p:bold r:id="rId40"/>
+      <p:bold r:id="rId39"/>
     </p:embeddedFont>
     <p:embeddedFont>
       <p:font typeface="Noto Serif" panose="02020600060500020200" pitchFamily="18" charset="0"/>
-      <p:regular r:id="rId41"/>
-      <p:bold r:id="rId42"/>
-      <p:italic r:id="rId43"/>
-      <p:boldItalic r:id="rId44"/>
+      <p:regular r:id="rId40"/>
+      <p:bold r:id="rId41"/>
+      <p:italic r:id="rId42"/>
+      <p:boldItalic r:id="rId43"/>
     </p:embeddedFont>
     <p:embeddedFont>
       <p:font typeface="Poppins SemiBold" panose="00000700000000000000" pitchFamily="2" charset="-70"/>
-      <p:bold r:id="rId45"/>
-      <p:boldItalic r:id="rId46"/>
+      <p:bold r:id="rId44"/>
+      <p:boldItalic r:id="rId45"/>
     </p:embeddedFont>
     <p:embeddedFont>
       <p:font typeface="Roboto" panose="02000000000000000000" pitchFamily="2" charset="0"/>
-      <p:regular r:id="rId47"/>
-      <p:bold r:id="rId48"/>
-      <p:italic r:id="rId49"/>
-      <p:boldItalic r:id="rId50"/>
+      <p:regular r:id="rId46"/>
+      <p:bold r:id="rId47"/>
+      <p:italic r:id="rId48"/>
+      <p:boldItalic r:id="rId49"/>
     </p:embeddedFont>
   </p:embeddedFontLst>
   <p:defaultTextStyle>
@@ -2908,7 +2907,7 @@
           <a:p>
             <a:fld id="{F9D2AD6E-DEDD-49A0-A4BE-7A081A9112DA}" type="datetimeFigureOut">
               <a:rPr lang="en-US" smtClean="0"/>
-              <a:t>8/27/2026</a:t>
+              <a:t>8/28/2026</a:t>
             </a:fld>
             <a:endParaRPr lang="en-US"/>
           </a:p>
@@ -3084,7 +3083,7 @@
           </a:lstStyle>
           <a:p>
             <a:fld id="{2AF9C1A6-4321-41FA-B001-4140F0E2457F}" type="datetimeFigureOut">
-              <a:t>27.08.2026</a:t>
+              <a:t>28.08.2026</a:t>
             </a:fld>
             <a:endParaRPr lang="en-US"/>
           </a:p>
@@ -5307,7 +5306,7 @@
           <a:p>
             <a:fld id="{46699514-027B-49BD-8B49-5054CA40ECF4}" type="slidenum">
               <a:rPr lang="en-US"/>
-              <a:t>19</a:t>
+              <a:t>18</a:t>
             </a:fld>
             <a:endParaRPr lang="en-US"/>
           </a:p>
@@ -5512,7 +5511,7 @@
           <a:p>
             <a:fld id="{46699514-027B-49BD-8B49-5054CA40ECF4}" type="slidenum">
               <a:rPr lang="en-US"/>
-              <a:t>20</a:t>
+              <a:t>19</a:t>
             </a:fld>
             <a:endParaRPr lang="en-US"/>
           </a:p>
@@ -5596,7 +5595,7 @@
           <a:p>
             <a:fld id="{46699514-027B-49BD-8B49-5054CA40ECF4}" type="slidenum">
               <a:rPr lang="et-EE" smtClean="0"/>
-              <a:t>28</a:t>
+              <a:t>27</a:t>
             </a:fld>
             <a:endParaRPr lang="et-EE"/>
           </a:p>
@@ -16742,7 +16741,7 @@
           <a:p>
             <a:fld id="{DE840A40-73C8-4048-8140-49F5D65BB431}" type="datetimeFigureOut">
               <a:rPr lang="et-EE" smtClean="0"/>
-              <a:t>27.08.2026</a:t>
+              <a:t>28.08.2026</a:t>
             </a:fld>
             <a:endParaRPr lang="et-EE"/>
           </a:p>
@@ -28754,419 +28753,6 @@
         <p:cNvPr id="1" name="">
           <a:extLst>
             <a:ext uri="{FF2B5EF4-FFF2-40B4-BE49-F238E27FC236}">
-              <a16:creationId xmlns:a16="http://schemas.microsoft.com/office/drawing/2014/main" id="{5E3FB820-D4B1-12B6-8441-C57B3AB917BC}"/>
-            </a:ext>
-          </a:extLst>
-        </p:cNvPr>
-        <p:cNvGrpSpPr/>
-        <p:nvPr/>
-      </p:nvGrpSpPr>
-      <p:grpSpPr>
-        <a:xfrm>
-          <a:off x="0" y="0"/>
-          <a:ext cx="0" cy="0"/>
-          <a:chOff x="0" y="0"/>
-          <a:chExt cx="0" cy="0"/>
-        </a:xfrm>
-      </p:grpSpPr>
-      <p:sp>
-        <p:nvSpPr>
-          <p:cNvPr id="2" name="Title 1">
-            <a:extLst>
-              <a:ext uri="{FF2B5EF4-FFF2-40B4-BE49-F238E27FC236}">
-                <a16:creationId xmlns:a16="http://schemas.microsoft.com/office/drawing/2014/main" id="{FDF7ED97-5D9B-0830-BF5C-065B482AAA9A}"/>
-              </a:ext>
-            </a:extLst>
-          </p:cNvPr>
-          <p:cNvSpPr>
-            <a:spLocks noGrp="1"/>
-          </p:cNvSpPr>
-          <p:nvPr>
-            <p:ph type="ctrTitle"/>
-          </p:nvPr>
-        </p:nvSpPr>
-        <p:spPr/>
-        <p:txBody>
-          <a:bodyPr/>
-          <a:lstStyle/>
-          <a:p>
-            <a:r>
-              <a:rPr lang="et-EE" noProof="0" dirty="0"/>
-              <a:t>Klassifikaatorid</a:t>
-            </a:r>
-          </a:p>
-        </p:txBody>
-      </p:sp>
-      <p:sp>
-        <p:nvSpPr>
-          <p:cNvPr id="3" name="Content Placeholder 2">
-            <a:extLst>
-              <a:ext uri="{FF2B5EF4-FFF2-40B4-BE49-F238E27FC236}">
-                <a16:creationId xmlns:a16="http://schemas.microsoft.com/office/drawing/2014/main" id="{80E50F48-24A0-92FF-D210-739EA567CCD2}"/>
-              </a:ext>
-            </a:extLst>
-          </p:cNvPr>
-          <p:cNvSpPr>
-            <a:spLocks noGrp="1"/>
-          </p:cNvSpPr>
-          <p:nvPr>
-            <p:ph sz="quarter" idx="10"/>
-          </p:nvPr>
-        </p:nvSpPr>
-        <p:spPr/>
-        <p:txBody>
-          <a:bodyPr/>
-          <a:lstStyle/>
-          <a:p>
-            <a:pPr>
-              <a:lnSpc>
-                <a:spcPct val="150000"/>
-              </a:lnSpc>
-            </a:pPr>
-            <a:r>
-              <a:rPr lang="et-EE" sz="2400" noProof="0" dirty="0">
-                <a:ea typeface="Inter"/>
-              </a:rPr>
-              <a:t>Klassifikaator – kategooriaks jaotamise alus </a:t>
-            </a:r>
-          </a:p>
-          <a:p>
-            <a:pPr lvl="1">
-              <a:lnSpc>
-                <a:spcPct val="150000"/>
-              </a:lnSpc>
-              <a:buFont typeface="Courier New" panose="020B0502030000000004" pitchFamily="34" charset="0"/>
-              <a:buChar char="o"/>
-            </a:pPr>
-            <a:r>
-              <a:rPr lang="et-EE" sz="2400" noProof="0" dirty="0">
-                <a:ea typeface="Inter"/>
-              </a:rPr>
-              <a:t>Nt </a:t>
-            </a:r>
-            <a:r>
-              <a:rPr lang="et-EE" sz="2400" noProof="0" dirty="0">
-                <a:ea typeface="Inter"/>
-                <a:hlinkClick r:id="rId2"/>
-              </a:rPr>
-              <a:t>Ametite klassifikaator</a:t>
-            </a:r>
-            <a:r>
-              <a:rPr lang="et-EE" sz="2400" noProof="0" dirty="0">
-                <a:ea typeface="Inter"/>
-              </a:rPr>
-              <a:t>, </a:t>
-            </a:r>
-            <a:r>
-              <a:rPr lang="et-EE" sz="2400" noProof="0" dirty="0">
-                <a:ea typeface="Inter"/>
-                <a:hlinkClick r:id="rId3"/>
-              </a:rPr>
-              <a:t>Omandatud kõrgeim haridus</a:t>
-            </a:r>
-            <a:endParaRPr lang="et-EE" sz="2400" noProof="0" dirty="0">
-              <a:solidFill>
-                <a:srgbClr val="121212"/>
-              </a:solidFill>
-              <a:latin typeface="Inter"/>
-              <a:ea typeface="Inter"/>
-              <a:cs typeface="Roboto"/>
-            </a:endParaRPr>
-          </a:p>
-          <a:p>
-            <a:pPr>
-              <a:lnSpc>
-                <a:spcPct val="150000"/>
-              </a:lnSpc>
-            </a:pPr>
-            <a:r>
-              <a:rPr lang="et-EE" sz="2400" noProof="0" dirty="0">
-                <a:ea typeface="Inter"/>
-              </a:rPr>
-              <a:t>Riiklikult kasutusel olevad: </a:t>
-            </a:r>
-            <a:r>
-              <a:rPr lang="et-EE" sz="2400" noProof="0" dirty="0">
-                <a:latin typeface="Inter"/>
-                <a:ea typeface="Inter"/>
-                <a:hlinkClick r:id="rId4"/>
-              </a:rPr>
-              <a:t>klassifikaatorid.stat.ee</a:t>
-            </a:r>
-            <a:r>
-              <a:rPr lang="et-EE" sz="2400" noProof="0" dirty="0">
-                <a:latin typeface="Inter"/>
-                <a:ea typeface="Inter"/>
-              </a:rPr>
-              <a:t> </a:t>
-            </a:r>
-          </a:p>
-          <a:p>
-            <a:pPr>
-              <a:lnSpc>
-                <a:spcPct val="150000"/>
-              </a:lnSpc>
-            </a:pPr>
-            <a:r>
-              <a:rPr lang="et-EE" sz="2400" noProof="0" dirty="0">
-                <a:ea typeface="Inter"/>
-              </a:rPr>
-              <a:t>Samade klassifikaatorite kasutamine võimaldab eri andmestike omavahel kergemini ühildada</a:t>
-            </a:r>
-            <a:endParaRPr lang="et-EE" sz="2400" noProof="0" dirty="0"/>
-          </a:p>
-        </p:txBody>
-      </p:sp>
-    </p:spTree>
-    <p:extLst>
-      <p:ext uri="{BB962C8B-B14F-4D97-AF65-F5344CB8AC3E}">
-        <p14:creationId xmlns:p14="http://schemas.microsoft.com/office/powerpoint/2010/main" val="3671455624"/>
-      </p:ext>
-    </p:extLst>
-  </p:cSld>
-  <p:clrMapOvr>
-    <a:masterClrMapping/>
-  </p:clrMapOvr>
-  <p:timing>
-    <p:tnLst>
-      <p:par>
-        <p:cTn id="1" dur="indefinite" restart="never" nodeType="tmRoot">
-          <p:childTnLst>
-            <p:seq concurrent="1" nextAc="seek">
-              <p:cTn id="2" dur="indefinite" nodeType="mainSeq">
-                <p:childTnLst>
-                  <p:par>
-                    <p:cTn id="3" fill="hold">
-                      <p:stCondLst>
-                        <p:cond delay="indefinite"/>
-                      </p:stCondLst>
-                      <p:childTnLst>
-                        <p:par>
-                          <p:cTn id="4" fill="hold">
-                            <p:stCondLst>
-                              <p:cond delay="0"/>
-                            </p:stCondLst>
-                            <p:childTnLst>
-                              <p:par>
-                                <p:cTn id="5" presetID="1" presetClass="entr" presetSubtype="0" fill="hold" grpId="0" nodeType="clickEffect">
-                                  <p:stCondLst>
-                                    <p:cond delay="0"/>
-                                  </p:stCondLst>
-                                  <p:childTnLst>
-                                    <p:set>
-                                      <p:cBhvr>
-                                        <p:cTn id="6" dur="1" fill="hold">
-                                          <p:stCondLst>
-                                            <p:cond delay="0"/>
-                                          </p:stCondLst>
-                                        </p:cTn>
-                                        <p:tgtEl>
-                                          <p:spTgt spid="3">
-                                            <p:txEl>
-                                              <p:pRg st="0" end="0"/>
-                                            </p:txEl>
-                                          </p:spTgt>
-                                        </p:tgtEl>
-                                        <p:attrNameLst>
-                                          <p:attrName>style.visibility</p:attrName>
-                                        </p:attrNameLst>
-                                      </p:cBhvr>
-                                      <p:to>
-                                        <p:strVal val="visible"/>
-                                      </p:to>
-                                    </p:set>
-                                  </p:childTnLst>
-                                </p:cTn>
-                              </p:par>
-                            </p:childTnLst>
-                          </p:cTn>
-                        </p:par>
-                      </p:childTnLst>
-                    </p:cTn>
-                  </p:par>
-                  <p:par>
-                    <p:cTn id="7" fill="hold">
-                      <p:stCondLst>
-                        <p:cond delay="indefinite"/>
-                      </p:stCondLst>
-                      <p:childTnLst>
-                        <p:par>
-                          <p:cTn id="8" fill="hold">
-                            <p:stCondLst>
-                              <p:cond delay="0"/>
-                            </p:stCondLst>
-                            <p:childTnLst>
-                              <p:par>
-                                <p:cTn id="9" presetID="1" presetClass="entr" presetSubtype="0" fill="hold" grpId="0" nodeType="clickEffect">
-                                  <p:stCondLst>
-                                    <p:cond delay="0"/>
-                                  </p:stCondLst>
-                                  <p:childTnLst>
-                                    <p:set>
-                                      <p:cBhvr>
-                                        <p:cTn id="10" dur="1" fill="hold">
-                                          <p:stCondLst>
-                                            <p:cond delay="0"/>
-                                          </p:stCondLst>
-                                        </p:cTn>
-                                        <p:tgtEl>
-                                          <p:spTgt spid="3">
-                                            <p:txEl>
-                                              <p:pRg st="1" end="1"/>
-                                            </p:txEl>
-                                          </p:spTgt>
-                                        </p:tgtEl>
-                                        <p:attrNameLst>
-                                          <p:attrName>style.visibility</p:attrName>
-                                        </p:attrNameLst>
-                                      </p:cBhvr>
-                                      <p:to>
-                                        <p:strVal val="visible"/>
-                                      </p:to>
-                                    </p:set>
-                                  </p:childTnLst>
-                                </p:cTn>
-                              </p:par>
-                            </p:childTnLst>
-                          </p:cTn>
-                        </p:par>
-                      </p:childTnLst>
-                    </p:cTn>
-                  </p:par>
-                  <p:par>
-                    <p:cTn id="11" fill="hold">
-                      <p:stCondLst>
-                        <p:cond delay="indefinite"/>
-                      </p:stCondLst>
-                      <p:childTnLst>
-                        <p:par>
-                          <p:cTn id="12" fill="hold">
-                            <p:stCondLst>
-                              <p:cond delay="0"/>
-                            </p:stCondLst>
-                            <p:childTnLst>
-                              <p:par>
-                                <p:cTn id="13" presetID="1" presetClass="entr" presetSubtype="0" fill="hold" grpId="0" nodeType="clickEffect">
-                                  <p:stCondLst>
-                                    <p:cond delay="0"/>
-                                  </p:stCondLst>
-                                  <p:childTnLst>
-                                    <p:set>
-                                      <p:cBhvr>
-                                        <p:cTn id="14" dur="1" fill="hold">
-                                          <p:stCondLst>
-                                            <p:cond delay="0"/>
-                                          </p:stCondLst>
-                                        </p:cTn>
-                                        <p:tgtEl>
-                                          <p:spTgt spid="3">
-                                            <p:txEl>
-                                              <p:pRg st="2" end="2"/>
-                                            </p:txEl>
-                                          </p:spTgt>
-                                        </p:tgtEl>
-                                        <p:attrNameLst>
-                                          <p:attrName>style.visibility</p:attrName>
-                                        </p:attrNameLst>
-                                      </p:cBhvr>
-                                      <p:to>
-                                        <p:strVal val="visible"/>
-                                      </p:to>
-                                    </p:set>
-                                  </p:childTnLst>
-                                </p:cTn>
-                              </p:par>
-                            </p:childTnLst>
-                          </p:cTn>
-                        </p:par>
-                      </p:childTnLst>
-                    </p:cTn>
-                  </p:par>
-                  <p:par>
-                    <p:cTn id="15" fill="hold">
-                      <p:stCondLst>
-                        <p:cond delay="indefinite"/>
-                      </p:stCondLst>
-                      <p:childTnLst>
-                        <p:par>
-                          <p:cTn id="16" fill="hold">
-                            <p:stCondLst>
-                              <p:cond delay="0"/>
-                            </p:stCondLst>
-                            <p:childTnLst>
-                              <p:par>
-                                <p:cTn id="17" presetID="1" presetClass="entr" presetSubtype="0" fill="hold" grpId="0" nodeType="clickEffect">
-                                  <p:stCondLst>
-                                    <p:cond delay="0"/>
-                                  </p:stCondLst>
-                                  <p:childTnLst>
-                                    <p:set>
-                                      <p:cBhvr>
-                                        <p:cTn id="18" dur="1" fill="hold">
-                                          <p:stCondLst>
-                                            <p:cond delay="0"/>
-                                          </p:stCondLst>
-                                        </p:cTn>
-                                        <p:tgtEl>
-                                          <p:spTgt spid="3">
-                                            <p:txEl>
-                                              <p:pRg st="3" end="3"/>
-                                            </p:txEl>
-                                          </p:spTgt>
-                                        </p:tgtEl>
-                                        <p:attrNameLst>
-                                          <p:attrName>style.visibility</p:attrName>
-                                        </p:attrNameLst>
-                                      </p:cBhvr>
-                                      <p:to>
-                                        <p:strVal val="visible"/>
-                                      </p:to>
-                                    </p:set>
-                                  </p:childTnLst>
-                                </p:cTn>
-                              </p:par>
-                            </p:childTnLst>
-                          </p:cTn>
-                        </p:par>
-                      </p:childTnLst>
-                    </p:cTn>
-                  </p:par>
-                </p:childTnLst>
-              </p:cTn>
-              <p:prevCondLst>
-                <p:cond evt="onPrev" delay="0">
-                  <p:tgtEl>
-                    <p:sldTgt/>
-                  </p:tgtEl>
-                </p:cond>
-              </p:prevCondLst>
-              <p:nextCondLst>
-                <p:cond evt="onNext" delay="0">
-                  <p:tgtEl>
-                    <p:sldTgt/>
-                  </p:tgtEl>
-                </p:cond>
-              </p:nextCondLst>
-            </p:seq>
-          </p:childTnLst>
-        </p:cTn>
-      </p:par>
-    </p:tnLst>
-    <p:bldLst>
-      <p:bldP spid="3" grpId="0" build="p"/>
-    </p:bldLst>
-  </p:timing>
-</p:sld>
-</file>
-
-<file path=ppt/slides/slide11.xml><?xml version="1.0" encoding="utf-8"?>
-<p:sld xmlns:a="http://schemas.openxmlformats.org/drawingml/2006/main" xmlns:r="http://schemas.openxmlformats.org/officeDocument/2006/relationships" xmlns:p="http://schemas.openxmlformats.org/presentationml/2006/main">
-  <p:cSld>
-    <p:spTree>
-      <p:nvGrpSpPr>
-        <p:cNvPr id="1" name="">
-          <a:extLst>
-            <a:ext uri="{FF2B5EF4-FFF2-40B4-BE49-F238E27FC236}">
               <a16:creationId xmlns:a16="http://schemas.microsoft.com/office/drawing/2014/main" id="{1A36B716-2EFF-3A4C-AC10-9210B86D72EF}"/>
             </a:ext>
           </a:extLst>
@@ -29313,7 +28899,7 @@
 </p:sld>
 </file>
 
-<file path=ppt/slides/slide12.xml><?xml version="1.0" encoding="utf-8"?>
+<file path=ppt/slides/slide11.xml><?xml version="1.0" encoding="utf-8"?>
 <p:sld xmlns:a="http://schemas.openxmlformats.org/drawingml/2006/main" xmlns:r="http://schemas.openxmlformats.org/officeDocument/2006/relationships" xmlns:p="http://schemas.openxmlformats.org/presentationml/2006/main">
   <p:cSld>
     <p:spTree>
@@ -31959,7 +31545,7 @@
 </p:sld>
 </file>
 
-<file path=ppt/slides/slide13.xml><?xml version="1.0" encoding="utf-8"?>
+<file path=ppt/slides/slide12.xml><?xml version="1.0" encoding="utf-8"?>
 <p:sld xmlns:a="http://schemas.openxmlformats.org/drawingml/2006/main" xmlns:r="http://schemas.openxmlformats.org/officeDocument/2006/relationships" xmlns:p="http://schemas.openxmlformats.org/presentationml/2006/main">
   <p:cSld>
     <p:spTree>
@@ -32185,7 +31771,7 @@
 </p:sld>
 </file>
 
-<file path=ppt/slides/slide14.xml><?xml version="1.0" encoding="utf-8"?>
+<file path=ppt/slides/slide13.xml><?xml version="1.0" encoding="utf-8"?>
 <p:sld xmlns:a="http://schemas.openxmlformats.org/drawingml/2006/main" xmlns:r="http://schemas.openxmlformats.org/officeDocument/2006/relationships" xmlns:p="http://schemas.openxmlformats.org/presentationml/2006/main">
   <p:cSld>
     <p:spTree>
@@ -32298,7 +31884,7 @@
 </p:sld>
 </file>
 
-<file path=ppt/slides/slide15.xml><?xml version="1.0" encoding="utf-8"?>
+<file path=ppt/slides/slide14.xml><?xml version="1.0" encoding="utf-8"?>
 <p:sld xmlns:a="http://schemas.openxmlformats.org/drawingml/2006/main" xmlns:r="http://schemas.openxmlformats.org/officeDocument/2006/relationships" xmlns:p="http://schemas.openxmlformats.org/presentationml/2006/main">
   <p:cSld>
     <p:spTree>
@@ -32470,7 +32056,7 @@
 </p:sld>
 </file>
 
-<file path=ppt/slides/slide16.xml><?xml version="1.0" encoding="utf-8"?>
+<file path=ppt/slides/slide15.xml><?xml version="1.0" encoding="utf-8"?>
 <p:sld xmlns:a="http://schemas.openxmlformats.org/drawingml/2006/main" xmlns:r="http://schemas.openxmlformats.org/officeDocument/2006/relationships" xmlns:p="http://schemas.openxmlformats.org/presentationml/2006/main">
   <p:cSld>
     <p:spTree>
@@ -33789,7 +33375,7 @@
 </p:sld>
 </file>
 
-<file path=ppt/slides/slide17.xml><?xml version="1.0" encoding="utf-8"?>
+<file path=ppt/slides/slide16.xml><?xml version="1.0" encoding="utf-8"?>
 <p:sld xmlns:a="http://schemas.openxmlformats.org/drawingml/2006/main" xmlns:r="http://schemas.openxmlformats.org/officeDocument/2006/relationships" xmlns:p="http://schemas.openxmlformats.org/presentationml/2006/main">
   <p:cSld>
     <p:spTree>
@@ -34639,7 +34225,7 @@
 </p:sld>
 </file>
 
-<file path=ppt/slides/slide18.xml><?xml version="1.0" encoding="utf-8"?>
+<file path=ppt/slides/slide17.xml><?xml version="1.0" encoding="utf-8"?>
 <p:sld xmlns:a="http://schemas.openxmlformats.org/drawingml/2006/main" xmlns:r="http://schemas.openxmlformats.org/officeDocument/2006/relationships" xmlns:p="http://schemas.openxmlformats.org/presentationml/2006/main">
   <p:cSld>
     <p:spTree>
@@ -34745,7 +34331,7 @@
 </p:sld>
 </file>
 
-<file path=ppt/slides/slide19.xml><?xml version="1.0" encoding="utf-8"?>
+<file path=ppt/slides/slide18.xml><?xml version="1.0" encoding="utf-8"?>
 <p:sld xmlns:a="http://schemas.openxmlformats.org/drawingml/2006/main" xmlns:r="http://schemas.openxmlformats.org/officeDocument/2006/relationships" xmlns:p="http://schemas.openxmlformats.org/presentationml/2006/main">
   <p:cSld>
     <p:spTree>
@@ -34938,6 +34524,129 @@
 </p:sld>
 </file>
 
+<file path=ppt/slides/slide19.xml><?xml version="1.0" encoding="utf-8"?>
+<p:sld xmlns:a="http://schemas.openxmlformats.org/drawingml/2006/main" xmlns:r="http://schemas.openxmlformats.org/officeDocument/2006/relationships" xmlns:p="http://schemas.openxmlformats.org/presentationml/2006/main">
+  <p:cSld>
+    <p:spTree>
+      <p:nvGrpSpPr>
+        <p:cNvPr id="1" name="">
+          <a:extLst>
+            <a:ext uri="{FF2B5EF4-FFF2-40B4-BE49-F238E27FC236}">
+              <a16:creationId xmlns:a16="http://schemas.microsoft.com/office/drawing/2014/main" id="{B39AA82F-17B2-0B84-AACA-870316873AE2}"/>
+            </a:ext>
+          </a:extLst>
+        </p:cNvPr>
+        <p:cNvGrpSpPr/>
+        <p:nvPr/>
+      </p:nvGrpSpPr>
+      <p:grpSpPr>
+        <a:xfrm>
+          <a:off x="0" y="0"/>
+          <a:ext cx="0" cy="0"/>
+          <a:chOff x="0" y="0"/>
+          <a:chExt cx="0" cy="0"/>
+        </a:xfrm>
+      </p:grpSpPr>
+      <p:sp>
+        <p:nvSpPr>
+          <p:cNvPr id="2" name="Title 1">
+            <a:extLst>
+              <a:ext uri="{FF2B5EF4-FFF2-40B4-BE49-F238E27FC236}">
+                <a16:creationId xmlns:a16="http://schemas.microsoft.com/office/drawing/2014/main" id="{2EF53EA2-150D-D910-85D4-CCE940301878}"/>
+              </a:ext>
+            </a:extLst>
+          </p:cNvPr>
+          <p:cNvSpPr>
+            <a:spLocks noGrp="1"/>
+          </p:cNvSpPr>
+          <p:nvPr>
+            <p:ph type="ctrTitle"/>
+          </p:nvPr>
+        </p:nvSpPr>
+        <p:spPr/>
+        <p:txBody>
+          <a:bodyPr/>
+          <a:lstStyle/>
+          <a:p>
+            <a:r>
+              <a:rPr lang="et-EE" sz="2800" noProof="0" dirty="0"/>
+              <a:t>Organisatsioonivälistele andmetele juurdepääs</a:t>
+            </a:r>
+            <a:endParaRPr lang="et-EE" noProof="0" dirty="0"/>
+          </a:p>
+        </p:txBody>
+      </p:sp>
+      <p:sp>
+        <p:nvSpPr>
+          <p:cNvPr id="3" name="Content Placeholder 2">
+            <a:extLst>
+              <a:ext uri="{FF2B5EF4-FFF2-40B4-BE49-F238E27FC236}">
+                <a16:creationId xmlns:a16="http://schemas.microsoft.com/office/drawing/2014/main" id="{C7BB5AB7-7CAF-E94F-6970-A27EFE3934C9}"/>
+              </a:ext>
+            </a:extLst>
+          </p:cNvPr>
+          <p:cNvSpPr>
+            <a:spLocks noGrp="1"/>
+          </p:cNvSpPr>
+          <p:nvPr>
+            <p:ph sz="quarter" idx="10"/>
+          </p:nvPr>
+        </p:nvSpPr>
+        <p:spPr/>
+        <p:txBody>
+          <a:bodyPr/>
+          <a:lstStyle/>
+          <a:p>
+            <a:pPr>
+              <a:lnSpc>
+                <a:spcPct val="150000"/>
+              </a:lnSpc>
+            </a:pPr>
+            <a:r>
+              <a:rPr lang="et-EE" sz="2000" noProof="0" dirty="0">
+                <a:ea typeface="Inter"/>
+              </a:rPr>
+              <a:t>Peab järgima algset eesmärki</a:t>
+            </a:r>
+          </a:p>
+          <a:p>
+            <a:pPr>
+              <a:lnSpc>
+                <a:spcPct val="150000"/>
+              </a:lnSpc>
+            </a:pPr>
+            <a:r>
+              <a:rPr lang="et-EE" sz="2000" noProof="0" dirty="0">
+                <a:ea typeface="Inter"/>
+              </a:rPr>
+              <a:t>Andmevahetuslepingu sõlmimine</a:t>
+            </a:r>
+          </a:p>
+          <a:p>
+            <a:pPr>
+              <a:lnSpc>
+                <a:spcPct val="150000"/>
+              </a:lnSpc>
+            </a:pPr>
+            <a:endParaRPr lang="et-EE" sz="2000" noProof="0" dirty="0">
+              <a:ea typeface="Inter"/>
+            </a:endParaRPr>
+          </a:p>
+        </p:txBody>
+      </p:sp>
+    </p:spTree>
+    <p:extLst>
+      <p:ext uri="{BB962C8B-B14F-4D97-AF65-F5344CB8AC3E}">
+        <p14:creationId xmlns:p14="http://schemas.microsoft.com/office/powerpoint/2010/main" val="3468310050"/>
+      </p:ext>
+    </p:extLst>
+  </p:cSld>
+  <p:clrMapOvr>
+    <a:masterClrMapping/>
+  </p:clrMapOvr>
+</p:sld>
+</file>
+
 <file path=ppt/slides/slide2.xml><?xml version="1.0" encoding="utf-8"?>
 <p:sld xmlns:a="http://schemas.openxmlformats.org/drawingml/2006/main" xmlns:r="http://schemas.openxmlformats.org/officeDocument/2006/relationships" xmlns:p="http://schemas.openxmlformats.org/presentationml/2006/main">
   <p:cSld>
@@ -35009,7 +34718,7 @@
             <p:ph sz="quarter" idx="10"/>
             <p:extLst>
               <p:ext uri="{D42A27DB-BD31-4B8C-83A1-F6EECF244321}">
-                <p14:modId xmlns:p14="http://schemas.microsoft.com/office/powerpoint/2010/main" val="3976283577"/>
+                <p14:modId xmlns:p14="http://schemas.microsoft.com/office/powerpoint/2010/main" val="3542064102"/>
               </p:ext>
             </p:extLst>
           </p:nvPr>
@@ -35389,17 +35098,17 @@
                           <a:effectLst/>
                           <a:latin typeface="Inter"/>
                         </a:rPr>
-                        <a:t>13:15 – 14:45 – Koolitus – </a:t>
+                        <a:t>13:15 – 14:45 – Koolitus </a:t>
                       </a:r>
                       <a:r>
-                        <a:rPr lang="et-EE" sz="2400" b="0" i="0" u="none" strike="noStrike" noProof="0" dirty="0">
+                        <a:rPr lang="et-EE" sz="2400" b="0" i="0" noProof="0">
                           <a:solidFill>
                             <a:srgbClr val="121212"/>
                           </a:solidFill>
                           <a:effectLst/>
                           <a:latin typeface="Inter"/>
                         </a:rPr>
-                        <a:t>Lõputööde teemade arutelu</a:t>
+                        <a:t>– </a:t>
                       </a:r>
                       <a:endParaRPr lang="et-EE" b="0" i="0" noProof="0" dirty="0">
                         <a:solidFill>
@@ -35640,129 +35349,6 @@
 </file>
 
 <file path=ppt/slides/slide20.xml><?xml version="1.0" encoding="utf-8"?>
-<p:sld xmlns:a="http://schemas.openxmlformats.org/drawingml/2006/main" xmlns:r="http://schemas.openxmlformats.org/officeDocument/2006/relationships" xmlns:p="http://schemas.openxmlformats.org/presentationml/2006/main">
-  <p:cSld>
-    <p:spTree>
-      <p:nvGrpSpPr>
-        <p:cNvPr id="1" name="">
-          <a:extLst>
-            <a:ext uri="{FF2B5EF4-FFF2-40B4-BE49-F238E27FC236}">
-              <a16:creationId xmlns:a16="http://schemas.microsoft.com/office/drawing/2014/main" id="{B39AA82F-17B2-0B84-AACA-870316873AE2}"/>
-            </a:ext>
-          </a:extLst>
-        </p:cNvPr>
-        <p:cNvGrpSpPr/>
-        <p:nvPr/>
-      </p:nvGrpSpPr>
-      <p:grpSpPr>
-        <a:xfrm>
-          <a:off x="0" y="0"/>
-          <a:ext cx="0" cy="0"/>
-          <a:chOff x="0" y="0"/>
-          <a:chExt cx="0" cy="0"/>
-        </a:xfrm>
-      </p:grpSpPr>
-      <p:sp>
-        <p:nvSpPr>
-          <p:cNvPr id="2" name="Title 1">
-            <a:extLst>
-              <a:ext uri="{FF2B5EF4-FFF2-40B4-BE49-F238E27FC236}">
-                <a16:creationId xmlns:a16="http://schemas.microsoft.com/office/drawing/2014/main" id="{2EF53EA2-150D-D910-85D4-CCE940301878}"/>
-              </a:ext>
-            </a:extLst>
-          </p:cNvPr>
-          <p:cNvSpPr>
-            <a:spLocks noGrp="1"/>
-          </p:cNvSpPr>
-          <p:nvPr>
-            <p:ph type="ctrTitle"/>
-          </p:nvPr>
-        </p:nvSpPr>
-        <p:spPr/>
-        <p:txBody>
-          <a:bodyPr/>
-          <a:lstStyle/>
-          <a:p>
-            <a:r>
-              <a:rPr lang="et-EE" sz="2800" noProof="0" dirty="0"/>
-              <a:t>Organisatsioonivälistele andmetele juurdepääs</a:t>
-            </a:r>
-            <a:endParaRPr lang="et-EE" noProof="0" dirty="0"/>
-          </a:p>
-        </p:txBody>
-      </p:sp>
-      <p:sp>
-        <p:nvSpPr>
-          <p:cNvPr id="3" name="Content Placeholder 2">
-            <a:extLst>
-              <a:ext uri="{FF2B5EF4-FFF2-40B4-BE49-F238E27FC236}">
-                <a16:creationId xmlns:a16="http://schemas.microsoft.com/office/drawing/2014/main" id="{C7BB5AB7-7CAF-E94F-6970-A27EFE3934C9}"/>
-              </a:ext>
-            </a:extLst>
-          </p:cNvPr>
-          <p:cNvSpPr>
-            <a:spLocks noGrp="1"/>
-          </p:cNvSpPr>
-          <p:nvPr>
-            <p:ph sz="quarter" idx="10"/>
-          </p:nvPr>
-        </p:nvSpPr>
-        <p:spPr/>
-        <p:txBody>
-          <a:bodyPr/>
-          <a:lstStyle/>
-          <a:p>
-            <a:pPr>
-              <a:lnSpc>
-                <a:spcPct val="150000"/>
-              </a:lnSpc>
-            </a:pPr>
-            <a:r>
-              <a:rPr lang="et-EE" sz="2000" noProof="0" dirty="0">
-                <a:ea typeface="Inter"/>
-              </a:rPr>
-              <a:t>Peab järgima algset eesmärki</a:t>
-            </a:r>
-          </a:p>
-          <a:p>
-            <a:pPr>
-              <a:lnSpc>
-                <a:spcPct val="150000"/>
-              </a:lnSpc>
-            </a:pPr>
-            <a:r>
-              <a:rPr lang="et-EE" sz="2000" noProof="0" dirty="0">
-                <a:ea typeface="Inter"/>
-              </a:rPr>
-              <a:t>Andmevahetuslepingu sõlmimine</a:t>
-            </a:r>
-          </a:p>
-          <a:p>
-            <a:pPr>
-              <a:lnSpc>
-                <a:spcPct val="150000"/>
-              </a:lnSpc>
-            </a:pPr>
-            <a:endParaRPr lang="et-EE" sz="2000" noProof="0" dirty="0">
-              <a:ea typeface="Inter"/>
-            </a:endParaRPr>
-          </a:p>
-        </p:txBody>
-      </p:sp>
-    </p:spTree>
-    <p:extLst>
-      <p:ext uri="{BB962C8B-B14F-4D97-AF65-F5344CB8AC3E}">
-        <p14:creationId xmlns:p14="http://schemas.microsoft.com/office/powerpoint/2010/main" val="3468310050"/>
-      </p:ext>
-    </p:extLst>
-  </p:cSld>
-  <p:clrMapOvr>
-    <a:masterClrMapping/>
-  </p:clrMapOvr>
-</p:sld>
-</file>
-
-<file path=ppt/slides/slide21.xml><?xml version="1.0" encoding="utf-8"?>
 <p:sld xmlns:a="http://schemas.openxmlformats.org/drawingml/2006/main" xmlns:r="http://schemas.openxmlformats.org/officeDocument/2006/relationships" xmlns:p="http://schemas.openxmlformats.org/presentationml/2006/main">
   <p:cSld>
     <p:spTree>
@@ -35953,7 +35539,7 @@
 </p:sld>
 </file>
 
-<file path=ppt/slides/slide22.xml><?xml version="1.0" encoding="utf-8"?>
+<file path=ppt/slides/slide21.xml><?xml version="1.0" encoding="utf-8"?>
 <p:sld xmlns:a="http://schemas.openxmlformats.org/drawingml/2006/main" xmlns:r="http://schemas.openxmlformats.org/officeDocument/2006/relationships" xmlns:p="http://schemas.openxmlformats.org/presentationml/2006/main">
   <p:cSld>
     <p:spTree>
@@ -36156,7 +35742,7 @@
 </p:sld>
 </file>
 
-<file path=ppt/slides/slide23.xml><?xml version="1.0" encoding="utf-8"?>
+<file path=ppt/slides/slide22.xml><?xml version="1.0" encoding="utf-8"?>
 <p:sld xmlns:a="http://schemas.openxmlformats.org/drawingml/2006/main" xmlns:r="http://schemas.openxmlformats.org/officeDocument/2006/relationships" xmlns:p="http://schemas.openxmlformats.org/presentationml/2006/main">
   <p:cSld>
     <p:spTree>
@@ -36269,7 +35855,7 @@
 </p:sld>
 </file>
 
-<file path=ppt/slides/slide24.xml><?xml version="1.0" encoding="utf-8"?>
+<file path=ppt/slides/slide23.xml><?xml version="1.0" encoding="utf-8"?>
 <p:sld xmlns:a="http://schemas.openxmlformats.org/drawingml/2006/main" xmlns:r="http://schemas.openxmlformats.org/officeDocument/2006/relationships" xmlns:p="http://schemas.openxmlformats.org/presentationml/2006/main">
   <p:cSld>
     <p:spTree>
@@ -36676,7 +36262,7 @@
 </p:sld>
 </file>
 
-<file path=ppt/slides/slide25.xml><?xml version="1.0" encoding="utf-8"?>
+<file path=ppt/slides/slide24.xml><?xml version="1.0" encoding="utf-8"?>
 <p:sld xmlns:a="http://schemas.openxmlformats.org/drawingml/2006/main" xmlns:r="http://schemas.openxmlformats.org/officeDocument/2006/relationships" xmlns:p="http://schemas.openxmlformats.org/presentationml/2006/main">
   <p:cSld>
     <p:spTree>
@@ -36778,7 +36364,7 @@
 </p:sld>
 </file>
 
-<file path=ppt/slides/slide26.xml><?xml version="1.0" encoding="utf-8"?>
+<file path=ppt/slides/slide25.xml><?xml version="1.0" encoding="utf-8"?>
 <p:sld xmlns:a="http://schemas.openxmlformats.org/drawingml/2006/main" xmlns:r="http://schemas.openxmlformats.org/officeDocument/2006/relationships" xmlns:p="http://schemas.openxmlformats.org/presentationml/2006/main">
   <p:cSld>
     <p:spTree>
@@ -36951,7 +36537,7 @@
 </p:sld>
 </file>
 
-<file path=ppt/slides/slide27.xml><?xml version="1.0" encoding="utf-8"?>
+<file path=ppt/slides/slide26.xml><?xml version="1.0" encoding="utf-8"?>
 <p:sld xmlns:a="http://schemas.openxmlformats.org/drawingml/2006/main" xmlns:r="http://schemas.openxmlformats.org/officeDocument/2006/relationships" xmlns:p="http://schemas.openxmlformats.org/presentationml/2006/main">
   <p:cSld>
     <p:spTree>
@@ -37080,7 +36666,7 @@
 </p:sld>
 </file>
 
-<file path=ppt/slides/slide28.xml><?xml version="1.0" encoding="utf-8"?>
+<file path=ppt/slides/slide27.xml><?xml version="1.0" encoding="utf-8"?>
 <p:sld xmlns:a="http://schemas.openxmlformats.org/drawingml/2006/main" xmlns:r="http://schemas.openxmlformats.org/officeDocument/2006/relationships" xmlns:p="http://schemas.openxmlformats.org/presentationml/2006/main">
   <p:cSld>
     <p:spTree>
@@ -37193,7 +36779,7 @@
 </p:sld>
 </file>
 
-<file path=ppt/slides/slide29.xml><?xml version="1.0" encoding="utf-8"?>
+<file path=ppt/slides/slide28.xml><?xml version="1.0" encoding="utf-8"?>
 <p:sld xmlns:a="http://schemas.openxmlformats.org/drawingml/2006/main" xmlns:r="http://schemas.openxmlformats.org/officeDocument/2006/relationships" xmlns:p="http://schemas.openxmlformats.org/presentationml/2006/main">
   <p:cSld>
     <p:spTree>
@@ -41113,12 +40699,21 @@
 </file>
 
 <file path=customXml/item1.xml><?xml version="1.0" encoding="utf-8"?>
+<?mso-contentType ?>
+<FormTemplates xmlns="http://schemas.microsoft.com/sharepoint/v3/contenttype/forms">
+  <Display>DocumentLibraryForm</Display>
+  <Edit>DocumentLibraryForm</Edit>
+  <New>DocumentLibraryForm</New>
+</FormTemplates>
+</file>
+
+<file path=customXml/item2.xml><?xml version="1.0" encoding="utf-8"?>
 <p:properties xmlns:p="http://schemas.microsoft.com/office/2006/metadata/properties" xmlns:xsi="http://www.w3.org/2001/XMLSchema-instance" xmlns:pc="http://schemas.microsoft.com/office/infopath/2007/PartnerControls">
   <documentManagement/>
 </p:properties>
 </file>
 
-<file path=customXml/item2.xml><?xml version="1.0" encoding="utf-8"?>
+<file path=customXml/item3.xml><?xml version="1.0" encoding="utf-8"?>
 <ct:contentTypeSchema xmlns:ct="http://schemas.microsoft.com/office/2006/metadata/contentType" xmlns:ma="http://schemas.microsoft.com/office/2006/metadata/properties/metaAttributes" ct:_="" ma:_="" ma:contentTypeName="Document" ma:contentTypeID="0x010100C4D27B8FA8976546BCD79313C588588D" ma:contentTypeVersion="8" ma:contentTypeDescription="Create a new document." ma:contentTypeScope="" ma:versionID="a112c56f6fe148a79025c76584832af0">
   <xsd:schema xmlns:xsd="http://www.w3.org/2001/XMLSchema" xmlns:xs="http://www.w3.org/2001/XMLSchema" xmlns:p="http://schemas.microsoft.com/office/2006/metadata/properties" xmlns:ns2="a1a2d923-8fea-42f1-bd41-9cdfff65694e" targetNamespace="http://schemas.microsoft.com/office/2006/metadata/properties" ma:root="true" ma:fieldsID="97c8655d467eaa9470a714421e7268c0" ns2:_="">
     <xsd:import namespace="a1a2d923-8fea-42f1-bd41-9cdfff65694e"/>
@@ -41286,16 +40881,15 @@
 </ct:contentTypeSchema>
 </file>
 
-<file path=customXml/item3.xml><?xml version="1.0" encoding="utf-8"?>
-<?mso-contentType ?>
-<FormTemplates xmlns="http://schemas.microsoft.com/sharepoint/v3/contenttype/forms">
-  <Display>DocumentLibraryForm</Display>
-  <Edit>DocumentLibraryForm</Edit>
-  <New>DocumentLibraryForm</New>
-</FormTemplates>
+<file path=customXml/itemProps1.xml><?xml version="1.0" encoding="utf-8"?>
+<ds:datastoreItem xmlns:ds="http://schemas.openxmlformats.org/officeDocument/2006/customXml" ds:itemID="{9DC439CA-6F1C-4005-ACA6-A52E04DEE0A7}">
+  <ds:schemaRefs>
+    <ds:schemaRef ds:uri="http://schemas.microsoft.com/sharepoint/v3/contenttype/forms"/>
+  </ds:schemaRefs>
+</ds:datastoreItem>
 </file>
 
-<file path=customXml/itemProps1.xml><?xml version="1.0" encoding="utf-8"?>
+<file path=customXml/itemProps2.xml><?xml version="1.0" encoding="utf-8"?>
 <ds:datastoreItem xmlns:ds="http://schemas.openxmlformats.org/officeDocument/2006/customXml" ds:itemID="{5BDF4908-A52A-47DD-A794-6E02D71942FC}">
   <ds:schemaRefs>
     <ds:schemaRef ds:uri="http://schemas.microsoft.com/office/2006/metadata/properties"/>
@@ -41304,7 +40898,7 @@
 </ds:datastoreItem>
 </file>
 
-<file path=customXml/itemProps2.xml><?xml version="1.0" encoding="utf-8"?>
+<file path=customXml/itemProps3.xml><?xml version="1.0" encoding="utf-8"?>
 <ds:datastoreItem xmlns:ds="http://schemas.openxmlformats.org/officeDocument/2006/customXml" ds:itemID="{9CF4F972-2392-44D0-AA45-41AC4FDC4A59}">
   <ds:schemaRefs>
     <ds:schemaRef ds:uri="a1a2d923-8fea-42f1-bd41-9cdfff65694e"/>
@@ -41320,12 +40914,4 @@
     <ds:schemaRef ds:uri="http://www.w3.org/2001/XMLSchema"/>
   </ds:schemaRefs>
 </ds:datastoreItem>
-</file>
-
-<file path=customXml/itemProps3.xml><?xml version="1.0" encoding="utf-8"?>
-<ds:datastoreItem xmlns:ds="http://schemas.openxmlformats.org/officeDocument/2006/customXml" ds:itemID="{9DC439CA-6F1C-4005-ACA6-A52E04DEE0A7}">
-  <ds:schemaRefs>
-    <ds:schemaRef ds:uri="http://schemas.microsoft.com/sharepoint/v3/contenttype/forms"/>
-  </ds:schemaRefs>
-</ds:datastoreItem>
 </file>
--- a/Materjalid/Day9 Andmekorraldus Dim Fakt/9-paev-andmetarkus-esitlus.pptx
+++ b/Materjalid/Day9 Andmekorraldus Dim Fakt/9-paev-andmetarkus-esitlus.pptx
@@ -27,9 +27,9 @@
     <p:sldId id="452" r:id="rId18"/>
     <p:sldId id="453" r:id="rId19"/>
     <p:sldId id="454" r:id="rId20"/>
-    <p:sldId id="496" r:id="rId21"/>
-    <p:sldId id="500" r:id="rId22"/>
-    <p:sldId id="510" r:id="rId23"/>
+    <p:sldId id="661" r:id="rId21"/>
+    <p:sldId id="496" r:id="rId22"/>
+    <p:sldId id="662" r:id="rId23"/>
     <p:sldId id="502" r:id="rId24"/>
     <p:sldId id="497" r:id="rId25"/>
     <p:sldId id="561" r:id="rId26"/>
@@ -62,7 +62,7 @@
       <p:boldItalic r:id="rId43"/>
     </p:embeddedFont>
     <p:embeddedFont>
-      <p:font typeface="Poppins SemiBold" panose="00000700000000000000" pitchFamily="2" charset="-70"/>
+      <p:font typeface="Poppins SemiBold" panose="00000700000000000000" pitchFamily="2" charset="0"/>
       <p:bold r:id="rId44"/>
       <p:boldItalic r:id="rId45"/>
     </p:embeddedFont>
@@ -2907,7 +2907,7 @@
           <a:p>
             <a:fld id="{F9D2AD6E-DEDD-49A0-A4BE-7A081A9112DA}" type="datetimeFigureOut">
               <a:rPr lang="en-US" smtClean="0"/>
-              <a:t>8/28/2026</a:t>
+              <a:t>9/3/2026</a:t>
             </a:fld>
             <a:endParaRPr lang="en-US"/>
           </a:p>
@@ -3083,7 +3083,7 @@
           </a:lstStyle>
           <a:p>
             <a:fld id="{2AF9C1A6-4321-41FA-B001-4140F0E2457F}" type="datetimeFigureOut">
-              <a:t>28.08.2026</a:t>
+              <a:t>9/3/2026</a:t>
             </a:fld>
             <a:endParaRPr lang="en-US"/>
           </a:p>
@@ -5075,462 +5075,6 @@
 </file>
 
 <file path=ppt/notesSlides/notesSlide5.xml><?xml version="1.0" encoding="utf-8"?>
-<p:notes xmlns:a="http://schemas.openxmlformats.org/drawingml/2006/main" xmlns:r="http://schemas.openxmlformats.org/officeDocument/2006/relationships" xmlns:p="http://schemas.openxmlformats.org/presentationml/2006/main">
-  <p:cSld>
-    <p:spTree>
-      <p:nvGrpSpPr>
-        <p:cNvPr id="1" name=""/>
-        <p:cNvGrpSpPr/>
-        <p:nvPr/>
-      </p:nvGrpSpPr>
-      <p:grpSpPr>
-        <a:xfrm>
-          <a:off x="0" y="0"/>
-          <a:ext cx="0" cy="0"/>
-          <a:chOff x="0" y="0"/>
-          <a:chExt cx="0" cy="0"/>
-        </a:xfrm>
-      </p:grpSpPr>
-      <p:sp>
-        <p:nvSpPr>
-          <p:cNvPr id="2" name="Slide Image Placeholder 1"/>
-          <p:cNvSpPr>
-            <a:spLocks noGrp="1" noRot="1" noChangeAspect="1"/>
-          </p:cNvSpPr>
-          <p:nvPr>
-            <p:ph type="sldImg"/>
-          </p:nvPr>
-        </p:nvSpPr>
-        <p:spPr/>
-      </p:sp>
-      <p:sp>
-        <p:nvSpPr>
-          <p:cNvPr id="3" name="Notes Placeholder 2"/>
-          <p:cNvSpPr>
-            <a:spLocks noGrp="1"/>
-          </p:cNvSpPr>
-          <p:nvPr>
-            <p:ph type="body" idx="1"/>
-          </p:nvPr>
-        </p:nvSpPr>
-        <p:spPr/>
-        <p:txBody>
-          <a:bodyPr/>
-          <a:lstStyle/>
-          <a:p>
-            <a:r>
-              <a:rPr lang="en-US" err="1">
-                <a:ea typeface="Calibri"/>
-                <a:cs typeface="Calibri"/>
-              </a:rPr>
-              <a:t>Seadusest</a:t>
-            </a:r>
-            <a:r>
-              <a:rPr lang="en-US">
-                <a:ea typeface="Calibri"/>
-                <a:cs typeface="Calibri"/>
-              </a:rPr>
-              <a:t> </a:t>
-            </a:r>
-            <a:r>
-              <a:rPr lang="en-US" err="1">
-                <a:ea typeface="Calibri"/>
-                <a:cs typeface="Calibri"/>
-              </a:rPr>
-              <a:t>tulenevad</a:t>
-            </a:r>
-            <a:r>
-              <a:rPr lang="en-US">
-                <a:ea typeface="Calibri"/>
-                <a:cs typeface="Calibri"/>
-              </a:rPr>
-              <a:t> </a:t>
-            </a:r>
-            <a:r>
-              <a:rPr lang="en-US" err="1">
-                <a:ea typeface="Calibri"/>
-                <a:cs typeface="Calibri"/>
-              </a:rPr>
-              <a:t>nõuded</a:t>
-            </a:r>
-            <a:r>
-              <a:rPr lang="en-US">
-                <a:ea typeface="Calibri"/>
-                <a:cs typeface="Calibri"/>
-              </a:rPr>
-              <a:t>, </a:t>
-            </a:r>
-            <a:r>
-              <a:rPr lang="en-US" err="1">
-                <a:ea typeface="Calibri"/>
-                <a:cs typeface="Calibri"/>
-              </a:rPr>
-              <a:t>ärisaladus</a:t>
-            </a:r>
-            <a:r>
-              <a:rPr lang="en-US">
-                <a:ea typeface="Calibri"/>
-                <a:cs typeface="Calibri"/>
-              </a:rPr>
-              <a:t>, </a:t>
-            </a:r>
-            <a:r>
-              <a:rPr lang="en-US" err="1">
-                <a:ea typeface="Calibri"/>
-                <a:cs typeface="Calibri"/>
-              </a:rPr>
-              <a:t>vajaduspõhine</a:t>
-            </a:r>
-            <a:r>
-              <a:rPr lang="en-US">
-                <a:ea typeface="Calibri"/>
-                <a:cs typeface="Calibri"/>
-              </a:rPr>
-              <a:t> (</a:t>
-            </a:r>
-            <a:r>
-              <a:rPr lang="en-US" err="1">
-                <a:ea typeface="Calibri"/>
-                <a:cs typeface="Calibri"/>
-              </a:rPr>
-              <a:t>minimaalsus</a:t>
-            </a:r>
-            <a:r>
-              <a:rPr lang="en-US">
-                <a:ea typeface="Calibri"/>
-                <a:cs typeface="Calibri"/>
-              </a:rPr>
-              <a:t>). Korra ja </a:t>
-            </a:r>
-            <a:r>
-              <a:rPr lang="en-US" err="1">
-                <a:ea typeface="Calibri"/>
-                <a:cs typeface="Calibri"/>
-              </a:rPr>
-              <a:t>selguse</a:t>
-            </a:r>
-            <a:r>
-              <a:rPr lang="en-US">
-                <a:ea typeface="Calibri"/>
-                <a:cs typeface="Calibri"/>
-              </a:rPr>
-              <a:t> </a:t>
-            </a:r>
-            <a:r>
-              <a:rPr lang="en-US" err="1">
-                <a:ea typeface="Calibri"/>
-                <a:cs typeface="Calibri"/>
-              </a:rPr>
-              <a:t>loomine</a:t>
-            </a:r>
-            <a:r>
-              <a:rPr lang="en-US">
-                <a:ea typeface="Calibri"/>
-                <a:cs typeface="Calibri"/>
-              </a:rPr>
-              <a:t>. </a:t>
-            </a:r>
-            <a:r>
-              <a:rPr lang="en-US" err="1">
-                <a:ea typeface="Calibri"/>
-                <a:cs typeface="Calibri"/>
-              </a:rPr>
-              <a:t>Ligipääsu</a:t>
-            </a:r>
-            <a:r>
-              <a:rPr lang="en-US">
-                <a:ea typeface="Calibri"/>
-                <a:cs typeface="Calibri"/>
-              </a:rPr>
-              <a:t> </a:t>
-            </a:r>
-            <a:r>
-              <a:rPr lang="en-US" err="1">
-                <a:ea typeface="Calibri"/>
-                <a:cs typeface="Calibri"/>
-              </a:rPr>
-              <a:t>tasandid</a:t>
-            </a:r>
-            <a:r>
-              <a:rPr lang="en-US">
-                <a:ea typeface="Calibri"/>
-                <a:cs typeface="Calibri"/>
-              </a:rPr>
-              <a:t> – </a:t>
-            </a:r>
-            <a:r>
-              <a:rPr lang="en-US" err="1">
-                <a:ea typeface="Calibri"/>
-                <a:cs typeface="Calibri"/>
-              </a:rPr>
-              <a:t>lugemine</a:t>
-            </a:r>
-            <a:r>
-              <a:rPr lang="en-US">
-                <a:ea typeface="Calibri"/>
-                <a:cs typeface="Calibri"/>
-              </a:rPr>
-              <a:t> vs </a:t>
-            </a:r>
-            <a:r>
-              <a:rPr lang="en-US" err="1">
-                <a:ea typeface="Calibri"/>
-                <a:cs typeface="Calibri"/>
-              </a:rPr>
-              <a:t>ülekirjutamine</a:t>
-            </a:r>
-            <a:r>
-              <a:rPr lang="en-US">
-                <a:ea typeface="Calibri"/>
-                <a:cs typeface="Calibri"/>
-              </a:rPr>
-              <a:t>.</a:t>
-            </a:r>
-          </a:p>
-        </p:txBody>
-      </p:sp>
-      <p:sp>
-        <p:nvSpPr>
-          <p:cNvPr id="4" name="Slide Number Placeholder 3"/>
-          <p:cNvSpPr>
-            <a:spLocks noGrp="1"/>
-          </p:cNvSpPr>
-          <p:nvPr>
-            <p:ph type="sldNum" sz="quarter" idx="5"/>
-          </p:nvPr>
-        </p:nvSpPr>
-        <p:spPr/>
-        <p:txBody>
-          <a:bodyPr/>
-          <a:lstStyle/>
-          <a:p>
-            <a:fld id="{46699514-027B-49BD-8B49-5054CA40ECF4}" type="slidenum">
-              <a:rPr lang="en-US"/>
-              <a:t>18</a:t>
-            </a:fld>
-            <a:endParaRPr lang="en-US"/>
-          </a:p>
-        </p:txBody>
-      </p:sp>
-    </p:spTree>
-    <p:extLst>
-      <p:ext uri="{BB962C8B-B14F-4D97-AF65-F5344CB8AC3E}">
-        <p14:creationId xmlns:p14="http://schemas.microsoft.com/office/powerpoint/2010/main" val="505597690"/>
-      </p:ext>
-    </p:extLst>
-  </p:cSld>
-  <p:clrMapOvr>
-    <a:masterClrMapping/>
-  </p:clrMapOvr>
-</p:notes>
-</file>
-
-<file path=ppt/notesSlides/notesSlide6.xml><?xml version="1.0" encoding="utf-8"?>
-<p:notes xmlns:a="http://schemas.openxmlformats.org/drawingml/2006/main" xmlns:r="http://schemas.openxmlformats.org/officeDocument/2006/relationships" xmlns:p="http://schemas.openxmlformats.org/presentationml/2006/main">
-  <p:cSld>
-    <p:spTree>
-      <p:nvGrpSpPr>
-        <p:cNvPr id="1" name="">
-          <a:extLst>
-            <a:ext uri="{FF2B5EF4-FFF2-40B4-BE49-F238E27FC236}">
-              <a16:creationId xmlns:a16="http://schemas.microsoft.com/office/drawing/2014/main" id="{63393919-F68A-68D7-18D2-9C7D1AEAD2E5}"/>
-            </a:ext>
-          </a:extLst>
-        </p:cNvPr>
-        <p:cNvGrpSpPr/>
-        <p:nvPr/>
-      </p:nvGrpSpPr>
-      <p:grpSpPr>
-        <a:xfrm>
-          <a:off x="0" y="0"/>
-          <a:ext cx="0" cy="0"/>
-          <a:chOff x="0" y="0"/>
-          <a:chExt cx="0" cy="0"/>
-        </a:xfrm>
-      </p:grpSpPr>
-      <p:sp>
-        <p:nvSpPr>
-          <p:cNvPr id="2" name="Slide Image Placeholder 1">
-            <a:extLst>
-              <a:ext uri="{FF2B5EF4-FFF2-40B4-BE49-F238E27FC236}">
-                <a16:creationId xmlns:a16="http://schemas.microsoft.com/office/drawing/2014/main" id="{6E1F1568-AF88-E680-C889-D4151EBEE67E}"/>
-              </a:ext>
-            </a:extLst>
-          </p:cNvPr>
-          <p:cNvSpPr>
-            <a:spLocks noGrp="1" noRot="1" noChangeAspect="1"/>
-          </p:cNvSpPr>
-          <p:nvPr>
-            <p:ph type="sldImg"/>
-          </p:nvPr>
-        </p:nvSpPr>
-        <p:spPr/>
-      </p:sp>
-      <p:sp>
-        <p:nvSpPr>
-          <p:cNvPr id="3" name="Notes Placeholder 2">
-            <a:extLst>
-              <a:ext uri="{FF2B5EF4-FFF2-40B4-BE49-F238E27FC236}">
-                <a16:creationId xmlns:a16="http://schemas.microsoft.com/office/drawing/2014/main" id="{C8F4B832-FE6A-97CC-5045-57E27E1DD8A7}"/>
-              </a:ext>
-            </a:extLst>
-          </p:cNvPr>
-          <p:cNvSpPr>
-            <a:spLocks noGrp="1"/>
-          </p:cNvSpPr>
-          <p:nvPr>
-            <p:ph type="body" idx="1"/>
-          </p:nvPr>
-        </p:nvSpPr>
-        <p:spPr/>
-        <p:txBody>
-          <a:bodyPr/>
-          <a:lstStyle/>
-          <a:p>
-            <a:r>
-              <a:rPr lang="en-US" err="1">
-                <a:ea typeface="Calibri"/>
-                <a:cs typeface="Calibri"/>
-              </a:rPr>
-              <a:t>Seadusest</a:t>
-            </a:r>
-            <a:r>
-              <a:rPr lang="en-US">
-                <a:ea typeface="Calibri"/>
-                <a:cs typeface="Calibri"/>
-              </a:rPr>
-              <a:t> </a:t>
-            </a:r>
-            <a:r>
-              <a:rPr lang="en-US" err="1">
-                <a:ea typeface="Calibri"/>
-                <a:cs typeface="Calibri"/>
-              </a:rPr>
-              <a:t>tulenevad</a:t>
-            </a:r>
-            <a:r>
-              <a:rPr lang="en-US">
-                <a:ea typeface="Calibri"/>
-                <a:cs typeface="Calibri"/>
-              </a:rPr>
-              <a:t> </a:t>
-            </a:r>
-            <a:r>
-              <a:rPr lang="en-US" err="1">
-                <a:ea typeface="Calibri"/>
-                <a:cs typeface="Calibri"/>
-              </a:rPr>
-              <a:t>nõuded</a:t>
-            </a:r>
-            <a:r>
-              <a:rPr lang="en-US">
-                <a:ea typeface="Calibri"/>
-                <a:cs typeface="Calibri"/>
-              </a:rPr>
-              <a:t>, </a:t>
-            </a:r>
-            <a:r>
-              <a:rPr lang="en-US" err="1">
-                <a:ea typeface="Calibri"/>
-                <a:cs typeface="Calibri"/>
-              </a:rPr>
-              <a:t>ärisaladus</a:t>
-            </a:r>
-            <a:r>
-              <a:rPr lang="en-US">
-                <a:ea typeface="Calibri"/>
-                <a:cs typeface="Calibri"/>
-              </a:rPr>
-              <a:t>, </a:t>
-            </a:r>
-            <a:r>
-              <a:rPr lang="en-US" err="1">
-                <a:ea typeface="Calibri"/>
-                <a:cs typeface="Calibri"/>
-              </a:rPr>
-              <a:t>vajaduspõhine</a:t>
-            </a:r>
-            <a:r>
-              <a:rPr lang="en-US">
-                <a:ea typeface="Calibri"/>
-                <a:cs typeface="Calibri"/>
-              </a:rPr>
-              <a:t> (</a:t>
-            </a:r>
-            <a:r>
-              <a:rPr lang="en-US" err="1">
-                <a:ea typeface="Calibri"/>
-                <a:cs typeface="Calibri"/>
-              </a:rPr>
-              <a:t>minimaalsus</a:t>
-            </a:r>
-            <a:r>
-              <a:rPr lang="en-US">
-                <a:ea typeface="Calibri"/>
-                <a:cs typeface="Calibri"/>
-              </a:rPr>
-              <a:t>). Korra </a:t>
-            </a:r>
-            <a:r>
-              <a:rPr lang="en-US" err="1">
-                <a:ea typeface="Calibri"/>
-                <a:cs typeface="Calibri"/>
-              </a:rPr>
-              <a:t>loomine</a:t>
-            </a:r>
-            <a:r>
-              <a:rPr lang="en-US">
-                <a:ea typeface="Calibri"/>
-                <a:cs typeface="Calibri"/>
-              </a:rPr>
-              <a:t>.</a:t>
-            </a:r>
-          </a:p>
-        </p:txBody>
-      </p:sp>
-      <p:sp>
-        <p:nvSpPr>
-          <p:cNvPr id="4" name="Slide Number Placeholder 3">
-            <a:extLst>
-              <a:ext uri="{FF2B5EF4-FFF2-40B4-BE49-F238E27FC236}">
-                <a16:creationId xmlns:a16="http://schemas.microsoft.com/office/drawing/2014/main" id="{90F95FD5-4426-908B-7AD7-B6C93902F0F2}"/>
-              </a:ext>
-            </a:extLst>
-          </p:cNvPr>
-          <p:cNvSpPr>
-            <a:spLocks noGrp="1"/>
-          </p:cNvSpPr>
-          <p:nvPr>
-            <p:ph type="sldNum" sz="quarter" idx="5"/>
-          </p:nvPr>
-        </p:nvSpPr>
-        <p:spPr/>
-        <p:txBody>
-          <a:bodyPr/>
-          <a:lstStyle/>
-          <a:p>
-            <a:fld id="{46699514-027B-49BD-8B49-5054CA40ECF4}" type="slidenum">
-              <a:rPr lang="en-US"/>
-              <a:t>19</a:t>
-            </a:fld>
-            <a:endParaRPr lang="en-US"/>
-          </a:p>
-        </p:txBody>
-      </p:sp>
-    </p:spTree>
-    <p:extLst>
-      <p:ext uri="{BB962C8B-B14F-4D97-AF65-F5344CB8AC3E}">
-        <p14:creationId xmlns:p14="http://schemas.microsoft.com/office/powerpoint/2010/main" val="1160268032"/>
-      </p:ext>
-    </p:extLst>
-  </p:cSld>
-  <p:clrMapOvr>
-    <a:masterClrMapping/>
-  </p:clrMapOvr>
-</p:notes>
-</file>
-
-<file path=ppt/notesSlides/notesSlide7.xml><?xml version="1.0" encoding="utf-8"?>
 <p:notes xmlns:a="http://schemas.openxmlformats.org/drawingml/2006/main" xmlns:r="http://schemas.openxmlformats.org/officeDocument/2006/relationships" xmlns:p="http://schemas.openxmlformats.org/presentationml/2006/main">
   <p:cSld>
     <p:spTree>
@@ -16741,7 +16285,7 @@
           <a:p>
             <a:fld id="{DE840A40-73C8-4048-8140-49F5D65BB431}" type="datetimeFigureOut">
               <a:rPr lang="et-EE" smtClean="0"/>
-              <a:t>28.08.2026</a:t>
+              <a:t>03.09.2026</a:t>
             </a:fld>
             <a:endParaRPr lang="et-EE"/>
           </a:p>
@@ -34230,6 +33774,102 @@
   <p:cSld>
     <p:spTree>
       <p:nvGrpSpPr>
+        <p:cNvPr id="1" name=""/>
+        <p:cNvGrpSpPr/>
+        <p:nvPr/>
+      </p:nvGrpSpPr>
+      <p:grpSpPr>
+        <a:xfrm>
+          <a:off x="0" y="0"/>
+          <a:ext cx="0" cy="0"/>
+          <a:chOff x="0" y="0"/>
+          <a:chExt cx="0" cy="0"/>
+        </a:xfrm>
+      </p:grpSpPr>
+      <p:sp>
+        <p:nvSpPr>
+          <p:cNvPr id="2" name="Title 1">
+            <a:extLst>
+              <a:ext uri="{FF2B5EF4-FFF2-40B4-BE49-F238E27FC236}">
+                <a16:creationId xmlns:a16="http://schemas.microsoft.com/office/drawing/2014/main" id="{A1941F65-24B0-ED81-7E3E-C573AF90F405}"/>
+              </a:ext>
+            </a:extLst>
+          </p:cNvPr>
+          <p:cNvSpPr>
+            <a:spLocks noGrp="1"/>
+          </p:cNvSpPr>
+          <p:nvPr>
+            <p:ph type="ctrTitle"/>
+          </p:nvPr>
+        </p:nvSpPr>
+        <p:spPr/>
+        <p:txBody>
+          <a:bodyPr/>
+          <a:lstStyle/>
+          <a:p>
+            <a:r>
+              <a:rPr lang="en-GB" dirty="0"/>
+              <a:t>Measure </a:t>
+            </a:r>
+            <a:r>
+              <a:rPr lang="en-GB" dirty="0" err="1"/>
+              <a:t>tabeli</a:t>
+            </a:r>
+            <a:r>
+              <a:rPr lang="en-GB" dirty="0"/>
+              <a:t> </a:t>
+            </a:r>
+            <a:r>
+              <a:rPr lang="en-GB" dirty="0" err="1"/>
+              <a:t>loomine</a:t>
+            </a:r>
+            <a:endParaRPr lang="en-GB" dirty="0"/>
+          </a:p>
+        </p:txBody>
+      </p:sp>
+      <p:sp>
+        <p:nvSpPr>
+          <p:cNvPr id="3" name="Content Placeholder 2">
+            <a:extLst>
+              <a:ext uri="{FF2B5EF4-FFF2-40B4-BE49-F238E27FC236}">
+                <a16:creationId xmlns:a16="http://schemas.microsoft.com/office/drawing/2014/main" id="{D0F23193-BA49-A3CA-65CF-A2EEF2E9D1DA}"/>
+              </a:ext>
+            </a:extLst>
+          </p:cNvPr>
+          <p:cNvSpPr>
+            <a:spLocks noGrp="1"/>
+          </p:cNvSpPr>
+          <p:nvPr>
+            <p:ph sz="quarter" idx="10"/>
+          </p:nvPr>
+        </p:nvSpPr>
+        <p:spPr/>
+        <p:txBody>
+          <a:bodyPr/>
+          <a:lstStyle/>
+          <a:p>
+            <a:endParaRPr lang="en-GB" dirty="0"/>
+          </a:p>
+        </p:txBody>
+      </p:sp>
+    </p:spTree>
+    <p:extLst>
+      <p:ext uri="{BB962C8B-B14F-4D97-AF65-F5344CB8AC3E}">
+        <p14:creationId xmlns:p14="http://schemas.microsoft.com/office/powerpoint/2010/main" val="3828397638"/>
+      </p:ext>
+    </p:extLst>
+  </p:cSld>
+  <p:clrMapOvr>
+    <a:masterClrMapping/>
+  </p:clrMapOvr>
+</p:sld>
+</file>
+
+<file path=ppt/slides/slide18.xml><?xml version="1.0" encoding="utf-8"?>
+<p:sld xmlns:a="http://schemas.openxmlformats.org/drawingml/2006/main" xmlns:r="http://schemas.openxmlformats.org/officeDocument/2006/relationships" xmlns:p="http://schemas.openxmlformats.org/presentationml/2006/main">
+  <p:cSld>
+    <p:spTree>
+      <p:nvGrpSpPr>
         <p:cNvPr id="1" name="">
           <a:extLst>
             <a:ext uri="{FF2B5EF4-FFF2-40B4-BE49-F238E27FC236}">
@@ -34271,8 +33911,21 @@
           <a:p>
             <a:r>
               <a:rPr lang="et-EE" sz="2800" noProof="0" dirty="0"/>
-              <a:t>Ülesanne - loo andmete kirjeldus tabelile D_PRODUCT</a:t>
-            </a:r>
+              <a:t>Ülesanne - loo andmete kirjeldus</a:t>
+            </a:r>
+            <a:r>
+              <a:rPr lang="en-GB" sz="2800" noProof="0" dirty="0"/>
+              <a:t>ed</a:t>
+            </a:r>
+            <a:r>
+              <a:rPr lang="et-EE" sz="2800" noProof="0" dirty="0"/>
+              <a:t> tabeli</a:t>
+            </a:r>
+            <a:r>
+              <a:rPr lang="en-GB" sz="2800" noProof="0" dirty="0"/>
+              <a:t>tele</a:t>
+            </a:r>
+            <a:endParaRPr lang="et-EE" sz="2800" noProof="0" dirty="0"/>
           </a:p>
         </p:txBody>
       </p:sp>
@@ -34302,6 +33955,70 @@
                 <a:spcPct val="150000"/>
               </a:lnSpc>
             </a:pPr>
+            <a:r>
+              <a:rPr lang="en-GB" sz="2000" noProof="0" dirty="0" err="1">
+                <a:ea typeface="Inter"/>
+              </a:rPr>
+              <a:t>Võta</a:t>
+            </a:r>
+            <a:r>
+              <a:rPr lang="en-GB" sz="2000" noProof="0" dirty="0">
+                <a:ea typeface="Inter"/>
+              </a:rPr>
+              <a:t> see fail, </a:t>
+            </a:r>
+            <a:r>
+              <a:rPr lang="en-GB" sz="2000" noProof="0" dirty="0" err="1">
+                <a:ea typeface="Inter"/>
+              </a:rPr>
+              <a:t>mille</a:t>
+            </a:r>
+            <a:r>
+              <a:rPr lang="en-GB" sz="2000" noProof="0" dirty="0">
+                <a:ea typeface="Inter"/>
+              </a:rPr>
+              <a:t> </a:t>
+            </a:r>
+            <a:r>
+              <a:rPr lang="en-GB" sz="2000" noProof="0" dirty="0" err="1">
+                <a:ea typeface="Inter"/>
+              </a:rPr>
+              <a:t>tegite</a:t>
+            </a:r>
+            <a:r>
+              <a:rPr lang="en-GB" sz="2000" noProof="0" dirty="0">
+                <a:ea typeface="Inter"/>
+              </a:rPr>
+              <a:t> </a:t>
+            </a:r>
+            <a:r>
+              <a:rPr lang="en-GB" sz="2000" noProof="0" dirty="0" err="1">
+                <a:ea typeface="Inter"/>
+              </a:rPr>
+              <a:t>päeval</a:t>
+            </a:r>
+            <a:r>
+              <a:rPr lang="en-GB" sz="2000" noProof="0" dirty="0">
+                <a:ea typeface="Inter"/>
+              </a:rPr>
+              <a:t> 3-4 </a:t>
+            </a:r>
+            <a:r>
+              <a:rPr lang="en-GB" sz="2000" noProof="0" dirty="0" err="1">
+                <a:ea typeface="Inter"/>
+              </a:rPr>
+              <a:t>ülesandena</a:t>
+            </a:r>
+            <a:endParaRPr lang="en-GB" sz="2000" noProof="0" dirty="0">
+              <a:ea typeface="Inter"/>
+            </a:endParaRPr>
+          </a:p>
+          <a:p>
+            <a:pPr>
+              <a:lnSpc>
+                <a:spcPct val="150000"/>
+              </a:lnSpc>
+            </a:pPr>
             <a:endParaRPr lang="et-EE" sz="2000" noProof="0" dirty="0">
               <a:ea typeface="Inter"/>
             </a:endParaRPr>
@@ -34312,6 +34029,92 @@
                 <a:spcPct val="150000"/>
               </a:lnSpc>
             </a:pPr>
+            <a:r>
+              <a:rPr lang="en-GB" sz="2000" dirty="0" err="1">
+                <a:ea typeface="Inter"/>
+              </a:rPr>
+              <a:t>Dim_product</a:t>
+            </a:r>
+            <a:endParaRPr lang="en-GB" sz="2000" dirty="0">
+              <a:ea typeface="Inter"/>
+            </a:endParaRPr>
+          </a:p>
+          <a:p>
+            <a:pPr>
+              <a:lnSpc>
+                <a:spcPct val="150000"/>
+              </a:lnSpc>
+            </a:pPr>
+            <a:r>
+              <a:rPr lang="en-GB" sz="2000" noProof="0" dirty="0" err="1">
+                <a:ea typeface="Inter"/>
+              </a:rPr>
+              <a:t>Dim_date</a:t>
+            </a:r>
+            <a:endParaRPr lang="en-GB" sz="2000" noProof="0" dirty="0">
+              <a:ea typeface="Inter"/>
+            </a:endParaRPr>
+          </a:p>
+          <a:p>
+            <a:pPr>
+              <a:lnSpc>
+                <a:spcPct val="150000"/>
+              </a:lnSpc>
+            </a:pPr>
+            <a:r>
+              <a:rPr lang="en-GB" sz="2000" dirty="0" err="1">
+                <a:ea typeface="Inter"/>
+              </a:rPr>
+              <a:t>Dim_Salesrep</a:t>
+            </a:r>
+            <a:endParaRPr lang="en-GB" sz="2000" dirty="0">
+              <a:ea typeface="Inter"/>
+            </a:endParaRPr>
+          </a:p>
+          <a:p>
+            <a:pPr>
+              <a:lnSpc>
+                <a:spcPct val="150000"/>
+              </a:lnSpc>
+            </a:pPr>
+            <a:r>
+              <a:rPr lang="en-GB" sz="2000" noProof="0" dirty="0" err="1">
+                <a:ea typeface="Inter"/>
+              </a:rPr>
+              <a:t>Dim_Region</a:t>
+            </a:r>
+            <a:endParaRPr lang="en-GB" sz="2000" noProof="0" dirty="0">
+              <a:ea typeface="Inter"/>
+            </a:endParaRPr>
+          </a:p>
+          <a:p>
+            <a:pPr>
+              <a:lnSpc>
+                <a:spcPct val="150000"/>
+              </a:lnSpc>
+            </a:pPr>
+            <a:r>
+              <a:rPr lang="en-GB" sz="2000" dirty="0" err="1">
+                <a:ea typeface="Inter"/>
+              </a:rPr>
+              <a:t>Fact_sales</a:t>
+            </a:r>
+            <a:endParaRPr lang="en-GB" sz="2000" dirty="0">
+              <a:ea typeface="Inter"/>
+            </a:endParaRPr>
+          </a:p>
+          <a:p>
+            <a:pPr>
+              <a:lnSpc>
+                <a:spcPct val="150000"/>
+              </a:lnSpc>
+            </a:pPr>
+            <a:r>
+              <a:rPr lang="en-GB" sz="2000" noProof="0" dirty="0" err="1">
+                <a:ea typeface="Inter"/>
+              </a:rPr>
+              <a:t>Fact_budget</a:t>
+            </a:r>
             <a:endParaRPr lang="et-EE" sz="2000" noProof="0" dirty="0">
               <a:ea typeface="Inter"/>
             </a:endParaRPr>
@@ -34331,18 +34134,12 @@
 </p:sld>
 </file>
 
-<file path=ppt/slides/slide18.xml><?xml version="1.0" encoding="utf-8"?>
+<file path=ppt/slides/slide19.xml><?xml version="1.0" encoding="utf-8"?>
 <p:sld xmlns:a="http://schemas.openxmlformats.org/drawingml/2006/main" xmlns:r="http://schemas.openxmlformats.org/officeDocument/2006/relationships" xmlns:p="http://schemas.openxmlformats.org/presentationml/2006/main">
   <p:cSld>
     <p:spTree>
       <p:nvGrpSpPr>
-        <p:cNvPr id="1" name="">
-          <a:extLst>
-            <a:ext uri="{FF2B5EF4-FFF2-40B4-BE49-F238E27FC236}">
-              <a16:creationId xmlns:a16="http://schemas.microsoft.com/office/drawing/2014/main" id="{068B3068-FB4C-8505-0ACE-3E05FA605D7F}"/>
-            </a:ext>
-          </a:extLst>
-        </p:cNvPr>
+        <p:cNvPr id="1" name=""/>
         <p:cNvGrpSpPr/>
         <p:nvPr/>
       </p:nvGrpSpPr>
@@ -34359,7 +34156,7 @@
           <p:cNvPr id="2" name="Title 1">
             <a:extLst>
               <a:ext uri="{FF2B5EF4-FFF2-40B4-BE49-F238E27FC236}">
-                <a16:creationId xmlns:a16="http://schemas.microsoft.com/office/drawing/2014/main" id="{F07902B6-C2BB-2D0C-329D-FEF3AFB55DBA}"/>
+                <a16:creationId xmlns:a16="http://schemas.microsoft.com/office/drawing/2014/main" id="{92372BD3-72AC-4DAB-328B-FBEBF76CDDE6}"/>
               </a:ext>
             </a:extLst>
           </p:cNvPr>
@@ -34376,9 +34173,18 @@
           <a:lstStyle/>
           <a:p>
             <a:r>
-              <a:rPr lang="et-EE" sz="2800" noProof="0" dirty="0"/>
-              <a:t>Andmete ligipääs</a:t>
-            </a:r>
+              <a:rPr lang="en-GB" dirty="0" err="1"/>
+              <a:t>Mõõdikute</a:t>
+            </a:r>
+            <a:r>
+              <a:rPr lang="en-GB" dirty="0"/>
+              <a:t> </a:t>
+            </a:r>
+            <a:r>
+              <a:rPr lang="en-GB" dirty="0" err="1"/>
+              <a:t>tabel</a:t>
+            </a:r>
+            <a:endParaRPr lang="en-GB" dirty="0"/>
           </a:p>
         </p:txBody>
       </p:sp>
@@ -34387,7 +34193,7 @@
           <p:cNvPr id="3" name="Content Placeholder 2">
             <a:extLst>
               <a:ext uri="{FF2B5EF4-FFF2-40B4-BE49-F238E27FC236}">
-                <a16:creationId xmlns:a16="http://schemas.microsoft.com/office/drawing/2014/main" id="{A3345AC9-14F7-F43C-F38E-2D4AE76BE2D0}"/>
+                <a16:creationId xmlns:a16="http://schemas.microsoft.com/office/drawing/2014/main" id="{229FF66E-640E-F06F-F258-A182CF573BE8}"/>
               </a:ext>
             </a:extLst>
           </p:cNvPr>
@@ -34403,241 +34209,32 @@
           <a:bodyPr/>
           <a:lstStyle/>
           <a:p>
-            <a:pPr>
-              <a:lnSpc>
-                <a:spcPct val="150000"/>
-              </a:lnSpc>
-            </a:pPr>
-            <a:endParaRPr lang="et-EE" sz="2000" noProof="0" dirty="0">
-              <a:ea typeface="Inter"/>
-            </a:endParaRPr>
+            <a:r>
+              <a:rPr lang="en-GB" dirty="0" err="1"/>
+              <a:t>My_measures</a:t>
+            </a:r>
+            <a:r>
+              <a:rPr lang="en-GB" dirty="0"/>
+              <a:t> = INFO.VIEW.MEASURES()</a:t>
+            </a:r>
           </a:p>
           <a:p>
-            <a:pPr>
-              <a:lnSpc>
-                <a:spcPct val="150000"/>
-              </a:lnSpc>
-            </a:pPr>
-            <a:endParaRPr lang="et-EE" sz="2000" noProof="0" dirty="0">
-              <a:ea typeface="Inter"/>
-            </a:endParaRPr>
-          </a:p>
-        </p:txBody>
-      </p:sp>
-      <p:sp>
-        <p:nvSpPr>
-          <p:cNvPr id="4" name="TextBox 3">
-            <a:extLst>
-              <a:ext uri="{FF2B5EF4-FFF2-40B4-BE49-F238E27FC236}">
-                <a16:creationId xmlns:a16="http://schemas.microsoft.com/office/drawing/2014/main" id="{7C305968-47C4-A055-CEA5-A9A3272FD1E8}"/>
-              </a:ext>
-            </a:extLst>
-          </p:cNvPr>
-          <p:cNvSpPr txBox="1"/>
-          <p:nvPr/>
-        </p:nvSpPr>
-        <p:spPr>
-          <a:xfrm>
-            <a:off x="635431" y="1149828"/>
-            <a:ext cx="11034325" cy="2243499"/>
-          </a:xfrm>
-          <a:prstGeom prst="rect">
-            <a:avLst/>
-          </a:prstGeom>
-          <a:noFill/>
-        </p:spPr>
-        <p:txBody>
-          <a:bodyPr rot="0" spcFirstLastPara="0" vertOverflow="overflow" horzOverflow="overflow" vert="horz" wrap="square" lIns="91440" tIns="45720" rIns="91440" bIns="45720" numCol="1" spcCol="0" rtlCol="0" fromWordArt="0" anchor="t" anchorCtr="0" forceAA="0" compatLnSpc="1">
-            <a:prstTxWarp prst="textNoShape">
-              <a:avLst/>
-            </a:prstTxWarp>
-            <a:spAutoFit/>
-          </a:bodyPr>
-          <a:lstStyle/>
-          <a:p>
-            <a:pPr marL="342900" indent="-342900">
-              <a:lnSpc>
-                <a:spcPct val="150000"/>
-              </a:lnSpc>
-              <a:buFont typeface="Arial"/>
-              <a:buChar char="•"/>
-            </a:pPr>
-            <a:r>
-              <a:rPr lang="et-EE" sz="2400" noProof="0" dirty="0">
-                <a:ea typeface="Inter"/>
-              </a:rPr>
-              <a:t>Selgelt dokumenteeritud, kes, mis alustel ja miks andmetele ligi pääseb</a:t>
-            </a:r>
-          </a:p>
-          <a:p>
-            <a:pPr marL="342900" indent="-342900">
-              <a:lnSpc>
-                <a:spcPct val="150000"/>
-              </a:lnSpc>
-              <a:buFont typeface="Arial"/>
-              <a:buChar char="•"/>
-            </a:pPr>
-            <a:r>
-              <a:rPr lang="et-EE" sz="2400" noProof="0" dirty="0">
-                <a:ea typeface="Inter"/>
-              </a:rPr>
-              <a:t>Logitud, kes, millal ja milleks andmeid kasutas </a:t>
-            </a:r>
-          </a:p>
-          <a:p>
-            <a:pPr marL="800100" lvl="1" indent="-342900">
-              <a:lnSpc>
-                <a:spcPct val="150000"/>
-              </a:lnSpc>
-              <a:buFont typeface="Arial"/>
-              <a:buChar char="•"/>
-            </a:pPr>
-            <a:r>
-              <a:rPr lang="et-EE" sz="2400" noProof="0" dirty="0">
-                <a:ea typeface="Inter"/>
-              </a:rPr>
-              <a:t>Näiteks eesti.ee --&gt; Andmejälgija</a:t>
-            </a:r>
-          </a:p>
-          <a:p>
-            <a:pPr>
-              <a:lnSpc>
-                <a:spcPct val="150000"/>
-              </a:lnSpc>
-            </a:pPr>
-            <a:endParaRPr lang="et-EE" sz="2400" noProof="0" dirty="0">
-              <a:ea typeface="Inter"/>
-            </a:endParaRPr>
+            <a:r>
+              <a:rPr lang="en-GB" dirty="0"/>
+              <a:t>Lisa table info </a:t>
+            </a:r>
+            <a:r>
+              <a:rPr lang="en-GB" dirty="0" err="1"/>
+              <a:t>lehele</a:t>
+            </a:r>
+            <a:endParaRPr lang="en-GB" dirty="0"/>
           </a:p>
         </p:txBody>
       </p:sp>
     </p:spTree>
     <p:extLst>
       <p:ext uri="{BB962C8B-B14F-4D97-AF65-F5344CB8AC3E}">
-        <p14:creationId xmlns:p14="http://schemas.microsoft.com/office/powerpoint/2010/main" val="1501543890"/>
-      </p:ext>
-    </p:extLst>
-  </p:cSld>
-  <p:clrMapOvr>
-    <a:masterClrMapping/>
-  </p:clrMapOvr>
-</p:sld>
-</file>
-
-<file path=ppt/slides/slide19.xml><?xml version="1.0" encoding="utf-8"?>
-<p:sld xmlns:a="http://schemas.openxmlformats.org/drawingml/2006/main" xmlns:r="http://schemas.openxmlformats.org/officeDocument/2006/relationships" xmlns:p="http://schemas.openxmlformats.org/presentationml/2006/main">
-  <p:cSld>
-    <p:spTree>
-      <p:nvGrpSpPr>
-        <p:cNvPr id="1" name="">
-          <a:extLst>
-            <a:ext uri="{FF2B5EF4-FFF2-40B4-BE49-F238E27FC236}">
-              <a16:creationId xmlns:a16="http://schemas.microsoft.com/office/drawing/2014/main" id="{B39AA82F-17B2-0B84-AACA-870316873AE2}"/>
-            </a:ext>
-          </a:extLst>
-        </p:cNvPr>
-        <p:cNvGrpSpPr/>
-        <p:nvPr/>
-      </p:nvGrpSpPr>
-      <p:grpSpPr>
-        <a:xfrm>
-          <a:off x="0" y="0"/>
-          <a:ext cx="0" cy="0"/>
-          <a:chOff x="0" y="0"/>
-          <a:chExt cx="0" cy="0"/>
-        </a:xfrm>
-      </p:grpSpPr>
-      <p:sp>
-        <p:nvSpPr>
-          <p:cNvPr id="2" name="Title 1">
-            <a:extLst>
-              <a:ext uri="{FF2B5EF4-FFF2-40B4-BE49-F238E27FC236}">
-                <a16:creationId xmlns:a16="http://schemas.microsoft.com/office/drawing/2014/main" id="{2EF53EA2-150D-D910-85D4-CCE940301878}"/>
-              </a:ext>
-            </a:extLst>
-          </p:cNvPr>
-          <p:cNvSpPr>
-            <a:spLocks noGrp="1"/>
-          </p:cNvSpPr>
-          <p:nvPr>
-            <p:ph type="ctrTitle"/>
-          </p:nvPr>
-        </p:nvSpPr>
-        <p:spPr/>
-        <p:txBody>
-          <a:bodyPr/>
-          <a:lstStyle/>
-          <a:p>
-            <a:r>
-              <a:rPr lang="et-EE" sz="2800" noProof="0" dirty="0"/>
-              <a:t>Organisatsioonivälistele andmetele juurdepääs</a:t>
-            </a:r>
-            <a:endParaRPr lang="et-EE" noProof="0" dirty="0"/>
-          </a:p>
-        </p:txBody>
-      </p:sp>
-      <p:sp>
-        <p:nvSpPr>
-          <p:cNvPr id="3" name="Content Placeholder 2">
-            <a:extLst>
-              <a:ext uri="{FF2B5EF4-FFF2-40B4-BE49-F238E27FC236}">
-                <a16:creationId xmlns:a16="http://schemas.microsoft.com/office/drawing/2014/main" id="{C7BB5AB7-7CAF-E94F-6970-A27EFE3934C9}"/>
-              </a:ext>
-            </a:extLst>
-          </p:cNvPr>
-          <p:cNvSpPr>
-            <a:spLocks noGrp="1"/>
-          </p:cNvSpPr>
-          <p:nvPr>
-            <p:ph sz="quarter" idx="10"/>
-          </p:nvPr>
-        </p:nvSpPr>
-        <p:spPr/>
-        <p:txBody>
-          <a:bodyPr/>
-          <a:lstStyle/>
-          <a:p>
-            <a:pPr>
-              <a:lnSpc>
-                <a:spcPct val="150000"/>
-              </a:lnSpc>
-            </a:pPr>
-            <a:r>
-              <a:rPr lang="et-EE" sz="2000" noProof="0" dirty="0">
-                <a:ea typeface="Inter"/>
-              </a:rPr>
-              <a:t>Peab järgima algset eesmärki</a:t>
-            </a:r>
-          </a:p>
-          <a:p>
-            <a:pPr>
-              <a:lnSpc>
-                <a:spcPct val="150000"/>
-              </a:lnSpc>
-            </a:pPr>
-            <a:r>
-              <a:rPr lang="et-EE" sz="2000" noProof="0" dirty="0">
-                <a:ea typeface="Inter"/>
-              </a:rPr>
-              <a:t>Andmevahetuslepingu sõlmimine</a:t>
-            </a:r>
-          </a:p>
-          <a:p>
-            <a:pPr>
-              <a:lnSpc>
-                <a:spcPct val="150000"/>
-              </a:lnSpc>
-            </a:pPr>
-            <a:endParaRPr lang="et-EE" sz="2000" noProof="0" dirty="0">
-              <a:ea typeface="Inter"/>
-            </a:endParaRPr>
-          </a:p>
-        </p:txBody>
-      </p:sp>
-    </p:spTree>
-    <p:extLst>
-      <p:ext uri="{BB962C8B-B14F-4D97-AF65-F5344CB8AC3E}">
-        <p14:creationId xmlns:p14="http://schemas.microsoft.com/office/powerpoint/2010/main" val="3468310050"/>
+        <p14:creationId xmlns:p14="http://schemas.microsoft.com/office/powerpoint/2010/main" val="3375536145"/>
       </p:ext>
     </p:extLst>
   </p:cSld>
@@ -35098,17 +34695,7 @@
                           <a:effectLst/>
                           <a:latin typeface="Inter"/>
                         </a:rPr>
-                        <a:t>13:15 – 14:45 – Koolitus </a:t>
-                      </a:r>
-                      <a:r>
-                        <a:rPr lang="et-EE" sz="2400" b="0" i="0" noProof="0">
-                          <a:solidFill>
-                            <a:srgbClr val="121212"/>
-                          </a:solidFill>
-                          <a:effectLst/>
-                          <a:latin typeface="Inter"/>
-                        </a:rPr>
-                        <a:t>– </a:t>
+                        <a:t>13:15 – 14:45 – Koolitus – </a:t>
                       </a:r>
                       <a:endParaRPr lang="et-EE" b="0" i="0" noProof="0" dirty="0">
                         <a:solidFill>
@@ -40699,21 +40286,12 @@
 </file>
 
 <file path=customXml/item1.xml><?xml version="1.0" encoding="utf-8"?>
-<?mso-contentType ?>
-<FormTemplates xmlns="http://schemas.microsoft.com/sharepoint/v3/contenttype/forms">
-  <Display>DocumentLibraryForm</Display>
-  <Edit>DocumentLibraryForm</Edit>
-  <New>DocumentLibraryForm</New>
-</FormTemplates>
-</file>
-
-<file path=customXml/item2.xml><?xml version="1.0" encoding="utf-8"?>
 <p:properties xmlns:p="http://schemas.microsoft.com/office/2006/metadata/properties" xmlns:xsi="http://www.w3.org/2001/XMLSchema-instance" xmlns:pc="http://schemas.microsoft.com/office/infopath/2007/PartnerControls">
   <documentManagement/>
 </p:properties>
 </file>
 
-<file path=customXml/item3.xml><?xml version="1.0" encoding="utf-8"?>
+<file path=customXml/item2.xml><?xml version="1.0" encoding="utf-8"?>
 <ct:contentTypeSchema xmlns:ct="http://schemas.microsoft.com/office/2006/metadata/contentType" xmlns:ma="http://schemas.microsoft.com/office/2006/metadata/properties/metaAttributes" ct:_="" ma:_="" ma:contentTypeName="Document" ma:contentTypeID="0x010100C4D27B8FA8976546BCD79313C588588D" ma:contentTypeVersion="8" ma:contentTypeDescription="Create a new document." ma:contentTypeScope="" ma:versionID="a112c56f6fe148a79025c76584832af0">
   <xsd:schema xmlns:xsd="http://www.w3.org/2001/XMLSchema" xmlns:xs="http://www.w3.org/2001/XMLSchema" xmlns:p="http://schemas.microsoft.com/office/2006/metadata/properties" xmlns:ns2="a1a2d923-8fea-42f1-bd41-9cdfff65694e" targetNamespace="http://schemas.microsoft.com/office/2006/metadata/properties" ma:root="true" ma:fieldsID="97c8655d467eaa9470a714421e7268c0" ns2:_="">
     <xsd:import namespace="a1a2d923-8fea-42f1-bd41-9cdfff65694e"/>
@@ -40881,15 +40459,16 @@
 </ct:contentTypeSchema>
 </file>
 
-<file path=customXml/itemProps1.xml><?xml version="1.0" encoding="utf-8"?>
-<ds:datastoreItem xmlns:ds="http://schemas.openxmlformats.org/officeDocument/2006/customXml" ds:itemID="{9DC439CA-6F1C-4005-ACA6-A52E04DEE0A7}">
-  <ds:schemaRefs>
-    <ds:schemaRef ds:uri="http://schemas.microsoft.com/sharepoint/v3/contenttype/forms"/>
-  </ds:schemaRefs>
-</ds:datastoreItem>
+<file path=customXml/item3.xml><?xml version="1.0" encoding="utf-8"?>
+<?mso-contentType ?>
+<FormTemplates xmlns="http://schemas.microsoft.com/sharepoint/v3/contenttype/forms">
+  <Display>DocumentLibraryForm</Display>
+  <Edit>DocumentLibraryForm</Edit>
+  <New>DocumentLibraryForm</New>
+</FormTemplates>
 </file>
 
-<file path=customXml/itemProps2.xml><?xml version="1.0" encoding="utf-8"?>
+<file path=customXml/itemProps1.xml><?xml version="1.0" encoding="utf-8"?>
 <ds:datastoreItem xmlns:ds="http://schemas.openxmlformats.org/officeDocument/2006/customXml" ds:itemID="{5BDF4908-A52A-47DD-A794-6E02D71942FC}">
   <ds:schemaRefs>
     <ds:schemaRef ds:uri="http://schemas.microsoft.com/office/2006/metadata/properties"/>
@@ -40898,7 +40477,7 @@
 </ds:datastoreItem>
 </file>
 
-<file path=customXml/itemProps3.xml><?xml version="1.0" encoding="utf-8"?>
+<file path=customXml/itemProps2.xml><?xml version="1.0" encoding="utf-8"?>
 <ds:datastoreItem xmlns:ds="http://schemas.openxmlformats.org/officeDocument/2006/customXml" ds:itemID="{9CF4F972-2392-44D0-AA45-41AC4FDC4A59}">
   <ds:schemaRefs>
     <ds:schemaRef ds:uri="a1a2d923-8fea-42f1-bd41-9cdfff65694e"/>
@@ -40914,4 +40493,12 @@
     <ds:schemaRef ds:uri="http://www.w3.org/2001/XMLSchema"/>
   </ds:schemaRefs>
 </ds:datastoreItem>
+</file>
+
+<file path=customXml/itemProps3.xml><?xml version="1.0" encoding="utf-8"?>
+<ds:datastoreItem xmlns:ds="http://schemas.openxmlformats.org/officeDocument/2006/customXml" ds:itemID="{9DC439CA-6F1C-4005-ACA6-A52E04DEE0A7}">
+  <ds:schemaRefs>
+    <ds:schemaRef ds:uri="http://schemas.microsoft.com/sharepoint/v3/contenttype/forms"/>
+  </ds:schemaRefs>
+</ds:datastoreItem>
 </file>
--- a/Materjalid/Day9 Andmekorraldus Dim Fakt/9-paev-andmetarkus-esitlus.pptx
+++ b/Materjalid/Day9 Andmekorraldus Dim Fakt/9-paev-andmetarkus-esitlus.pptx
@@ -5,10 +5,10 @@
     <p:sldMasterId id="2147483648" r:id="rId4"/>
   </p:sldMasterIdLst>
   <p:notesMasterIdLst>
-    <p:notesMasterId r:id="rId33"/>
+    <p:notesMasterId r:id="rId29"/>
   </p:notesMasterIdLst>
   <p:handoutMasterIdLst>
-    <p:handoutMasterId r:id="rId34"/>
+    <p:handoutMasterId r:id="rId30"/>
   </p:handoutMasterIdLst>
   <p:sldIdLst>
     <p:sldId id="417" r:id="rId5"/>
@@ -17,9 +17,9 @@
     <p:sldId id="499" r:id="rId8"/>
     <p:sldId id="622" r:id="rId9"/>
     <p:sldId id="459" r:id="rId10"/>
-    <p:sldId id="656" r:id="rId11"/>
-    <p:sldId id="458" r:id="rId12"/>
-    <p:sldId id="498" r:id="rId13"/>
+    <p:sldId id="498" r:id="rId11"/>
+    <p:sldId id="656" r:id="rId12"/>
+    <p:sldId id="458" r:id="rId13"/>
     <p:sldId id="455" r:id="rId14"/>
     <p:sldId id="456" r:id="rId15"/>
     <p:sldId id="509" r:id="rId16"/>
@@ -33,45 +33,34 @@
     <p:sldId id="502" r:id="rId24"/>
     <p:sldId id="497" r:id="rId25"/>
     <p:sldId id="561" r:id="rId26"/>
-    <p:sldId id="574" r:id="rId27"/>
-    <p:sldId id="659" r:id="rId28"/>
-    <p:sldId id="660" r:id="rId29"/>
-    <p:sldId id="657" r:id="rId30"/>
-    <p:sldId id="621" r:id="rId31"/>
-    <p:sldId id="658" r:id="rId32"/>
+    <p:sldId id="663" r:id="rId27"/>
+    <p:sldId id="621" r:id="rId28"/>
   </p:sldIdLst>
   <p:sldSz cx="12192000" cy="6858000"/>
   <p:notesSz cx="6858000" cy="9144000"/>
   <p:embeddedFontLst>
     <p:embeddedFont>
       <p:font typeface="Inter" panose="020B0604020202020204" charset="0"/>
-      <p:regular r:id="rId35"/>
-      <p:bold r:id="rId36"/>
-      <p:italic r:id="rId37"/>
-      <p:boldItalic r:id="rId38"/>
+      <p:regular r:id="rId31"/>
+      <p:bold r:id="rId32"/>
+      <p:italic r:id="rId33"/>
+      <p:boldItalic r:id="rId34"/>
     </p:embeddedFont>
     <p:embeddedFont>
       <p:font typeface="Inter Bold" panose="020B0604020202020204" charset="0"/>
-      <p:bold r:id="rId39"/>
-    </p:embeddedFont>
-    <p:embeddedFont>
-      <p:font typeface="Noto Serif" panose="02020600060500020200" pitchFamily="18" charset="0"/>
-      <p:regular r:id="rId40"/>
-      <p:bold r:id="rId41"/>
-      <p:italic r:id="rId42"/>
-      <p:boldItalic r:id="rId43"/>
+      <p:bold r:id="rId35"/>
     </p:embeddedFont>
     <p:embeddedFont>
       <p:font typeface="Poppins SemiBold" panose="00000700000000000000" pitchFamily="2" charset="0"/>
-      <p:bold r:id="rId44"/>
-      <p:boldItalic r:id="rId45"/>
+      <p:bold r:id="rId36"/>
+      <p:boldItalic r:id="rId37"/>
     </p:embeddedFont>
     <p:embeddedFont>
       <p:font typeface="Roboto" panose="02000000000000000000" pitchFamily="2" charset="0"/>
-      <p:regular r:id="rId46"/>
-      <p:bold r:id="rId47"/>
-      <p:italic r:id="rId48"/>
-      <p:boldItalic r:id="rId49"/>
+      <p:regular r:id="rId38"/>
+      <p:bold r:id="rId39"/>
+      <p:italic r:id="rId40"/>
+      <p:boldItalic r:id="rId41"/>
     </p:embeddedFont>
   </p:embeddedFontLst>
   <p:defaultTextStyle>
@@ -178,43 +167,6 @@
     </p:ext>
   </p:extLst>
 </p:presentation>
-</file>
-
-<file path=ppt/changesInfos/changesInfo1.xml><?xml version="1.0" encoding="utf-8"?>
-<pc:chgInfo xmlns:a="http://schemas.openxmlformats.org/drawingml/2006/main" xmlns:r="http://schemas.openxmlformats.org/officeDocument/2006/relationships" xmlns:ac="http://schemas.microsoft.com/office/drawing/2013/main/command" xmlns:pc="http://schemas.microsoft.com/office/powerpoint/2013/main/command">
-  <pc:docChgLst>
-    <pc:chgData name="Emilie Abel" userId="20dec598-1860-40de-ab3f-181316cc4da6" providerId="ADAL" clId="{3EAE1975-14BE-41D5-9E3B-28573F0EE5DC}"/>
-    <pc:docChg chg="custSel modSld">
-      <pc:chgData name="Emilie Abel" userId="20dec598-1860-40de-ab3f-181316cc4da6" providerId="ADAL" clId="{3EAE1975-14BE-41D5-9E3B-28573F0EE5DC}" dt="2026-08-18T11:49:48.415" v="26" actId="478"/>
-      <pc:docMkLst>
-        <pc:docMk/>
-      </pc:docMkLst>
-      <pc:sldChg chg="delSp modSp mod">
-        <pc:chgData name="Emilie Abel" userId="20dec598-1860-40de-ab3f-181316cc4da6" providerId="ADAL" clId="{3EAE1975-14BE-41D5-9E3B-28573F0EE5DC}" dt="2026-08-18T11:49:48.415" v="26" actId="478"/>
-        <pc:sldMkLst>
-          <pc:docMk/>
-          <pc:sldMk cId="4169291970" sldId="417"/>
-        </pc:sldMkLst>
-        <pc:spChg chg="mod">
-          <ac:chgData name="Emilie Abel" userId="20dec598-1860-40de-ab3f-181316cc4da6" providerId="ADAL" clId="{3EAE1975-14BE-41D5-9E3B-28573F0EE5DC}" dt="2026-08-18T11:49:46.855" v="25" actId="20577"/>
-          <ac:spMkLst>
-            <pc:docMk/>
-            <pc:sldMk cId="4169291970" sldId="417"/>
-            <ac:spMk id="5" creationId="{3496B8E7-2B01-285F-88ED-B3ADE66A3D31}"/>
-          </ac:spMkLst>
-        </pc:spChg>
-        <pc:picChg chg="del">
-          <ac:chgData name="Emilie Abel" userId="20dec598-1860-40de-ab3f-181316cc4da6" providerId="ADAL" clId="{3EAE1975-14BE-41D5-9E3B-28573F0EE5DC}" dt="2026-08-18T11:49:48.415" v="26" actId="478"/>
-          <ac:picMkLst>
-            <pc:docMk/>
-            <pc:sldMk cId="4169291970" sldId="417"/>
-            <ac:picMk id="3" creationId="{59426EB3-96A0-6F7B-BD8A-B89C052D49B0}"/>
-          </ac:picMkLst>
-        </pc:picChg>
-      </pc:sldChg>
-    </pc:docChg>
-  </pc:docChgLst>
-</pc:chgInfo>
 </file>
 
 <file path=ppt/diagrams/colors1.xml><?xml version="1.0" encoding="utf-8"?>
@@ -2907,7 +2859,7 @@
           <a:p>
             <a:fld id="{F9D2AD6E-DEDD-49A0-A4BE-7A081A9112DA}" type="datetimeFigureOut">
               <a:rPr lang="en-US" smtClean="0"/>
-              <a:t>9/3/2026</a:t>
+              <a:t>9/8/2026</a:t>
             </a:fld>
             <a:endParaRPr lang="en-US"/>
           </a:p>
@@ -3083,7 +3035,7 @@
           </a:lstStyle>
           <a:p>
             <a:fld id="{2AF9C1A6-4321-41FA-B001-4140F0E2457F}" type="datetimeFigureOut">
-              <a:t>9/3/2026</a:t>
+              <a:t>9/8/2026</a:t>
             </a:fld>
             <a:endParaRPr lang="en-US"/>
           </a:p>
@@ -3663,6 +3615,1168 @@
   <p:cSld>
     <p:spTree>
       <p:nvGrpSpPr>
+        <p:cNvPr id="1" name=""/>
+        <p:cNvGrpSpPr/>
+        <p:nvPr/>
+      </p:nvGrpSpPr>
+      <p:grpSpPr>
+        <a:xfrm>
+          <a:off x="0" y="0"/>
+          <a:ext cx="0" cy="0"/>
+          <a:chOff x="0" y="0"/>
+          <a:chExt cx="0" cy="0"/>
+        </a:xfrm>
+      </p:grpSpPr>
+      <p:sp>
+        <p:nvSpPr>
+          <p:cNvPr id="2" name="Slide Image Placeholder 1"/>
+          <p:cNvSpPr>
+            <a:spLocks noGrp="1" noRot="1" noChangeAspect="1"/>
+          </p:cNvSpPr>
+          <p:nvPr>
+            <p:ph type="sldImg"/>
+          </p:nvPr>
+        </p:nvSpPr>
+        <p:spPr/>
+      </p:sp>
+      <p:sp>
+        <p:nvSpPr>
+          <p:cNvPr id="3" name="Notes Placeholder 2"/>
+          <p:cNvSpPr>
+            <a:spLocks noGrp="1"/>
+          </p:cNvSpPr>
+          <p:nvPr>
+            <p:ph type="body" idx="1"/>
+          </p:nvPr>
+        </p:nvSpPr>
+        <p:spPr/>
+        <p:txBody>
+          <a:bodyPr/>
+          <a:lstStyle/>
+          <a:p>
+            <a:r>
+              <a:rPr lang="en-US">
+                <a:ea typeface="Calibri"/>
+                <a:cs typeface="Calibri"/>
+              </a:rPr>
+              <a:t>FAIR </a:t>
+            </a:r>
+            <a:r>
+              <a:rPr lang="en-US" err="1">
+                <a:ea typeface="Calibri"/>
+                <a:cs typeface="Calibri"/>
+              </a:rPr>
+              <a:t>põhimõtted</a:t>
+            </a:r>
+            <a:r>
+              <a:rPr lang="en-US">
+                <a:ea typeface="Calibri"/>
+                <a:cs typeface="Calibri"/>
+              </a:rPr>
+              <a:t> </a:t>
+            </a:r>
+            <a:r>
+              <a:rPr lang="en-US" err="1">
+                <a:ea typeface="Calibri"/>
+                <a:cs typeface="Calibri"/>
+              </a:rPr>
+              <a:t>tagavad</a:t>
+            </a:r>
+            <a:r>
+              <a:rPr lang="en-US">
+                <a:ea typeface="Calibri"/>
+                <a:cs typeface="Calibri"/>
+              </a:rPr>
+              <a:t> </a:t>
+            </a:r>
+            <a:r>
+              <a:rPr lang="en-US" err="1">
+                <a:ea typeface="Calibri"/>
+                <a:cs typeface="Calibri"/>
+              </a:rPr>
+              <a:t>võimaluse</a:t>
+            </a:r>
+            <a:r>
+              <a:rPr lang="en-US">
+                <a:ea typeface="Calibri"/>
+                <a:cs typeface="Calibri"/>
+              </a:rPr>
+              <a:t> </a:t>
+            </a:r>
+            <a:r>
+              <a:rPr lang="en-US" err="1">
+                <a:ea typeface="Calibri"/>
+                <a:cs typeface="Calibri"/>
+              </a:rPr>
+              <a:t>andmeid</a:t>
+            </a:r>
+            <a:r>
+              <a:rPr lang="en-US">
+                <a:ea typeface="Calibri"/>
+                <a:cs typeface="Calibri"/>
+              </a:rPr>
+              <a:t> </a:t>
+            </a:r>
+            <a:r>
+              <a:rPr lang="en-US" err="1">
+                <a:ea typeface="Calibri"/>
+                <a:cs typeface="Calibri"/>
+              </a:rPr>
+              <a:t>kasutada</a:t>
+            </a:r>
+            <a:r>
+              <a:rPr lang="en-US">
+                <a:ea typeface="Calibri"/>
+                <a:cs typeface="Calibri"/>
+              </a:rPr>
+              <a:t>. </a:t>
+            </a:r>
+            <a:br>
+              <a:rPr lang="en-US">
+                <a:cs typeface="+mn-lt"/>
+              </a:rPr>
+            </a:br>
+            <a:r>
+              <a:rPr lang="en-US" err="1">
+                <a:ea typeface="Calibri"/>
+                <a:cs typeface="Calibri"/>
+              </a:rPr>
+              <a:t>Esiteks</a:t>
+            </a:r>
+            <a:r>
+              <a:rPr lang="en-US">
+                <a:ea typeface="Calibri"/>
+                <a:cs typeface="Calibri"/>
+              </a:rPr>
+              <a:t> </a:t>
+            </a:r>
+            <a:r>
+              <a:rPr lang="en-US" err="1">
+                <a:ea typeface="Calibri"/>
+                <a:cs typeface="Calibri"/>
+              </a:rPr>
+              <a:t>peavad</a:t>
+            </a:r>
+            <a:r>
+              <a:rPr lang="en-US">
+                <a:ea typeface="Calibri"/>
+                <a:cs typeface="Calibri"/>
+              </a:rPr>
+              <a:t> </a:t>
+            </a:r>
+            <a:r>
+              <a:rPr lang="en-US" err="1">
+                <a:ea typeface="Calibri"/>
+                <a:cs typeface="Calibri"/>
+              </a:rPr>
+              <a:t>andmed</a:t>
+            </a:r>
+            <a:r>
+              <a:rPr lang="en-US">
+                <a:ea typeface="Calibri"/>
+                <a:cs typeface="Calibri"/>
+              </a:rPr>
+              <a:t> </a:t>
+            </a:r>
+            <a:r>
+              <a:rPr lang="en-US" err="1">
+                <a:ea typeface="Calibri"/>
+                <a:cs typeface="Calibri"/>
+              </a:rPr>
+              <a:t>olema</a:t>
+            </a:r>
+            <a:r>
+              <a:rPr lang="en-US">
+                <a:ea typeface="Calibri"/>
+                <a:cs typeface="Calibri"/>
+              </a:rPr>
+              <a:t> </a:t>
+            </a:r>
+            <a:r>
+              <a:rPr lang="en-US" err="1">
+                <a:ea typeface="Calibri"/>
+                <a:cs typeface="Calibri"/>
+              </a:rPr>
+              <a:t>leitavad</a:t>
+            </a:r>
+            <a:r>
+              <a:rPr lang="en-US">
+                <a:ea typeface="Calibri"/>
+                <a:cs typeface="Calibri"/>
+              </a:rPr>
+              <a:t> – </a:t>
+            </a:r>
+            <a:r>
+              <a:rPr lang="en-US" err="1">
+                <a:ea typeface="Calibri"/>
+                <a:cs typeface="Calibri"/>
+              </a:rPr>
+              <a:t>selleks</a:t>
+            </a:r>
+            <a:r>
+              <a:rPr lang="en-US">
+                <a:ea typeface="Calibri"/>
+                <a:cs typeface="Calibri"/>
+              </a:rPr>
+              <a:t> on </a:t>
+            </a:r>
+            <a:r>
+              <a:rPr lang="en-US" err="1">
+                <a:ea typeface="Calibri"/>
+                <a:cs typeface="Calibri"/>
+              </a:rPr>
+              <a:t>vajalik</a:t>
+            </a:r>
+            <a:r>
+              <a:rPr lang="en-US">
+                <a:ea typeface="Calibri"/>
+                <a:cs typeface="Calibri"/>
+              </a:rPr>
+              <a:t> </a:t>
+            </a:r>
+            <a:r>
+              <a:rPr lang="en-US" err="1">
+                <a:ea typeface="Calibri"/>
+                <a:cs typeface="Calibri"/>
+              </a:rPr>
+              <a:t>andmed</a:t>
+            </a:r>
+            <a:r>
+              <a:rPr lang="en-US">
+                <a:ea typeface="Calibri"/>
+                <a:cs typeface="Calibri"/>
+              </a:rPr>
+              <a:t> </a:t>
+            </a:r>
+            <a:r>
+              <a:rPr lang="en-US" err="1">
+                <a:ea typeface="Calibri"/>
+                <a:cs typeface="Calibri"/>
+              </a:rPr>
+              <a:t>kirjeldada</a:t>
+            </a:r>
+            <a:r>
+              <a:rPr lang="en-US">
+                <a:ea typeface="Calibri"/>
+                <a:cs typeface="Calibri"/>
+              </a:rPr>
+              <a:t> ja </a:t>
+            </a:r>
+            <a:r>
+              <a:rPr lang="en-US" err="1">
+                <a:ea typeface="Calibri"/>
+                <a:cs typeface="Calibri"/>
+              </a:rPr>
+              <a:t>luua</a:t>
+            </a:r>
+            <a:r>
+              <a:rPr lang="en-US">
+                <a:ea typeface="Calibri"/>
+                <a:cs typeface="Calibri"/>
+              </a:rPr>
+              <a:t> </a:t>
+            </a:r>
+            <a:r>
+              <a:rPr lang="en-US" err="1">
+                <a:ea typeface="Calibri"/>
+                <a:cs typeface="Calibri"/>
+              </a:rPr>
+              <a:t>koht</a:t>
+            </a:r>
+            <a:r>
+              <a:rPr lang="en-US">
+                <a:ea typeface="Calibri"/>
+                <a:cs typeface="Calibri"/>
+              </a:rPr>
+              <a:t>, </a:t>
+            </a:r>
+            <a:r>
+              <a:rPr lang="en-US" err="1">
+                <a:ea typeface="Calibri"/>
+                <a:cs typeface="Calibri"/>
+              </a:rPr>
+              <a:t>kus</a:t>
+            </a:r>
+            <a:r>
+              <a:rPr lang="en-US">
+                <a:ea typeface="Calibri"/>
+                <a:cs typeface="Calibri"/>
+              </a:rPr>
+              <a:t> </a:t>
+            </a:r>
+            <a:r>
+              <a:rPr lang="en-US" err="1">
+                <a:ea typeface="Calibri"/>
+                <a:cs typeface="Calibri"/>
+              </a:rPr>
+              <a:t>andmed</a:t>
+            </a:r>
+            <a:r>
+              <a:rPr lang="en-US">
+                <a:ea typeface="Calibri"/>
+                <a:cs typeface="Calibri"/>
+              </a:rPr>
+              <a:t> </a:t>
+            </a:r>
+            <a:r>
+              <a:rPr lang="en-US" err="1">
+                <a:ea typeface="Calibri"/>
+                <a:cs typeface="Calibri"/>
+              </a:rPr>
+              <a:t>talletatakse</a:t>
+            </a:r>
+            <a:r>
+              <a:rPr lang="en-US">
+                <a:ea typeface="Calibri"/>
+                <a:cs typeface="Calibri"/>
+              </a:rPr>
+              <a:t>. </a:t>
+            </a:r>
+            <a:br>
+              <a:rPr lang="en-US">
+                <a:ea typeface="Calibri"/>
+                <a:cs typeface="+mn-lt"/>
+              </a:rPr>
+            </a:br>
+            <a:r>
+              <a:rPr lang="en-US" err="1">
+                <a:ea typeface="Calibri"/>
+                <a:cs typeface="Calibri"/>
+              </a:rPr>
+              <a:t>Teiseks</a:t>
+            </a:r>
+            <a:r>
+              <a:rPr lang="en-US">
+                <a:ea typeface="Calibri"/>
+                <a:cs typeface="Calibri"/>
+              </a:rPr>
+              <a:t> </a:t>
+            </a:r>
+            <a:r>
+              <a:rPr lang="en-US" err="1">
+                <a:ea typeface="Calibri"/>
+                <a:cs typeface="Calibri"/>
+              </a:rPr>
+              <a:t>peavad</a:t>
+            </a:r>
+            <a:r>
+              <a:rPr lang="en-US">
+                <a:ea typeface="Calibri"/>
+                <a:cs typeface="Calibri"/>
+              </a:rPr>
+              <a:t> </a:t>
+            </a:r>
+            <a:r>
+              <a:rPr lang="en-US" err="1">
+                <a:ea typeface="Calibri"/>
+                <a:cs typeface="Calibri"/>
+              </a:rPr>
+              <a:t>andmed</a:t>
+            </a:r>
+            <a:r>
+              <a:rPr lang="en-US">
+                <a:ea typeface="Calibri"/>
+                <a:cs typeface="Calibri"/>
+              </a:rPr>
+              <a:t> </a:t>
+            </a:r>
+            <a:r>
+              <a:rPr lang="en-US" err="1">
+                <a:ea typeface="Calibri"/>
+                <a:cs typeface="Calibri"/>
+              </a:rPr>
+              <a:t>olema</a:t>
+            </a:r>
+            <a:r>
+              <a:rPr lang="en-US">
+                <a:ea typeface="Calibri"/>
+                <a:cs typeface="Calibri"/>
+              </a:rPr>
+              <a:t> </a:t>
+            </a:r>
+            <a:r>
+              <a:rPr lang="en-US" err="1">
+                <a:ea typeface="Calibri"/>
+                <a:cs typeface="Calibri"/>
+              </a:rPr>
+              <a:t>kättesaadavad</a:t>
+            </a:r>
+            <a:r>
+              <a:rPr lang="en-US">
+                <a:ea typeface="Calibri"/>
+                <a:cs typeface="Calibri"/>
+              </a:rPr>
+              <a:t> </a:t>
+            </a:r>
+            <a:r>
+              <a:rPr lang="en-US" err="1">
+                <a:ea typeface="Calibri"/>
+                <a:cs typeface="Calibri"/>
+              </a:rPr>
+              <a:t>õigetele</a:t>
+            </a:r>
+            <a:r>
+              <a:rPr lang="en-US">
+                <a:ea typeface="Calibri"/>
+                <a:cs typeface="Calibri"/>
+              </a:rPr>
+              <a:t> </a:t>
+            </a:r>
+            <a:r>
+              <a:rPr lang="en-US" err="1">
+                <a:ea typeface="Calibri"/>
+                <a:cs typeface="Calibri"/>
+              </a:rPr>
+              <a:t>inimestele</a:t>
+            </a:r>
+            <a:r>
+              <a:rPr lang="en-US">
+                <a:ea typeface="Calibri"/>
+                <a:cs typeface="Calibri"/>
+              </a:rPr>
+              <a:t> – </a:t>
+            </a:r>
+            <a:r>
+              <a:rPr lang="en-US" err="1">
+                <a:ea typeface="Calibri"/>
+                <a:cs typeface="Calibri"/>
+              </a:rPr>
+              <a:t>selleks</a:t>
+            </a:r>
+            <a:r>
+              <a:rPr lang="en-US">
+                <a:ea typeface="Calibri"/>
+                <a:cs typeface="Calibri"/>
+              </a:rPr>
+              <a:t> </a:t>
+            </a:r>
+            <a:r>
+              <a:rPr lang="en-US" err="1">
+                <a:ea typeface="Calibri"/>
+                <a:cs typeface="Calibri"/>
+              </a:rPr>
+              <a:t>peab</a:t>
+            </a:r>
+            <a:r>
+              <a:rPr lang="en-US">
+                <a:ea typeface="Calibri"/>
+                <a:cs typeface="Calibri"/>
+              </a:rPr>
+              <a:t> </a:t>
+            </a:r>
+            <a:r>
+              <a:rPr lang="en-US" err="1">
+                <a:ea typeface="Calibri"/>
+                <a:cs typeface="Calibri"/>
+              </a:rPr>
+              <a:t>looma</a:t>
+            </a:r>
+            <a:r>
+              <a:rPr lang="en-US">
+                <a:ea typeface="Calibri"/>
+                <a:cs typeface="Calibri"/>
+              </a:rPr>
+              <a:t> ja </a:t>
+            </a:r>
+            <a:r>
+              <a:rPr lang="en-US" err="1">
+                <a:ea typeface="Calibri"/>
+                <a:cs typeface="Calibri"/>
+              </a:rPr>
+              <a:t>rakendama</a:t>
+            </a:r>
+            <a:r>
+              <a:rPr lang="en-US">
+                <a:ea typeface="Calibri"/>
+                <a:cs typeface="Calibri"/>
+              </a:rPr>
+              <a:t> </a:t>
+            </a:r>
+            <a:r>
+              <a:rPr lang="en-US" err="1">
+                <a:ea typeface="Calibri"/>
+                <a:cs typeface="Calibri"/>
+              </a:rPr>
+              <a:t>juurdepääsu</a:t>
+            </a:r>
+            <a:r>
+              <a:rPr lang="en-US">
+                <a:ea typeface="Calibri"/>
+                <a:cs typeface="Calibri"/>
+              </a:rPr>
+              <a:t> </a:t>
+            </a:r>
+            <a:r>
+              <a:rPr lang="en-US" err="1">
+                <a:ea typeface="Calibri"/>
+                <a:cs typeface="Calibri"/>
+              </a:rPr>
+              <a:t>reeglid</a:t>
+            </a:r>
+            <a:r>
+              <a:rPr lang="en-US">
+                <a:ea typeface="Calibri"/>
+                <a:cs typeface="Calibri"/>
+              </a:rPr>
+              <a:t>. </a:t>
+            </a:r>
+            <a:br>
+              <a:rPr lang="en-US">
+                <a:cs typeface="+mn-lt"/>
+              </a:rPr>
+            </a:br>
+            <a:r>
+              <a:rPr lang="en-US" err="1">
+                <a:ea typeface="Calibri"/>
+                <a:cs typeface="Calibri"/>
+              </a:rPr>
+              <a:t>Kolmandaks</a:t>
+            </a:r>
+            <a:r>
+              <a:rPr lang="en-US">
+                <a:ea typeface="Calibri"/>
+                <a:cs typeface="Calibri"/>
+              </a:rPr>
+              <a:t> </a:t>
+            </a:r>
+            <a:r>
+              <a:rPr lang="en-US" err="1">
+                <a:ea typeface="Calibri"/>
+                <a:cs typeface="Calibri"/>
+              </a:rPr>
+              <a:t>peavad</a:t>
+            </a:r>
+            <a:r>
+              <a:rPr lang="en-US">
+                <a:ea typeface="Calibri"/>
+                <a:cs typeface="Calibri"/>
+              </a:rPr>
+              <a:t> </a:t>
+            </a:r>
+            <a:r>
+              <a:rPr lang="en-US" err="1">
+                <a:ea typeface="Calibri"/>
+                <a:cs typeface="Calibri"/>
+              </a:rPr>
+              <a:t>andmed</a:t>
+            </a:r>
+            <a:r>
+              <a:rPr lang="en-US">
+                <a:ea typeface="Calibri"/>
+                <a:cs typeface="Calibri"/>
+              </a:rPr>
+              <a:t> </a:t>
+            </a:r>
+            <a:r>
+              <a:rPr lang="en-US" err="1">
+                <a:ea typeface="Calibri"/>
+                <a:cs typeface="Calibri"/>
+              </a:rPr>
+              <a:t>olema</a:t>
+            </a:r>
+            <a:r>
+              <a:rPr lang="en-US">
+                <a:ea typeface="Calibri"/>
+                <a:cs typeface="Calibri"/>
+              </a:rPr>
+              <a:t> </a:t>
+            </a:r>
+            <a:r>
+              <a:rPr lang="en-US" err="1">
+                <a:ea typeface="Calibri"/>
+                <a:cs typeface="Calibri"/>
+              </a:rPr>
+              <a:t>taaskasutatavad</a:t>
+            </a:r>
+            <a:r>
+              <a:rPr lang="en-US">
+                <a:ea typeface="Calibri"/>
+                <a:cs typeface="Calibri"/>
+              </a:rPr>
+              <a:t> – </a:t>
+            </a:r>
+            <a:r>
+              <a:rPr lang="en-US" err="1">
+                <a:ea typeface="Calibri"/>
+                <a:cs typeface="Calibri"/>
+              </a:rPr>
+              <a:t>selleks</a:t>
+            </a:r>
+            <a:r>
+              <a:rPr lang="en-US">
+                <a:ea typeface="Calibri"/>
+                <a:cs typeface="Calibri"/>
+              </a:rPr>
+              <a:t> </a:t>
+            </a:r>
+            <a:r>
+              <a:rPr lang="en-US" err="1">
+                <a:ea typeface="Calibri"/>
+                <a:cs typeface="Calibri"/>
+              </a:rPr>
+              <a:t>peavad</a:t>
+            </a:r>
+            <a:r>
+              <a:rPr lang="en-US">
+                <a:ea typeface="Calibri"/>
+                <a:cs typeface="Calibri"/>
+              </a:rPr>
+              <a:t> </a:t>
+            </a:r>
+            <a:r>
+              <a:rPr lang="en-US" err="1">
+                <a:ea typeface="Calibri"/>
+                <a:cs typeface="Calibri"/>
+              </a:rPr>
+              <a:t>olema</a:t>
+            </a:r>
+            <a:r>
+              <a:rPr lang="en-US">
+                <a:ea typeface="Calibri"/>
+                <a:cs typeface="Calibri"/>
+              </a:rPr>
+              <a:t> </a:t>
+            </a:r>
+            <a:r>
+              <a:rPr lang="en-US" err="1">
+                <a:ea typeface="Calibri"/>
+                <a:cs typeface="Calibri"/>
+              </a:rPr>
+              <a:t>kokku</a:t>
+            </a:r>
+            <a:r>
+              <a:rPr lang="en-US">
+                <a:ea typeface="Calibri"/>
+                <a:cs typeface="Calibri"/>
+              </a:rPr>
+              <a:t> </a:t>
+            </a:r>
+            <a:r>
+              <a:rPr lang="en-US" err="1">
+                <a:ea typeface="Calibri"/>
+                <a:cs typeface="Calibri"/>
+              </a:rPr>
+              <a:t>lepitud</a:t>
+            </a:r>
+            <a:r>
+              <a:rPr lang="en-US">
+                <a:ea typeface="Calibri"/>
+                <a:cs typeface="Calibri"/>
+              </a:rPr>
+              <a:t> ja </a:t>
+            </a:r>
+            <a:r>
+              <a:rPr lang="en-US" err="1">
+                <a:ea typeface="Calibri"/>
+                <a:cs typeface="Calibri"/>
+              </a:rPr>
+              <a:t>selgelt</a:t>
+            </a:r>
+            <a:r>
+              <a:rPr lang="en-US">
+                <a:ea typeface="Calibri"/>
+                <a:cs typeface="Calibri"/>
+              </a:rPr>
+              <a:t> </a:t>
+            </a:r>
+            <a:r>
+              <a:rPr lang="en-US" err="1">
+                <a:ea typeface="Calibri"/>
+                <a:cs typeface="Calibri"/>
+              </a:rPr>
+              <a:t>dokumenteeritud</a:t>
+            </a:r>
+            <a:r>
+              <a:rPr lang="en-US">
+                <a:ea typeface="Calibri"/>
+                <a:cs typeface="Calibri"/>
+              </a:rPr>
+              <a:t>, mis </a:t>
+            </a:r>
+            <a:r>
+              <a:rPr lang="en-US" err="1">
+                <a:ea typeface="Calibri"/>
+                <a:cs typeface="Calibri"/>
+              </a:rPr>
+              <a:t>eesmärgil</a:t>
+            </a:r>
+            <a:r>
+              <a:rPr lang="en-US">
+                <a:ea typeface="Calibri"/>
+                <a:cs typeface="Calibri"/>
+              </a:rPr>
+              <a:t> </a:t>
+            </a:r>
+            <a:r>
+              <a:rPr lang="en-US" err="1">
+                <a:ea typeface="Calibri"/>
+                <a:cs typeface="Calibri"/>
+              </a:rPr>
+              <a:t>võib</a:t>
+            </a:r>
+            <a:r>
+              <a:rPr lang="en-US">
+                <a:ea typeface="Calibri"/>
+                <a:cs typeface="Calibri"/>
+              </a:rPr>
+              <a:t> </a:t>
+            </a:r>
+            <a:r>
+              <a:rPr lang="en-US" err="1">
+                <a:ea typeface="Calibri"/>
+                <a:cs typeface="Calibri"/>
+              </a:rPr>
+              <a:t>andmeid</a:t>
+            </a:r>
+            <a:r>
+              <a:rPr lang="en-US">
+                <a:ea typeface="Calibri"/>
+                <a:cs typeface="Calibri"/>
+              </a:rPr>
+              <a:t> </a:t>
+            </a:r>
+            <a:r>
+              <a:rPr lang="en-US" err="1">
+                <a:ea typeface="Calibri"/>
+                <a:cs typeface="Calibri"/>
+              </a:rPr>
+              <a:t>kasutada</a:t>
+            </a:r>
+            <a:r>
+              <a:rPr lang="en-US">
+                <a:ea typeface="Calibri"/>
+                <a:cs typeface="Calibri"/>
+              </a:rPr>
+              <a:t> </a:t>
+            </a:r>
+            <a:r>
+              <a:rPr lang="en-US" err="1">
+                <a:ea typeface="Calibri"/>
+                <a:cs typeface="Calibri"/>
+              </a:rPr>
+              <a:t>ning</a:t>
+            </a:r>
+            <a:r>
+              <a:rPr lang="en-US">
+                <a:ea typeface="Calibri"/>
+                <a:cs typeface="Calibri"/>
+              </a:rPr>
+              <a:t> </a:t>
+            </a:r>
+            <a:r>
+              <a:rPr lang="en-US" err="1">
+                <a:ea typeface="Calibri"/>
+                <a:cs typeface="Calibri"/>
+              </a:rPr>
+              <a:t>tagatud</a:t>
+            </a:r>
+            <a:r>
+              <a:rPr lang="en-US">
+                <a:ea typeface="Calibri"/>
+                <a:cs typeface="Calibri"/>
+              </a:rPr>
+              <a:t> </a:t>
+            </a:r>
+            <a:r>
+              <a:rPr lang="en-US" err="1">
+                <a:ea typeface="Calibri"/>
+                <a:cs typeface="Calibri"/>
+              </a:rPr>
+              <a:t>andmete</a:t>
+            </a:r>
+            <a:r>
+              <a:rPr lang="en-US">
+                <a:ea typeface="Calibri"/>
+                <a:cs typeface="Calibri"/>
+              </a:rPr>
+              <a:t> </a:t>
+            </a:r>
+            <a:r>
+              <a:rPr lang="en-US" err="1">
+                <a:ea typeface="Calibri"/>
+                <a:cs typeface="Calibri"/>
+              </a:rPr>
+              <a:t>selline</a:t>
+            </a:r>
+            <a:r>
+              <a:rPr lang="en-US">
+                <a:ea typeface="Calibri"/>
+                <a:cs typeface="Calibri"/>
+              </a:rPr>
+              <a:t> </a:t>
+            </a:r>
+            <a:r>
+              <a:rPr lang="en-US" err="1">
+                <a:ea typeface="Calibri"/>
+                <a:cs typeface="Calibri"/>
+              </a:rPr>
+              <a:t>vorm</a:t>
+            </a:r>
+            <a:r>
+              <a:rPr lang="en-US">
+                <a:ea typeface="Calibri"/>
+                <a:cs typeface="Calibri"/>
+              </a:rPr>
+              <a:t>, mis </a:t>
+            </a:r>
+            <a:r>
+              <a:rPr lang="en-US" err="1">
+                <a:ea typeface="Calibri"/>
+                <a:cs typeface="Calibri"/>
+              </a:rPr>
+              <a:t>võimaldab</a:t>
+            </a:r>
+            <a:r>
+              <a:rPr lang="en-US">
+                <a:ea typeface="Calibri"/>
+                <a:cs typeface="Calibri"/>
+              </a:rPr>
+              <a:t> </a:t>
+            </a:r>
+            <a:r>
+              <a:rPr lang="en-US" err="1">
+                <a:ea typeface="Calibri"/>
+                <a:cs typeface="Calibri"/>
+              </a:rPr>
+              <a:t>nende</a:t>
+            </a:r>
+            <a:r>
+              <a:rPr lang="en-US">
+                <a:ea typeface="Calibri"/>
+                <a:cs typeface="Calibri"/>
+              </a:rPr>
+              <a:t> </a:t>
+            </a:r>
+            <a:r>
+              <a:rPr lang="en-US" err="1">
+                <a:ea typeface="Calibri"/>
+                <a:cs typeface="Calibri"/>
+              </a:rPr>
+              <a:t>analüüsi</a:t>
+            </a:r>
+            <a:r>
+              <a:rPr lang="en-US">
+                <a:ea typeface="Calibri"/>
+                <a:cs typeface="Calibri"/>
+              </a:rPr>
+              <a:t>. </a:t>
+            </a:r>
+            <a:br>
+              <a:rPr lang="en-US">
+                <a:ea typeface="Calibri"/>
+                <a:cs typeface="+mn-lt"/>
+              </a:rPr>
+            </a:br>
+            <a:r>
+              <a:rPr lang="en-US" err="1">
+                <a:ea typeface="Calibri"/>
+                <a:cs typeface="Calibri"/>
+              </a:rPr>
+              <a:t>Neljandaks</a:t>
+            </a:r>
+            <a:r>
+              <a:rPr lang="en-US">
+                <a:ea typeface="Calibri"/>
+                <a:cs typeface="Calibri"/>
+              </a:rPr>
+              <a:t> </a:t>
+            </a:r>
+            <a:r>
+              <a:rPr lang="en-US" err="1">
+                <a:ea typeface="Calibri"/>
+                <a:cs typeface="Calibri"/>
+              </a:rPr>
+              <a:t>peavad</a:t>
+            </a:r>
+            <a:r>
+              <a:rPr lang="en-US">
+                <a:ea typeface="Calibri"/>
+                <a:cs typeface="Calibri"/>
+              </a:rPr>
+              <a:t> </a:t>
+            </a:r>
+            <a:r>
+              <a:rPr lang="en-US" err="1">
+                <a:ea typeface="Calibri"/>
+                <a:cs typeface="Calibri"/>
+              </a:rPr>
+              <a:t>andmed</a:t>
+            </a:r>
+            <a:r>
+              <a:rPr lang="en-US">
+                <a:ea typeface="Calibri"/>
+                <a:cs typeface="Calibri"/>
+              </a:rPr>
+              <a:t> </a:t>
+            </a:r>
+            <a:r>
+              <a:rPr lang="en-US" err="1">
+                <a:ea typeface="Calibri"/>
+                <a:cs typeface="Calibri"/>
+              </a:rPr>
+              <a:t>olema</a:t>
+            </a:r>
+            <a:r>
+              <a:rPr lang="en-US">
+                <a:ea typeface="Calibri"/>
+                <a:cs typeface="Calibri"/>
+              </a:rPr>
+              <a:t> </a:t>
+            </a:r>
+            <a:r>
+              <a:rPr lang="en-US" err="1">
+                <a:ea typeface="Calibri"/>
+                <a:cs typeface="Calibri"/>
+              </a:rPr>
+              <a:t>ühilduvad</a:t>
+            </a:r>
+            <a:r>
+              <a:rPr lang="en-US">
+                <a:ea typeface="Calibri"/>
+                <a:cs typeface="Calibri"/>
+              </a:rPr>
+              <a:t> - see </a:t>
+            </a:r>
+            <a:r>
+              <a:rPr lang="en-US" err="1">
+                <a:ea typeface="Calibri"/>
+                <a:cs typeface="Calibri"/>
+              </a:rPr>
+              <a:t>tähendab</a:t>
+            </a:r>
+            <a:r>
+              <a:rPr lang="en-US">
+                <a:ea typeface="Calibri"/>
+                <a:cs typeface="Calibri"/>
+              </a:rPr>
+              <a:t>, et </a:t>
+            </a:r>
+            <a:r>
+              <a:rPr lang="en-US" err="1">
+                <a:ea typeface="Calibri"/>
+                <a:cs typeface="Calibri"/>
+              </a:rPr>
+              <a:t>kogutud</a:t>
+            </a:r>
+            <a:r>
+              <a:rPr lang="en-US">
+                <a:ea typeface="Calibri"/>
+                <a:cs typeface="Calibri"/>
+              </a:rPr>
+              <a:t> </a:t>
+            </a:r>
+            <a:r>
+              <a:rPr lang="en-US" err="1">
+                <a:ea typeface="Calibri"/>
+                <a:cs typeface="Calibri"/>
+              </a:rPr>
+              <a:t>andmeid</a:t>
+            </a:r>
+            <a:r>
+              <a:rPr lang="en-US">
+                <a:ea typeface="Calibri"/>
+                <a:cs typeface="Calibri"/>
+              </a:rPr>
+              <a:t> </a:t>
+            </a:r>
+            <a:r>
+              <a:rPr lang="en-US" err="1">
+                <a:ea typeface="Calibri"/>
+                <a:cs typeface="Calibri"/>
+              </a:rPr>
+              <a:t>saab</a:t>
+            </a:r>
+            <a:r>
+              <a:rPr lang="en-US">
+                <a:ea typeface="Calibri"/>
+                <a:cs typeface="Calibri"/>
+              </a:rPr>
+              <a:t> </a:t>
+            </a:r>
+            <a:r>
+              <a:rPr lang="en-US" err="1">
+                <a:ea typeface="Calibri"/>
+                <a:cs typeface="Calibri"/>
+              </a:rPr>
+              <a:t>ühendada</a:t>
+            </a:r>
+            <a:r>
+              <a:rPr lang="en-US">
+                <a:ea typeface="Calibri"/>
+                <a:cs typeface="Calibri"/>
+              </a:rPr>
+              <a:t> </a:t>
+            </a:r>
+            <a:r>
+              <a:rPr lang="en-US" err="1">
+                <a:ea typeface="Calibri"/>
+                <a:cs typeface="Calibri"/>
+              </a:rPr>
+              <a:t>teiste</a:t>
+            </a:r>
+            <a:r>
+              <a:rPr lang="en-US">
+                <a:ea typeface="Calibri"/>
+                <a:cs typeface="Calibri"/>
+              </a:rPr>
+              <a:t> </a:t>
+            </a:r>
+            <a:r>
+              <a:rPr lang="en-US" err="1">
+                <a:ea typeface="Calibri"/>
+                <a:cs typeface="Calibri"/>
+              </a:rPr>
+              <a:t>andmetega</a:t>
+            </a:r>
+            <a:r>
+              <a:rPr lang="en-US">
+                <a:ea typeface="Calibri"/>
+                <a:cs typeface="Calibri"/>
+              </a:rPr>
+              <a:t>. Selleks on </a:t>
+            </a:r>
+            <a:r>
+              <a:rPr lang="en-US" err="1">
+                <a:ea typeface="Calibri"/>
+                <a:cs typeface="Calibri"/>
+              </a:rPr>
+              <a:t>oluline</a:t>
+            </a:r>
+            <a:r>
+              <a:rPr lang="en-US">
+                <a:ea typeface="Calibri"/>
+                <a:cs typeface="Calibri"/>
+              </a:rPr>
+              <a:t> </a:t>
+            </a:r>
+            <a:r>
+              <a:rPr lang="en-US" err="1">
+                <a:ea typeface="Calibri"/>
+                <a:cs typeface="Calibri"/>
+              </a:rPr>
+              <a:t>kasutada</a:t>
+            </a:r>
+            <a:r>
+              <a:rPr lang="en-US">
+                <a:ea typeface="Calibri"/>
+                <a:cs typeface="Calibri"/>
+              </a:rPr>
+              <a:t> </a:t>
+            </a:r>
+            <a:r>
+              <a:rPr lang="en-US" err="1">
+                <a:ea typeface="Calibri"/>
+                <a:cs typeface="Calibri"/>
+              </a:rPr>
+              <a:t>avatud</a:t>
+            </a:r>
+            <a:r>
+              <a:rPr lang="en-US">
+                <a:ea typeface="Calibri"/>
+                <a:cs typeface="Calibri"/>
+              </a:rPr>
+              <a:t> </a:t>
+            </a:r>
+            <a:r>
+              <a:rPr lang="en-US" err="1">
+                <a:ea typeface="Calibri"/>
+                <a:cs typeface="Calibri"/>
+              </a:rPr>
+              <a:t>failivorminguid</a:t>
+            </a:r>
+            <a:r>
+              <a:rPr lang="en-US">
+                <a:ea typeface="Calibri"/>
+                <a:cs typeface="Calibri"/>
+              </a:rPr>
+              <a:t> ja </a:t>
+            </a:r>
+            <a:r>
+              <a:rPr lang="en-US" err="1">
+                <a:ea typeface="Calibri"/>
+                <a:cs typeface="Calibri"/>
+              </a:rPr>
+              <a:t>ühtlustada</a:t>
+            </a:r>
+            <a:r>
+              <a:rPr lang="en-US">
+                <a:ea typeface="Calibri"/>
+                <a:cs typeface="Calibri"/>
+              </a:rPr>
+              <a:t> </a:t>
+            </a:r>
+            <a:r>
+              <a:rPr lang="en-US" err="1">
+                <a:ea typeface="Calibri"/>
+                <a:cs typeface="Calibri"/>
+              </a:rPr>
+              <a:t>terminite</a:t>
+            </a:r>
+            <a:r>
+              <a:rPr lang="en-US">
+                <a:ea typeface="Calibri"/>
+                <a:cs typeface="Calibri"/>
+              </a:rPr>
+              <a:t> </a:t>
+            </a:r>
+            <a:r>
+              <a:rPr lang="en-US" err="1">
+                <a:ea typeface="Calibri"/>
+                <a:cs typeface="Calibri"/>
+              </a:rPr>
+              <a:t>kasutus</a:t>
+            </a:r>
+            <a:r>
+              <a:rPr lang="en-US">
+                <a:ea typeface="Calibri"/>
+                <a:cs typeface="Calibri"/>
+              </a:rPr>
+              <a:t>.</a:t>
+            </a:r>
+          </a:p>
+        </p:txBody>
+      </p:sp>
+      <p:sp>
+        <p:nvSpPr>
+          <p:cNvPr id="4" name="Slide Number Placeholder 3"/>
+          <p:cNvSpPr>
+            <a:spLocks noGrp="1"/>
+          </p:cNvSpPr>
+          <p:nvPr>
+            <p:ph type="sldNum" sz="quarter" idx="5"/>
+          </p:nvPr>
+        </p:nvSpPr>
+        <p:spPr/>
+        <p:txBody>
+          <a:bodyPr/>
+          <a:lstStyle/>
+          <a:p>
+            <a:fld id="{46699514-027B-49BD-8B49-5054CA40ECF4}" type="slidenum">
+              <a:rPr lang="en-US"/>
+              <a:t>7</a:t>
+            </a:fld>
+            <a:endParaRPr lang="en-US"/>
+          </a:p>
+        </p:txBody>
+      </p:sp>
+    </p:spTree>
+    <p:extLst>
+      <p:ext uri="{BB962C8B-B14F-4D97-AF65-F5344CB8AC3E}">
+        <p14:creationId xmlns:p14="http://schemas.microsoft.com/office/powerpoint/2010/main" val="714793515"/>
+      </p:ext>
+    </p:extLst>
+  </p:cSld>
+  <p:clrMapOvr>
+    <a:masterClrMapping/>
+  </p:clrMapOvr>
+</p:notes>
+</file>
+
+<file path=ppt/notesSlides/notesSlide4.xml><?xml version="1.0" encoding="utf-8"?>
+<p:notes xmlns:a="http://schemas.openxmlformats.org/drawingml/2006/main" xmlns:r="http://schemas.openxmlformats.org/officeDocument/2006/relationships" xmlns:p="http://schemas.openxmlformats.org/presentationml/2006/main">
+  <p:cSld>
+    <p:spTree>
+      <p:nvGrpSpPr>
         <p:cNvPr id="1" name="">
           <a:extLst>
             <a:ext uri="{FF2B5EF4-FFF2-40B4-BE49-F238E27FC236}">
@@ -3893,7 +5007,7 @@
           <a:p>
             <a:fld id="{46699514-027B-49BD-8B49-5054CA40ECF4}" type="slidenum">
               <a:rPr lang="en-US"/>
-              <a:t>7</a:t>
+              <a:t>8</a:t>
             </a:fld>
             <a:endParaRPr lang="en-US"/>
           </a:p>
@@ -3903,1168 +5017,6 @@
     <p:extLst>
       <p:ext uri="{BB962C8B-B14F-4D97-AF65-F5344CB8AC3E}">
         <p14:creationId xmlns:p14="http://schemas.microsoft.com/office/powerpoint/2010/main" val="3624468171"/>
-      </p:ext>
-    </p:extLst>
-  </p:cSld>
-  <p:clrMapOvr>
-    <a:masterClrMapping/>
-  </p:clrMapOvr>
-</p:notes>
-</file>
-
-<file path=ppt/notesSlides/notesSlide4.xml><?xml version="1.0" encoding="utf-8"?>
-<p:notes xmlns:a="http://schemas.openxmlformats.org/drawingml/2006/main" xmlns:r="http://schemas.openxmlformats.org/officeDocument/2006/relationships" xmlns:p="http://schemas.openxmlformats.org/presentationml/2006/main">
-  <p:cSld>
-    <p:spTree>
-      <p:nvGrpSpPr>
-        <p:cNvPr id="1" name=""/>
-        <p:cNvGrpSpPr/>
-        <p:nvPr/>
-      </p:nvGrpSpPr>
-      <p:grpSpPr>
-        <a:xfrm>
-          <a:off x="0" y="0"/>
-          <a:ext cx="0" cy="0"/>
-          <a:chOff x="0" y="0"/>
-          <a:chExt cx="0" cy="0"/>
-        </a:xfrm>
-      </p:grpSpPr>
-      <p:sp>
-        <p:nvSpPr>
-          <p:cNvPr id="2" name="Slide Image Placeholder 1"/>
-          <p:cNvSpPr>
-            <a:spLocks noGrp="1" noRot="1" noChangeAspect="1"/>
-          </p:cNvSpPr>
-          <p:nvPr>
-            <p:ph type="sldImg"/>
-          </p:nvPr>
-        </p:nvSpPr>
-        <p:spPr/>
-      </p:sp>
-      <p:sp>
-        <p:nvSpPr>
-          <p:cNvPr id="3" name="Notes Placeholder 2"/>
-          <p:cNvSpPr>
-            <a:spLocks noGrp="1"/>
-          </p:cNvSpPr>
-          <p:nvPr>
-            <p:ph type="body" idx="1"/>
-          </p:nvPr>
-        </p:nvSpPr>
-        <p:spPr/>
-        <p:txBody>
-          <a:bodyPr/>
-          <a:lstStyle/>
-          <a:p>
-            <a:r>
-              <a:rPr lang="en-US">
-                <a:ea typeface="Calibri"/>
-                <a:cs typeface="Calibri"/>
-              </a:rPr>
-              <a:t>FAIR </a:t>
-            </a:r>
-            <a:r>
-              <a:rPr lang="en-US" err="1">
-                <a:ea typeface="Calibri"/>
-                <a:cs typeface="Calibri"/>
-              </a:rPr>
-              <a:t>põhimõtted</a:t>
-            </a:r>
-            <a:r>
-              <a:rPr lang="en-US">
-                <a:ea typeface="Calibri"/>
-                <a:cs typeface="Calibri"/>
-              </a:rPr>
-              <a:t> </a:t>
-            </a:r>
-            <a:r>
-              <a:rPr lang="en-US" err="1">
-                <a:ea typeface="Calibri"/>
-                <a:cs typeface="Calibri"/>
-              </a:rPr>
-              <a:t>tagavad</a:t>
-            </a:r>
-            <a:r>
-              <a:rPr lang="en-US">
-                <a:ea typeface="Calibri"/>
-                <a:cs typeface="Calibri"/>
-              </a:rPr>
-              <a:t> </a:t>
-            </a:r>
-            <a:r>
-              <a:rPr lang="en-US" err="1">
-                <a:ea typeface="Calibri"/>
-                <a:cs typeface="Calibri"/>
-              </a:rPr>
-              <a:t>võimaluse</a:t>
-            </a:r>
-            <a:r>
-              <a:rPr lang="en-US">
-                <a:ea typeface="Calibri"/>
-                <a:cs typeface="Calibri"/>
-              </a:rPr>
-              <a:t> </a:t>
-            </a:r>
-            <a:r>
-              <a:rPr lang="en-US" err="1">
-                <a:ea typeface="Calibri"/>
-                <a:cs typeface="Calibri"/>
-              </a:rPr>
-              <a:t>andmeid</a:t>
-            </a:r>
-            <a:r>
-              <a:rPr lang="en-US">
-                <a:ea typeface="Calibri"/>
-                <a:cs typeface="Calibri"/>
-              </a:rPr>
-              <a:t> </a:t>
-            </a:r>
-            <a:r>
-              <a:rPr lang="en-US" err="1">
-                <a:ea typeface="Calibri"/>
-                <a:cs typeface="Calibri"/>
-              </a:rPr>
-              <a:t>kasutada</a:t>
-            </a:r>
-            <a:r>
-              <a:rPr lang="en-US">
-                <a:ea typeface="Calibri"/>
-                <a:cs typeface="Calibri"/>
-              </a:rPr>
-              <a:t>. </a:t>
-            </a:r>
-            <a:br>
-              <a:rPr lang="en-US">
-                <a:cs typeface="+mn-lt"/>
-              </a:rPr>
-            </a:br>
-            <a:r>
-              <a:rPr lang="en-US" err="1">
-                <a:ea typeface="Calibri"/>
-                <a:cs typeface="Calibri"/>
-              </a:rPr>
-              <a:t>Esiteks</a:t>
-            </a:r>
-            <a:r>
-              <a:rPr lang="en-US">
-                <a:ea typeface="Calibri"/>
-                <a:cs typeface="Calibri"/>
-              </a:rPr>
-              <a:t> </a:t>
-            </a:r>
-            <a:r>
-              <a:rPr lang="en-US" err="1">
-                <a:ea typeface="Calibri"/>
-                <a:cs typeface="Calibri"/>
-              </a:rPr>
-              <a:t>peavad</a:t>
-            </a:r>
-            <a:r>
-              <a:rPr lang="en-US">
-                <a:ea typeface="Calibri"/>
-                <a:cs typeface="Calibri"/>
-              </a:rPr>
-              <a:t> </a:t>
-            </a:r>
-            <a:r>
-              <a:rPr lang="en-US" err="1">
-                <a:ea typeface="Calibri"/>
-                <a:cs typeface="Calibri"/>
-              </a:rPr>
-              <a:t>andmed</a:t>
-            </a:r>
-            <a:r>
-              <a:rPr lang="en-US">
-                <a:ea typeface="Calibri"/>
-                <a:cs typeface="Calibri"/>
-              </a:rPr>
-              <a:t> </a:t>
-            </a:r>
-            <a:r>
-              <a:rPr lang="en-US" err="1">
-                <a:ea typeface="Calibri"/>
-                <a:cs typeface="Calibri"/>
-              </a:rPr>
-              <a:t>olema</a:t>
-            </a:r>
-            <a:r>
-              <a:rPr lang="en-US">
-                <a:ea typeface="Calibri"/>
-                <a:cs typeface="Calibri"/>
-              </a:rPr>
-              <a:t> </a:t>
-            </a:r>
-            <a:r>
-              <a:rPr lang="en-US" err="1">
-                <a:ea typeface="Calibri"/>
-                <a:cs typeface="Calibri"/>
-              </a:rPr>
-              <a:t>leitavad</a:t>
-            </a:r>
-            <a:r>
-              <a:rPr lang="en-US">
-                <a:ea typeface="Calibri"/>
-                <a:cs typeface="Calibri"/>
-              </a:rPr>
-              <a:t> – </a:t>
-            </a:r>
-            <a:r>
-              <a:rPr lang="en-US" err="1">
-                <a:ea typeface="Calibri"/>
-                <a:cs typeface="Calibri"/>
-              </a:rPr>
-              <a:t>selleks</a:t>
-            </a:r>
-            <a:r>
-              <a:rPr lang="en-US">
-                <a:ea typeface="Calibri"/>
-                <a:cs typeface="Calibri"/>
-              </a:rPr>
-              <a:t> on </a:t>
-            </a:r>
-            <a:r>
-              <a:rPr lang="en-US" err="1">
-                <a:ea typeface="Calibri"/>
-                <a:cs typeface="Calibri"/>
-              </a:rPr>
-              <a:t>vajalik</a:t>
-            </a:r>
-            <a:r>
-              <a:rPr lang="en-US">
-                <a:ea typeface="Calibri"/>
-                <a:cs typeface="Calibri"/>
-              </a:rPr>
-              <a:t> </a:t>
-            </a:r>
-            <a:r>
-              <a:rPr lang="en-US" err="1">
-                <a:ea typeface="Calibri"/>
-                <a:cs typeface="Calibri"/>
-              </a:rPr>
-              <a:t>andmed</a:t>
-            </a:r>
-            <a:r>
-              <a:rPr lang="en-US">
-                <a:ea typeface="Calibri"/>
-                <a:cs typeface="Calibri"/>
-              </a:rPr>
-              <a:t> </a:t>
-            </a:r>
-            <a:r>
-              <a:rPr lang="en-US" err="1">
-                <a:ea typeface="Calibri"/>
-                <a:cs typeface="Calibri"/>
-              </a:rPr>
-              <a:t>kirjeldada</a:t>
-            </a:r>
-            <a:r>
-              <a:rPr lang="en-US">
-                <a:ea typeface="Calibri"/>
-                <a:cs typeface="Calibri"/>
-              </a:rPr>
-              <a:t> ja </a:t>
-            </a:r>
-            <a:r>
-              <a:rPr lang="en-US" err="1">
-                <a:ea typeface="Calibri"/>
-                <a:cs typeface="Calibri"/>
-              </a:rPr>
-              <a:t>luua</a:t>
-            </a:r>
-            <a:r>
-              <a:rPr lang="en-US">
-                <a:ea typeface="Calibri"/>
-                <a:cs typeface="Calibri"/>
-              </a:rPr>
-              <a:t> </a:t>
-            </a:r>
-            <a:r>
-              <a:rPr lang="en-US" err="1">
-                <a:ea typeface="Calibri"/>
-                <a:cs typeface="Calibri"/>
-              </a:rPr>
-              <a:t>koht</a:t>
-            </a:r>
-            <a:r>
-              <a:rPr lang="en-US">
-                <a:ea typeface="Calibri"/>
-                <a:cs typeface="Calibri"/>
-              </a:rPr>
-              <a:t>, </a:t>
-            </a:r>
-            <a:r>
-              <a:rPr lang="en-US" err="1">
-                <a:ea typeface="Calibri"/>
-                <a:cs typeface="Calibri"/>
-              </a:rPr>
-              <a:t>kus</a:t>
-            </a:r>
-            <a:r>
-              <a:rPr lang="en-US">
-                <a:ea typeface="Calibri"/>
-                <a:cs typeface="Calibri"/>
-              </a:rPr>
-              <a:t> </a:t>
-            </a:r>
-            <a:r>
-              <a:rPr lang="en-US" err="1">
-                <a:ea typeface="Calibri"/>
-                <a:cs typeface="Calibri"/>
-              </a:rPr>
-              <a:t>andmed</a:t>
-            </a:r>
-            <a:r>
-              <a:rPr lang="en-US">
-                <a:ea typeface="Calibri"/>
-                <a:cs typeface="Calibri"/>
-              </a:rPr>
-              <a:t> </a:t>
-            </a:r>
-            <a:r>
-              <a:rPr lang="en-US" err="1">
-                <a:ea typeface="Calibri"/>
-                <a:cs typeface="Calibri"/>
-              </a:rPr>
-              <a:t>talletatakse</a:t>
-            </a:r>
-            <a:r>
-              <a:rPr lang="en-US">
-                <a:ea typeface="Calibri"/>
-                <a:cs typeface="Calibri"/>
-              </a:rPr>
-              <a:t>. </a:t>
-            </a:r>
-            <a:br>
-              <a:rPr lang="en-US">
-                <a:ea typeface="Calibri"/>
-                <a:cs typeface="+mn-lt"/>
-              </a:rPr>
-            </a:br>
-            <a:r>
-              <a:rPr lang="en-US" err="1">
-                <a:ea typeface="Calibri"/>
-                <a:cs typeface="Calibri"/>
-              </a:rPr>
-              <a:t>Teiseks</a:t>
-            </a:r>
-            <a:r>
-              <a:rPr lang="en-US">
-                <a:ea typeface="Calibri"/>
-                <a:cs typeface="Calibri"/>
-              </a:rPr>
-              <a:t> </a:t>
-            </a:r>
-            <a:r>
-              <a:rPr lang="en-US" err="1">
-                <a:ea typeface="Calibri"/>
-                <a:cs typeface="Calibri"/>
-              </a:rPr>
-              <a:t>peavad</a:t>
-            </a:r>
-            <a:r>
-              <a:rPr lang="en-US">
-                <a:ea typeface="Calibri"/>
-                <a:cs typeface="Calibri"/>
-              </a:rPr>
-              <a:t> </a:t>
-            </a:r>
-            <a:r>
-              <a:rPr lang="en-US" err="1">
-                <a:ea typeface="Calibri"/>
-                <a:cs typeface="Calibri"/>
-              </a:rPr>
-              <a:t>andmed</a:t>
-            </a:r>
-            <a:r>
-              <a:rPr lang="en-US">
-                <a:ea typeface="Calibri"/>
-                <a:cs typeface="Calibri"/>
-              </a:rPr>
-              <a:t> </a:t>
-            </a:r>
-            <a:r>
-              <a:rPr lang="en-US" err="1">
-                <a:ea typeface="Calibri"/>
-                <a:cs typeface="Calibri"/>
-              </a:rPr>
-              <a:t>olema</a:t>
-            </a:r>
-            <a:r>
-              <a:rPr lang="en-US">
-                <a:ea typeface="Calibri"/>
-                <a:cs typeface="Calibri"/>
-              </a:rPr>
-              <a:t> </a:t>
-            </a:r>
-            <a:r>
-              <a:rPr lang="en-US" err="1">
-                <a:ea typeface="Calibri"/>
-                <a:cs typeface="Calibri"/>
-              </a:rPr>
-              <a:t>kättesaadavad</a:t>
-            </a:r>
-            <a:r>
-              <a:rPr lang="en-US">
-                <a:ea typeface="Calibri"/>
-                <a:cs typeface="Calibri"/>
-              </a:rPr>
-              <a:t> </a:t>
-            </a:r>
-            <a:r>
-              <a:rPr lang="en-US" err="1">
-                <a:ea typeface="Calibri"/>
-                <a:cs typeface="Calibri"/>
-              </a:rPr>
-              <a:t>õigetele</a:t>
-            </a:r>
-            <a:r>
-              <a:rPr lang="en-US">
-                <a:ea typeface="Calibri"/>
-                <a:cs typeface="Calibri"/>
-              </a:rPr>
-              <a:t> </a:t>
-            </a:r>
-            <a:r>
-              <a:rPr lang="en-US" err="1">
-                <a:ea typeface="Calibri"/>
-                <a:cs typeface="Calibri"/>
-              </a:rPr>
-              <a:t>inimestele</a:t>
-            </a:r>
-            <a:r>
-              <a:rPr lang="en-US">
-                <a:ea typeface="Calibri"/>
-                <a:cs typeface="Calibri"/>
-              </a:rPr>
-              <a:t> – </a:t>
-            </a:r>
-            <a:r>
-              <a:rPr lang="en-US" err="1">
-                <a:ea typeface="Calibri"/>
-                <a:cs typeface="Calibri"/>
-              </a:rPr>
-              <a:t>selleks</a:t>
-            </a:r>
-            <a:r>
-              <a:rPr lang="en-US">
-                <a:ea typeface="Calibri"/>
-                <a:cs typeface="Calibri"/>
-              </a:rPr>
-              <a:t> </a:t>
-            </a:r>
-            <a:r>
-              <a:rPr lang="en-US" err="1">
-                <a:ea typeface="Calibri"/>
-                <a:cs typeface="Calibri"/>
-              </a:rPr>
-              <a:t>peab</a:t>
-            </a:r>
-            <a:r>
-              <a:rPr lang="en-US">
-                <a:ea typeface="Calibri"/>
-                <a:cs typeface="Calibri"/>
-              </a:rPr>
-              <a:t> </a:t>
-            </a:r>
-            <a:r>
-              <a:rPr lang="en-US" err="1">
-                <a:ea typeface="Calibri"/>
-                <a:cs typeface="Calibri"/>
-              </a:rPr>
-              <a:t>looma</a:t>
-            </a:r>
-            <a:r>
-              <a:rPr lang="en-US">
-                <a:ea typeface="Calibri"/>
-                <a:cs typeface="Calibri"/>
-              </a:rPr>
-              <a:t> ja </a:t>
-            </a:r>
-            <a:r>
-              <a:rPr lang="en-US" err="1">
-                <a:ea typeface="Calibri"/>
-                <a:cs typeface="Calibri"/>
-              </a:rPr>
-              <a:t>rakendama</a:t>
-            </a:r>
-            <a:r>
-              <a:rPr lang="en-US">
-                <a:ea typeface="Calibri"/>
-                <a:cs typeface="Calibri"/>
-              </a:rPr>
-              <a:t> </a:t>
-            </a:r>
-            <a:r>
-              <a:rPr lang="en-US" err="1">
-                <a:ea typeface="Calibri"/>
-                <a:cs typeface="Calibri"/>
-              </a:rPr>
-              <a:t>juurdepääsu</a:t>
-            </a:r>
-            <a:r>
-              <a:rPr lang="en-US">
-                <a:ea typeface="Calibri"/>
-                <a:cs typeface="Calibri"/>
-              </a:rPr>
-              <a:t> </a:t>
-            </a:r>
-            <a:r>
-              <a:rPr lang="en-US" err="1">
-                <a:ea typeface="Calibri"/>
-                <a:cs typeface="Calibri"/>
-              </a:rPr>
-              <a:t>reeglid</a:t>
-            </a:r>
-            <a:r>
-              <a:rPr lang="en-US">
-                <a:ea typeface="Calibri"/>
-                <a:cs typeface="Calibri"/>
-              </a:rPr>
-              <a:t>. </a:t>
-            </a:r>
-            <a:br>
-              <a:rPr lang="en-US">
-                <a:cs typeface="+mn-lt"/>
-              </a:rPr>
-            </a:br>
-            <a:r>
-              <a:rPr lang="en-US" err="1">
-                <a:ea typeface="Calibri"/>
-                <a:cs typeface="Calibri"/>
-              </a:rPr>
-              <a:t>Kolmandaks</a:t>
-            </a:r>
-            <a:r>
-              <a:rPr lang="en-US">
-                <a:ea typeface="Calibri"/>
-                <a:cs typeface="Calibri"/>
-              </a:rPr>
-              <a:t> </a:t>
-            </a:r>
-            <a:r>
-              <a:rPr lang="en-US" err="1">
-                <a:ea typeface="Calibri"/>
-                <a:cs typeface="Calibri"/>
-              </a:rPr>
-              <a:t>peavad</a:t>
-            </a:r>
-            <a:r>
-              <a:rPr lang="en-US">
-                <a:ea typeface="Calibri"/>
-                <a:cs typeface="Calibri"/>
-              </a:rPr>
-              <a:t> </a:t>
-            </a:r>
-            <a:r>
-              <a:rPr lang="en-US" err="1">
-                <a:ea typeface="Calibri"/>
-                <a:cs typeface="Calibri"/>
-              </a:rPr>
-              <a:t>andmed</a:t>
-            </a:r>
-            <a:r>
-              <a:rPr lang="en-US">
-                <a:ea typeface="Calibri"/>
-                <a:cs typeface="Calibri"/>
-              </a:rPr>
-              <a:t> </a:t>
-            </a:r>
-            <a:r>
-              <a:rPr lang="en-US" err="1">
-                <a:ea typeface="Calibri"/>
-                <a:cs typeface="Calibri"/>
-              </a:rPr>
-              <a:t>olema</a:t>
-            </a:r>
-            <a:r>
-              <a:rPr lang="en-US">
-                <a:ea typeface="Calibri"/>
-                <a:cs typeface="Calibri"/>
-              </a:rPr>
-              <a:t> </a:t>
-            </a:r>
-            <a:r>
-              <a:rPr lang="en-US" err="1">
-                <a:ea typeface="Calibri"/>
-                <a:cs typeface="Calibri"/>
-              </a:rPr>
-              <a:t>taaskasutatavad</a:t>
-            </a:r>
-            <a:r>
-              <a:rPr lang="en-US">
-                <a:ea typeface="Calibri"/>
-                <a:cs typeface="Calibri"/>
-              </a:rPr>
-              <a:t> – </a:t>
-            </a:r>
-            <a:r>
-              <a:rPr lang="en-US" err="1">
-                <a:ea typeface="Calibri"/>
-                <a:cs typeface="Calibri"/>
-              </a:rPr>
-              <a:t>selleks</a:t>
-            </a:r>
-            <a:r>
-              <a:rPr lang="en-US">
-                <a:ea typeface="Calibri"/>
-                <a:cs typeface="Calibri"/>
-              </a:rPr>
-              <a:t> </a:t>
-            </a:r>
-            <a:r>
-              <a:rPr lang="en-US" err="1">
-                <a:ea typeface="Calibri"/>
-                <a:cs typeface="Calibri"/>
-              </a:rPr>
-              <a:t>peavad</a:t>
-            </a:r>
-            <a:r>
-              <a:rPr lang="en-US">
-                <a:ea typeface="Calibri"/>
-                <a:cs typeface="Calibri"/>
-              </a:rPr>
-              <a:t> </a:t>
-            </a:r>
-            <a:r>
-              <a:rPr lang="en-US" err="1">
-                <a:ea typeface="Calibri"/>
-                <a:cs typeface="Calibri"/>
-              </a:rPr>
-              <a:t>olema</a:t>
-            </a:r>
-            <a:r>
-              <a:rPr lang="en-US">
-                <a:ea typeface="Calibri"/>
-                <a:cs typeface="Calibri"/>
-              </a:rPr>
-              <a:t> </a:t>
-            </a:r>
-            <a:r>
-              <a:rPr lang="en-US" err="1">
-                <a:ea typeface="Calibri"/>
-                <a:cs typeface="Calibri"/>
-              </a:rPr>
-              <a:t>kokku</a:t>
-            </a:r>
-            <a:r>
-              <a:rPr lang="en-US">
-                <a:ea typeface="Calibri"/>
-                <a:cs typeface="Calibri"/>
-              </a:rPr>
-              <a:t> </a:t>
-            </a:r>
-            <a:r>
-              <a:rPr lang="en-US" err="1">
-                <a:ea typeface="Calibri"/>
-                <a:cs typeface="Calibri"/>
-              </a:rPr>
-              <a:t>lepitud</a:t>
-            </a:r>
-            <a:r>
-              <a:rPr lang="en-US">
-                <a:ea typeface="Calibri"/>
-                <a:cs typeface="Calibri"/>
-              </a:rPr>
-              <a:t> ja </a:t>
-            </a:r>
-            <a:r>
-              <a:rPr lang="en-US" err="1">
-                <a:ea typeface="Calibri"/>
-                <a:cs typeface="Calibri"/>
-              </a:rPr>
-              <a:t>selgelt</a:t>
-            </a:r>
-            <a:r>
-              <a:rPr lang="en-US">
-                <a:ea typeface="Calibri"/>
-                <a:cs typeface="Calibri"/>
-              </a:rPr>
-              <a:t> </a:t>
-            </a:r>
-            <a:r>
-              <a:rPr lang="en-US" err="1">
-                <a:ea typeface="Calibri"/>
-                <a:cs typeface="Calibri"/>
-              </a:rPr>
-              <a:t>dokumenteeritud</a:t>
-            </a:r>
-            <a:r>
-              <a:rPr lang="en-US">
-                <a:ea typeface="Calibri"/>
-                <a:cs typeface="Calibri"/>
-              </a:rPr>
-              <a:t>, mis </a:t>
-            </a:r>
-            <a:r>
-              <a:rPr lang="en-US" err="1">
-                <a:ea typeface="Calibri"/>
-                <a:cs typeface="Calibri"/>
-              </a:rPr>
-              <a:t>eesmärgil</a:t>
-            </a:r>
-            <a:r>
-              <a:rPr lang="en-US">
-                <a:ea typeface="Calibri"/>
-                <a:cs typeface="Calibri"/>
-              </a:rPr>
-              <a:t> </a:t>
-            </a:r>
-            <a:r>
-              <a:rPr lang="en-US" err="1">
-                <a:ea typeface="Calibri"/>
-                <a:cs typeface="Calibri"/>
-              </a:rPr>
-              <a:t>võib</a:t>
-            </a:r>
-            <a:r>
-              <a:rPr lang="en-US">
-                <a:ea typeface="Calibri"/>
-                <a:cs typeface="Calibri"/>
-              </a:rPr>
-              <a:t> </a:t>
-            </a:r>
-            <a:r>
-              <a:rPr lang="en-US" err="1">
-                <a:ea typeface="Calibri"/>
-                <a:cs typeface="Calibri"/>
-              </a:rPr>
-              <a:t>andmeid</a:t>
-            </a:r>
-            <a:r>
-              <a:rPr lang="en-US">
-                <a:ea typeface="Calibri"/>
-                <a:cs typeface="Calibri"/>
-              </a:rPr>
-              <a:t> </a:t>
-            </a:r>
-            <a:r>
-              <a:rPr lang="en-US" err="1">
-                <a:ea typeface="Calibri"/>
-                <a:cs typeface="Calibri"/>
-              </a:rPr>
-              <a:t>kasutada</a:t>
-            </a:r>
-            <a:r>
-              <a:rPr lang="en-US">
-                <a:ea typeface="Calibri"/>
-                <a:cs typeface="Calibri"/>
-              </a:rPr>
-              <a:t> </a:t>
-            </a:r>
-            <a:r>
-              <a:rPr lang="en-US" err="1">
-                <a:ea typeface="Calibri"/>
-                <a:cs typeface="Calibri"/>
-              </a:rPr>
-              <a:t>ning</a:t>
-            </a:r>
-            <a:r>
-              <a:rPr lang="en-US">
-                <a:ea typeface="Calibri"/>
-                <a:cs typeface="Calibri"/>
-              </a:rPr>
-              <a:t> </a:t>
-            </a:r>
-            <a:r>
-              <a:rPr lang="en-US" err="1">
-                <a:ea typeface="Calibri"/>
-                <a:cs typeface="Calibri"/>
-              </a:rPr>
-              <a:t>tagatud</a:t>
-            </a:r>
-            <a:r>
-              <a:rPr lang="en-US">
-                <a:ea typeface="Calibri"/>
-                <a:cs typeface="Calibri"/>
-              </a:rPr>
-              <a:t> </a:t>
-            </a:r>
-            <a:r>
-              <a:rPr lang="en-US" err="1">
-                <a:ea typeface="Calibri"/>
-                <a:cs typeface="Calibri"/>
-              </a:rPr>
-              <a:t>andmete</a:t>
-            </a:r>
-            <a:r>
-              <a:rPr lang="en-US">
-                <a:ea typeface="Calibri"/>
-                <a:cs typeface="Calibri"/>
-              </a:rPr>
-              <a:t> </a:t>
-            </a:r>
-            <a:r>
-              <a:rPr lang="en-US" err="1">
-                <a:ea typeface="Calibri"/>
-                <a:cs typeface="Calibri"/>
-              </a:rPr>
-              <a:t>selline</a:t>
-            </a:r>
-            <a:r>
-              <a:rPr lang="en-US">
-                <a:ea typeface="Calibri"/>
-                <a:cs typeface="Calibri"/>
-              </a:rPr>
-              <a:t> </a:t>
-            </a:r>
-            <a:r>
-              <a:rPr lang="en-US" err="1">
-                <a:ea typeface="Calibri"/>
-                <a:cs typeface="Calibri"/>
-              </a:rPr>
-              <a:t>vorm</a:t>
-            </a:r>
-            <a:r>
-              <a:rPr lang="en-US">
-                <a:ea typeface="Calibri"/>
-                <a:cs typeface="Calibri"/>
-              </a:rPr>
-              <a:t>, mis </a:t>
-            </a:r>
-            <a:r>
-              <a:rPr lang="en-US" err="1">
-                <a:ea typeface="Calibri"/>
-                <a:cs typeface="Calibri"/>
-              </a:rPr>
-              <a:t>võimaldab</a:t>
-            </a:r>
-            <a:r>
-              <a:rPr lang="en-US">
-                <a:ea typeface="Calibri"/>
-                <a:cs typeface="Calibri"/>
-              </a:rPr>
-              <a:t> </a:t>
-            </a:r>
-            <a:r>
-              <a:rPr lang="en-US" err="1">
-                <a:ea typeface="Calibri"/>
-                <a:cs typeface="Calibri"/>
-              </a:rPr>
-              <a:t>nende</a:t>
-            </a:r>
-            <a:r>
-              <a:rPr lang="en-US">
-                <a:ea typeface="Calibri"/>
-                <a:cs typeface="Calibri"/>
-              </a:rPr>
-              <a:t> </a:t>
-            </a:r>
-            <a:r>
-              <a:rPr lang="en-US" err="1">
-                <a:ea typeface="Calibri"/>
-                <a:cs typeface="Calibri"/>
-              </a:rPr>
-              <a:t>analüüsi</a:t>
-            </a:r>
-            <a:r>
-              <a:rPr lang="en-US">
-                <a:ea typeface="Calibri"/>
-                <a:cs typeface="Calibri"/>
-              </a:rPr>
-              <a:t>. </a:t>
-            </a:r>
-            <a:br>
-              <a:rPr lang="en-US">
-                <a:ea typeface="Calibri"/>
-                <a:cs typeface="+mn-lt"/>
-              </a:rPr>
-            </a:br>
-            <a:r>
-              <a:rPr lang="en-US" err="1">
-                <a:ea typeface="Calibri"/>
-                <a:cs typeface="Calibri"/>
-              </a:rPr>
-              <a:t>Neljandaks</a:t>
-            </a:r>
-            <a:r>
-              <a:rPr lang="en-US">
-                <a:ea typeface="Calibri"/>
-                <a:cs typeface="Calibri"/>
-              </a:rPr>
-              <a:t> </a:t>
-            </a:r>
-            <a:r>
-              <a:rPr lang="en-US" err="1">
-                <a:ea typeface="Calibri"/>
-                <a:cs typeface="Calibri"/>
-              </a:rPr>
-              <a:t>peavad</a:t>
-            </a:r>
-            <a:r>
-              <a:rPr lang="en-US">
-                <a:ea typeface="Calibri"/>
-                <a:cs typeface="Calibri"/>
-              </a:rPr>
-              <a:t> </a:t>
-            </a:r>
-            <a:r>
-              <a:rPr lang="en-US" err="1">
-                <a:ea typeface="Calibri"/>
-                <a:cs typeface="Calibri"/>
-              </a:rPr>
-              <a:t>andmed</a:t>
-            </a:r>
-            <a:r>
-              <a:rPr lang="en-US">
-                <a:ea typeface="Calibri"/>
-                <a:cs typeface="Calibri"/>
-              </a:rPr>
-              <a:t> </a:t>
-            </a:r>
-            <a:r>
-              <a:rPr lang="en-US" err="1">
-                <a:ea typeface="Calibri"/>
-                <a:cs typeface="Calibri"/>
-              </a:rPr>
-              <a:t>olema</a:t>
-            </a:r>
-            <a:r>
-              <a:rPr lang="en-US">
-                <a:ea typeface="Calibri"/>
-                <a:cs typeface="Calibri"/>
-              </a:rPr>
-              <a:t> </a:t>
-            </a:r>
-            <a:r>
-              <a:rPr lang="en-US" err="1">
-                <a:ea typeface="Calibri"/>
-                <a:cs typeface="Calibri"/>
-              </a:rPr>
-              <a:t>ühilduvad</a:t>
-            </a:r>
-            <a:r>
-              <a:rPr lang="en-US">
-                <a:ea typeface="Calibri"/>
-                <a:cs typeface="Calibri"/>
-              </a:rPr>
-              <a:t> - see </a:t>
-            </a:r>
-            <a:r>
-              <a:rPr lang="en-US" err="1">
-                <a:ea typeface="Calibri"/>
-                <a:cs typeface="Calibri"/>
-              </a:rPr>
-              <a:t>tähendab</a:t>
-            </a:r>
-            <a:r>
-              <a:rPr lang="en-US">
-                <a:ea typeface="Calibri"/>
-                <a:cs typeface="Calibri"/>
-              </a:rPr>
-              <a:t>, et </a:t>
-            </a:r>
-            <a:r>
-              <a:rPr lang="en-US" err="1">
-                <a:ea typeface="Calibri"/>
-                <a:cs typeface="Calibri"/>
-              </a:rPr>
-              <a:t>kogutud</a:t>
-            </a:r>
-            <a:r>
-              <a:rPr lang="en-US">
-                <a:ea typeface="Calibri"/>
-                <a:cs typeface="Calibri"/>
-              </a:rPr>
-              <a:t> </a:t>
-            </a:r>
-            <a:r>
-              <a:rPr lang="en-US" err="1">
-                <a:ea typeface="Calibri"/>
-                <a:cs typeface="Calibri"/>
-              </a:rPr>
-              <a:t>andmeid</a:t>
-            </a:r>
-            <a:r>
-              <a:rPr lang="en-US">
-                <a:ea typeface="Calibri"/>
-                <a:cs typeface="Calibri"/>
-              </a:rPr>
-              <a:t> </a:t>
-            </a:r>
-            <a:r>
-              <a:rPr lang="en-US" err="1">
-                <a:ea typeface="Calibri"/>
-                <a:cs typeface="Calibri"/>
-              </a:rPr>
-              <a:t>saab</a:t>
-            </a:r>
-            <a:r>
-              <a:rPr lang="en-US">
-                <a:ea typeface="Calibri"/>
-                <a:cs typeface="Calibri"/>
-              </a:rPr>
-              <a:t> </a:t>
-            </a:r>
-            <a:r>
-              <a:rPr lang="en-US" err="1">
-                <a:ea typeface="Calibri"/>
-                <a:cs typeface="Calibri"/>
-              </a:rPr>
-              <a:t>ühendada</a:t>
-            </a:r>
-            <a:r>
-              <a:rPr lang="en-US">
-                <a:ea typeface="Calibri"/>
-                <a:cs typeface="Calibri"/>
-              </a:rPr>
-              <a:t> </a:t>
-            </a:r>
-            <a:r>
-              <a:rPr lang="en-US" err="1">
-                <a:ea typeface="Calibri"/>
-                <a:cs typeface="Calibri"/>
-              </a:rPr>
-              <a:t>teiste</a:t>
-            </a:r>
-            <a:r>
-              <a:rPr lang="en-US">
-                <a:ea typeface="Calibri"/>
-                <a:cs typeface="Calibri"/>
-              </a:rPr>
-              <a:t> </a:t>
-            </a:r>
-            <a:r>
-              <a:rPr lang="en-US" err="1">
-                <a:ea typeface="Calibri"/>
-                <a:cs typeface="Calibri"/>
-              </a:rPr>
-              <a:t>andmetega</a:t>
-            </a:r>
-            <a:r>
-              <a:rPr lang="en-US">
-                <a:ea typeface="Calibri"/>
-                <a:cs typeface="Calibri"/>
-              </a:rPr>
-              <a:t>. Selleks on </a:t>
-            </a:r>
-            <a:r>
-              <a:rPr lang="en-US" err="1">
-                <a:ea typeface="Calibri"/>
-                <a:cs typeface="Calibri"/>
-              </a:rPr>
-              <a:t>oluline</a:t>
-            </a:r>
-            <a:r>
-              <a:rPr lang="en-US">
-                <a:ea typeface="Calibri"/>
-                <a:cs typeface="Calibri"/>
-              </a:rPr>
-              <a:t> </a:t>
-            </a:r>
-            <a:r>
-              <a:rPr lang="en-US" err="1">
-                <a:ea typeface="Calibri"/>
-                <a:cs typeface="Calibri"/>
-              </a:rPr>
-              <a:t>kasutada</a:t>
-            </a:r>
-            <a:r>
-              <a:rPr lang="en-US">
-                <a:ea typeface="Calibri"/>
-                <a:cs typeface="Calibri"/>
-              </a:rPr>
-              <a:t> </a:t>
-            </a:r>
-            <a:r>
-              <a:rPr lang="en-US" err="1">
-                <a:ea typeface="Calibri"/>
-                <a:cs typeface="Calibri"/>
-              </a:rPr>
-              <a:t>avatud</a:t>
-            </a:r>
-            <a:r>
-              <a:rPr lang="en-US">
-                <a:ea typeface="Calibri"/>
-                <a:cs typeface="Calibri"/>
-              </a:rPr>
-              <a:t> </a:t>
-            </a:r>
-            <a:r>
-              <a:rPr lang="en-US" err="1">
-                <a:ea typeface="Calibri"/>
-                <a:cs typeface="Calibri"/>
-              </a:rPr>
-              <a:t>failivorminguid</a:t>
-            </a:r>
-            <a:r>
-              <a:rPr lang="en-US">
-                <a:ea typeface="Calibri"/>
-                <a:cs typeface="Calibri"/>
-              </a:rPr>
-              <a:t> ja </a:t>
-            </a:r>
-            <a:r>
-              <a:rPr lang="en-US" err="1">
-                <a:ea typeface="Calibri"/>
-                <a:cs typeface="Calibri"/>
-              </a:rPr>
-              <a:t>ühtlustada</a:t>
-            </a:r>
-            <a:r>
-              <a:rPr lang="en-US">
-                <a:ea typeface="Calibri"/>
-                <a:cs typeface="Calibri"/>
-              </a:rPr>
-              <a:t> </a:t>
-            </a:r>
-            <a:r>
-              <a:rPr lang="en-US" err="1">
-                <a:ea typeface="Calibri"/>
-                <a:cs typeface="Calibri"/>
-              </a:rPr>
-              <a:t>terminite</a:t>
-            </a:r>
-            <a:r>
-              <a:rPr lang="en-US">
-                <a:ea typeface="Calibri"/>
-                <a:cs typeface="Calibri"/>
-              </a:rPr>
-              <a:t> </a:t>
-            </a:r>
-            <a:r>
-              <a:rPr lang="en-US" err="1">
-                <a:ea typeface="Calibri"/>
-                <a:cs typeface="Calibri"/>
-              </a:rPr>
-              <a:t>kasutus</a:t>
-            </a:r>
-            <a:r>
-              <a:rPr lang="en-US">
-                <a:ea typeface="Calibri"/>
-                <a:cs typeface="Calibri"/>
-              </a:rPr>
-              <a:t>.</a:t>
-            </a:r>
-          </a:p>
-        </p:txBody>
-      </p:sp>
-      <p:sp>
-        <p:nvSpPr>
-          <p:cNvPr id="4" name="Slide Number Placeholder 3"/>
-          <p:cNvSpPr>
-            <a:spLocks noGrp="1"/>
-          </p:cNvSpPr>
-          <p:nvPr>
-            <p:ph type="sldNum" sz="quarter" idx="5"/>
-          </p:nvPr>
-        </p:nvSpPr>
-        <p:spPr/>
-        <p:txBody>
-          <a:bodyPr/>
-          <a:lstStyle/>
-          <a:p>
-            <a:fld id="{46699514-027B-49BD-8B49-5054CA40ECF4}" type="slidenum">
-              <a:rPr lang="en-US"/>
-              <a:t>9</a:t>
-            </a:fld>
-            <a:endParaRPr lang="en-US"/>
-          </a:p>
-        </p:txBody>
-      </p:sp>
-    </p:spTree>
-    <p:extLst>
-      <p:ext uri="{BB962C8B-B14F-4D97-AF65-F5344CB8AC3E}">
-        <p14:creationId xmlns:p14="http://schemas.microsoft.com/office/powerpoint/2010/main" val="714793515"/>
       </p:ext>
     </p:extLst>
   </p:cSld>
@@ -5139,7 +5091,7 @@
           <a:p>
             <a:fld id="{46699514-027B-49BD-8B49-5054CA40ECF4}" type="slidenum">
               <a:rPr lang="et-EE" smtClean="0"/>
-              <a:t>27</a:t>
+              <a:t>24</a:t>
             </a:fld>
             <a:endParaRPr lang="et-EE"/>
           </a:p>
@@ -16285,7 +16237,7 @@
           <a:p>
             <a:fld id="{DE840A40-73C8-4048-8140-49F5D65BB431}" type="datetimeFigureOut">
               <a:rPr lang="et-EE" smtClean="0"/>
-              <a:t>03.09.2026</a:t>
+              <a:t>08.09.2026</a:t>
             </a:fld>
             <a:endParaRPr lang="et-EE"/>
           </a:p>
@@ -34182,7 +34134,23 @@
             </a:r>
             <a:r>
               <a:rPr lang="en-GB" dirty="0" err="1"/>
-              <a:t>tabel</a:t>
+              <a:t>ja</a:t>
+            </a:r>
+            <a:r>
+              <a:rPr lang="en-GB" dirty="0"/>
+              <a:t> </a:t>
+            </a:r>
+            <a:r>
+              <a:rPr lang="en-GB" dirty="0" err="1"/>
+              <a:t>objektide</a:t>
+            </a:r>
+            <a:r>
+              <a:rPr lang="en-GB" dirty="0"/>
+              <a:t> </a:t>
+            </a:r>
+            <a:r>
+              <a:rPr lang="en-GB" dirty="0" err="1"/>
+              <a:t>tabelid</a:t>
             </a:r>
             <a:endParaRPr lang="en-GB" dirty="0"/>
           </a:p>
@@ -34228,6 +34196,23 @@
               <a:t>lehele</a:t>
             </a:r>
             <a:endParaRPr lang="en-GB" dirty="0"/>
+          </a:p>
+          <a:p>
+            <a:endParaRPr lang="en-GB" dirty="0"/>
+          </a:p>
+          <a:p>
+            <a:r>
+              <a:rPr lang="en-GB" dirty="0"/>
+              <a:t>Minu </a:t>
+            </a:r>
+            <a:r>
+              <a:rPr lang="en-GB" dirty="0" err="1"/>
+              <a:t>tabelid</a:t>
+            </a:r>
+            <a:r>
+              <a:rPr lang="en-GB" dirty="0"/>
+              <a:t> = INFO.VIEW.TABLES ….</a:t>
+            </a:r>
           </a:p>
         </p:txBody>
       </p:sp>
@@ -34315,7 +34300,7 @@
             <p:ph sz="quarter" idx="10"/>
             <p:extLst>
               <p:ext uri="{D42A27DB-BD31-4B8C-83A1-F6EECF244321}">
-                <p14:modId xmlns:p14="http://schemas.microsoft.com/office/powerpoint/2010/main" val="3542064102"/>
+                <p14:modId xmlns:p14="http://schemas.microsoft.com/office/powerpoint/2010/main" val="1517054020"/>
               </p:ext>
             </p:extLst>
           </p:nvPr>
@@ -34861,7 +34846,7 @@
                           <a:effectLst/>
                           <a:latin typeface="+mn-lt"/>
                         </a:rPr>
-                        <a:t>Koolitus – Portfoolio täiendamine</a:t>
+                        <a:t>Koolitus – </a:t>
                       </a:r>
                       <a:endParaRPr lang="et-EE" sz="2400" b="0" i="0" noProof="0" dirty="0">
                         <a:solidFill>
@@ -35447,413 +35432,6 @@
   <p:cSld>
     <p:spTree>
       <p:nvGrpSpPr>
-        <p:cNvPr id="1" name="">
-          <a:extLst>
-            <a:ext uri="{FF2B5EF4-FFF2-40B4-BE49-F238E27FC236}">
-              <a16:creationId xmlns:a16="http://schemas.microsoft.com/office/drawing/2014/main" id="{15FF916F-3A2C-85BA-9906-09B4A79C0272}"/>
-            </a:ext>
-          </a:extLst>
-        </p:cNvPr>
-        <p:cNvGrpSpPr/>
-        <p:nvPr/>
-      </p:nvGrpSpPr>
-      <p:grpSpPr>
-        <a:xfrm>
-          <a:off x="0" y="0"/>
-          <a:ext cx="0" cy="0"/>
-          <a:chOff x="0" y="0"/>
-          <a:chExt cx="0" cy="0"/>
-        </a:xfrm>
-      </p:grpSpPr>
-      <p:sp>
-        <p:nvSpPr>
-          <p:cNvPr id="2" name="Title 1">
-            <a:extLst>
-              <a:ext uri="{FF2B5EF4-FFF2-40B4-BE49-F238E27FC236}">
-                <a16:creationId xmlns:a16="http://schemas.microsoft.com/office/drawing/2014/main" id="{D4725537-CB3E-C083-F8A7-F00B6AE12D6E}"/>
-              </a:ext>
-            </a:extLst>
-          </p:cNvPr>
-          <p:cNvSpPr>
-            <a:spLocks noGrp="1"/>
-          </p:cNvSpPr>
-          <p:nvPr>
-            <p:ph type="ctrTitle"/>
-          </p:nvPr>
-        </p:nvSpPr>
-        <p:spPr>
-          <a:xfrm>
-            <a:off x="614923" y="479570"/>
-            <a:ext cx="10044112" cy="357043"/>
-          </a:xfrm>
-        </p:spPr>
-        <p:txBody>
-          <a:bodyPr/>
-          <a:lstStyle/>
-          <a:p>
-            <a:r>
-              <a:rPr lang="et-EE" b="1" noProof="0" dirty="0"/>
-              <a:t>Lõputöö osad</a:t>
-            </a:r>
-            <a:endParaRPr lang="et-EE" noProof="0" dirty="0"/>
-          </a:p>
-        </p:txBody>
-      </p:sp>
-      <p:sp>
-        <p:nvSpPr>
-          <p:cNvPr id="3" name="Content Placeholder 2">
-            <a:extLst>
-              <a:ext uri="{FF2B5EF4-FFF2-40B4-BE49-F238E27FC236}">
-                <a16:creationId xmlns:a16="http://schemas.microsoft.com/office/drawing/2014/main" id="{721CFECB-31FC-C645-D35E-8C1758638C04}"/>
-              </a:ext>
-            </a:extLst>
-          </p:cNvPr>
-          <p:cNvSpPr>
-            <a:spLocks noGrp="1"/>
-          </p:cNvSpPr>
-          <p:nvPr>
-            <p:ph sz="quarter" idx="10"/>
-          </p:nvPr>
-        </p:nvSpPr>
-        <p:spPr/>
-        <p:txBody>
-          <a:bodyPr/>
-          <a:lstStyle/>
-          <a:p>
-            <a:pPr marL="457200" indent="-457200">
-              <a:lnSpc>
-                <a:spcPct val="150000"/>
-              </a:lnSpc>
-              <a:buAutoNum type="arabicPeriod"/>
-            </a:pPr>
-            <a:r>
-              <a:rPr lang="et-EE" sz="2000" noProof="0" dirty="0">
-                <a:ea typeface="Inter"/>
-                <a:cs typeface="Noto Serif"/>
-              </a:rPr>
-              <a:t>Ettevõtte ja uurimisprobleemi tutvustus</a:t>
-            </a:r>
-            <a:endParaRPr lang="et-EE" sz="2000" noProof="0" dirty="0">
-              <a:cs typeface="Noto Serif"/>
-            </a:endParaRPr>
-          </a:p>
-          <a:p>
-            <a:pPr marL="457200" indent="-457200">
-              <a:lnSpc>
-                <a:spcPct val="150000"/>
-              </a:lnSpc>
-              <a:buClr>
-                <a:srgbClr val="121212"/>
-              </a:buClr>
-              <a:buAutoNum type="arabicPeriod"/>
-            </a:pPr>
-            <a:r>
-              <a:rPr lang="et-EE" sz="2000" noProof="0" dirty="0">
-                <a:ea typeface="Inter"/>
-                <a:cs typeface="Noto Serif"/>
-              </a:rPr>
-              <a:t>Uurimisplaan</a:t>
-            </a:r>
-            <a:endParaRPr lang="et-EE" sz="2000" noProof="0" dirty="0">
-              <a:cs typeface="Noto Serif"/>
-            </a:endParaRPr>
-          </a:p>
-          <a:p>
-            <a:pPr marL="457200" indent="-457200">
-              <a:lnSpc>
-                <a:spcPct val="150000"/>
-              </a:lnSpc>
-              <a:buClr>
-                <a:srgbClr val="121212"/>
-              </a:buClr>
-              <a:buAutoNum type="arabicPeriod"/>
-            </a:pPr>
-            <a:r>
-              <a:rPr lang="et-EE" sz="2000" noProof="0" dirty="0">
-                <a:ea typeface="Inter"/>
-                <a:cs typeface="Noto Serif"/>
-              </a:rPr>
-              <a:t>Andmekaitse kirjeldus – mis alustel andmeid töödeldakse?</a:t>
-            </a:r>
-            <a:endParaRPr lang="et-EE" sz="2000" noProof="0" dirty="0">
-              <a:cs typeface="Noto Serif"/>
-            </a:endParaRPr>
-          </a:p>
-          <a:p>
-            <a:pPr marL="457200" indent="-457200">
-              <a:lnSpc>
-                <a:spcPct val="150000"/>
-              </a:lnSpc>
-              <a:buClr>
-                <a:srgbClr val="121212"/>
-              </a:buClr>
-              <a:buAutoNum type="arabicPeriod"/>
-            </a:pPr>
-            <a:r>
-              <a:rPr lang="et-EE" sz="2000" noProof="0" dirty="0">
-                <a:ea typeface="Inter"/>
-                <a:cs typeface="Noto Serif"/>
-              </a:rPr>
-              <a:t>Ärisõnastik, andmemudel, andmesõnastik</a:t>
-            </a:r>
-            <a:endParaRPr lang="et-EE" sz="2000" noProof="0" dirty="0">
-              <a:cs typeface="Noto Serif"/>
-            </a:endParaRPr>
-          </a:p>
-          <a:p>
-            <a:pPr marL="457200" indent="-457200">
-              <a:lnSpc>
-                <a:spcPct val="150000"/>
-              </a:lnSpc>
-              <a:buClr>
-                <a:srgbClr val="121212"/>
-              </a:buClr>
-              <a:buAutoNum type="arabicPeriod"/>
-            </a:pPr>
-            <a:r>
-              <a:rPr lang="et-EE" sz="2000" noProof="0" dirty="0">
-                <a:ea typeface="Inter"/>
-                <a:cs typeface="Noto Serif"/>
-              </a:rPr>
-              <a:t>Andmevoog</a:t>
-            </a:r>
-            <a:endParaRPr lang="et-EE" sz="2000" noProof="0" dirty="0">
-              <a:cs typeface="Noto Serif"/>
-            </a:endParaRPr>
-          </a:p>
-          <a:p>
-            <a:pPr marL="457200" indent="-457200">
-              <a:lnSpc>
-                <a:spcPct val="150000"/>
-              </a:lnSpc>
-              <a:buClr>
-                <a:srgbClr val="121212"/>
-              </a:buClr>
-              <a:buAutoNum type="arabicPeriod"/>
-            </a:pPr>
-            <a:r>
-              <a:rPr lang="et-EE" sz="2000" noProof="0" dirty="0">
-                <a:ea typeface="Inter"/>
-                <a:cs typeface="Noto Serif"/>
-              </a:rPr>
-              <a:t>Näidisandmestiku loomine</a:t>
-            </a:r>
-            <a:endParaRPr lang="et-EE" sz="2000" noProof="0" dirty="0">
-              <a:cs typeface="Noto Serif"/>
-            </a:endParaRPr>
-          </a:p>
-          <a:p>
-            <a:pPr marL="457200" indent="-457200">
-              <a:lnSpc>
-                <a:spcPct val="150000"/>
-              </a:lnSpc>
-              <a:buClr>
-                <a:srgbClr val="121212"/>
-              </a:buClr>
-              <a:buAutoNum type="arabicPeriod"/>
-            </a:pPr>
-            <a:r>
-              <a:rPr lang="et-EE" sz="2000" noProof="0" dirty="0">
-                <a:ea typeface="Inter"/>
-                <a:cs typeface="Noto Serif"/>
-              </a:rPr>
-              <a:t>Andmete kvaliteedi kontroll</a:t>
-            </a:r>
-            <a:endParaRPr lang="et-EE" sz="2000" noProof="0" dirty="0">
-              <a:cs typeface="Noto Serif"/>
-            </a:endParaRPr>
-          </a:p>
-          <a:p>
-            <a:pPr marL="457200" indent="-457200">
-              <a:lnSpc>
-                <a:spcPct val="150000"/>
-              </a:lnSpc>
-              <a:buClr>
-                <a:srgbClr val="121212"/>
-              </a:buClr>
-              <a:buAutoNum type="arabicPeriod"/>
-            </a:pPr>
-            <a:r>
-              <a:rPr lang="et-EE" sz="2000" noProof="0" dirty="0">
-                <a:ea typeface="Inter"/>
-                <a:cs typeface="Noto Serif"/>
-              </a:rPr>
-              <a:t>Andmete </a:t>
-            </a:r>
-            <a:r>
-              <a:rPr lang="et-EE" sz="2000" noProof="0" dirty="0" err="1">
-                <a:ea typeface="Inter"/>
-                <a:cs typeface="Noto Serif"/>
-              </a:rPr>
-              <a:t>eksploratiivne</a:t>
-            </a:r>
-            <a:r>
-              <a:rPr lang="et-EE" sz="2000" noProof="0" dirty="0">
-                <a:ea typeface="Inter"/>
-                <a:cs typeface="Noto Serif"/>
-              </a:rPr>
-              <a:t> analüüs</a:t>
-            </a:r>
-            <a:endParaRPr lang="et-EE" sz="2000" noProof="0" dirty="0">
-              <a:cs typeface="Noto Serif"/>
-            </a:endParaRPr>
-          </a:p>
-          <a:p>
-            <a:pPr marL="457200" indent="-457200">
-              <a:lnSpc>
-                <a:spcPct val="150000"/>
-              </a:lnSpc>
-              <a:buClr>
-                <a:srgbClr val="121212"/>
-              </a:buClr>
-              <a:buAutoNum type="arabicPeriod"/>
-            </a:pPr>
-            <a:r>
-              <a:rPr lang="et-EE" sz="2000" noProof="0" dirty="0">
-                <a:ea typeface="Inter"/>
-                <a:cs typeface="Noto Serif"/>
-              </a:rPr>
-              <a:t>Andmete statistiline analüüs</a:t>
-            </a:r>
-            <a:endParaRPr lang="et-EE" sz="2000" noProof="0" dirty="0">
-              <a:cs typeface="Noto Serif"/>
-            </a:endParaRPr>
-          </a:p>
-          <a:p>
-            <a:pPr marL="457200" indent="-457200">
-              <a:lnSpc>
-                <a:spcPct val="150000"/>
-              </a:lnSpc>
-              <a:buClr>
-                <a:srgbClr val="121212"/>
-              </a:buClr>
-              <a:buAutoNum type="arabicPeriod"/>
-            </a:pPr>
-            <a:r>
-              <a:rPr lang="et-EE" sz="2000" noProof="0" dirty="0">
-                <a:ea typeface="Inter"/>
-                <a:cs typeface="Noto Serif"/>
-              </a:rPr>
-              <a:t>Kirjeldav raport / analüüs</a:t>
-            </a:r>
-            <a:endParaRPr lang="et-EE" sz="2000" noProof="0" dirty="0">
-              <a:cs typeface="Noto Serif"/>
-            </a:endParaRPr>
-          </a:p>
-          <a:p>
-            <a:pPr marL="457200" indent="-457200">
-              <a:lnSpc>
-                <a:spcPct val="150000"/>
-              </a:lnSpc>
-              <a:buClr>
-                <a:srgbClr val="121212"/>
-              </a:buClr>
-              <a:buAutoNum type="arabicPeriod"/>
-            </a:pPr>
-            <a:r>
-              <a:rPr lang="et-EE" sz="2000" noProof="0" dirty="0">
-                <a:ea typeface="Inter"/>
-                <a:cs typeface="Noto Serif"/>
-              </a:rPr>
-              <a:t>Andmelugu, järeldused</a:t>
-            </a:r>
-            <a:endParaRPr lang="et-EE" sz="2000" noProof="0" dirty="0">
-              <a:cs typeface="Noto Serif"/>
-            </a:endParaRPr>
-          </a:p>
-          <a:p>
-            <a:pPr marL="342900" indent="-342900">
-              <a:lnSpc>
-                <a:spcPct val="150000"/>
-              </a:lnSpc>
-              <a:buClr>
-                <a:srgbClr val="121212"/>
-              </a:buClr>
-              <a:buFont typeface="Inter" panose="020B0502030000000004" pitchFamily="34" charset="0"/>
-              <a:buAutoNum type="arabicPeriod"/>
-            </a:pPr>
-            <a:endParaRPr lang="et-EE" sz="2400" noProof="0" dirty="0">
-              <a:cs typeface="Noto Serif"/>
-            </a:endParaRPr>
-          </a:p>
-          <a:p>
-            <a:pPr marL="342900" indent="-342900">
-              <a:lnSpc>
-                <a:spcPct val="150000"/>
-              </a:lnSpc>
-              <a:buClr>
-                <a:srgbClr val="121212"/>
-              </a:buClr>
-              <a:buFont typeface="Inter" panose="020B0502030000000004" pitchFamily="34" charset="0"/>
-              <a:buAutoNum type="arabicPeriod"/>
-            </a:pPr>
-            <a:endParaRPr lang="et-EE" sz="2400" noProof="0" dirty="0">
-              <a:cs typeface="Arial"/>
-            </a:endParaRPr>
-          </a:p>
-          <a:p>
-            <a:pPr marL="857250" lvl="1" indent="-342900">
-              <a:lnSpc>
-                <a:spcPct val="150000"/>
-              </a:lnSpc>
-              <a:buFont typeface="Arial,Sans-Serif" panose="020B0502030000000004" pitchFamily="34" charset="0"/>
-              <a:buChar char="o"/>
-            </a:pPr>
-            <a:endParaRPr lang="et-EE" sz="2400" noProof="0" dirty="0">
-              <a:cs typeface="Arial"/>
-            </a:endParaRPr>
-          </a:p>
-          <a:p>
-            <a:pPr marL="342900" indent="-342900">
-              <a:lnSpc>
-                <a:spcPct val="150000"/>
-              </a:lnSpc>
-              <a:buAutoNum type="arabicPeriod"/>
-            </a:pPr>
-            <a:endParaRPr lang="et-EE" sz="2400" noProof="0" dirty="0">
-              <a:cs typeface="Arial"/>
-            </a:endParaRPr>
-          </a:p>
-          <a:p>
-            <a:pPr marL="514350" indent="-514350">
-              <a:lnSpc>
-                <a:spcPct val="150000"/>
-              </a:lnSpc>
-              <a:buAutoNum type="arabicPeriod"/>
-            </a:pPr>
-            <a:endParaRPr lang="et-EE" sz="2800" noProof="0" dirty="0">
-              <a:cs typeface="Arial"/>
-            </a:endParaRPr>
-          </a:p>
-          <a:p>
-            <a:pPr marL="0" indent="0">
-              <a:lnSpc>
-                <a:spcPct val="150000"/>
-              </a:lnSpc>
-              <a:buNone/>
-            </a:pPr>
-            <a:endParaRPr lang="et-EE" sz="2800" noProof="0" dirty="0"/>
-          </a:p>
-        </p:txBody>
-      </p:sp>
-    </p:spTree>
-    <p:extLst>
-      <p:ext uri="{BB962C8B-B14F-4D97-AF65-F5344CB8AC3E}">
-        <p14:creationId xmlns:p14="http://schemas.microsoft.com/office/powerpoint/2010/main" val="645017635"/>
-      </p:ext>
-    </p:extLst>
-  </p:cSld>
-  <p:clrMapOvr>
-    <a:masterClrMapping/>
-  </p:clrMapOvr>
-</p:sld>
-</file>
-
-<file path=ppt/slides/slide24.xml><?xml version="1.0" encoding="utf-8"?>
-<p:sld xmlns:a="http://schemas.openxmlformats.org/drawingml/2006/main" xmlns:r="http://schemas.openxmlformats.org/officeDocument/2006/relationships" xmlns:p="http://schemas.openxmlformats.org/presentationml/2006/main">
-  <p:cSld>
-    <p:spTree>
-      <p:nvGrpSpPr>
         <p:cNvPr id="1" name=""/>
         <p:cNvGrpSpPr/>
         <p:nvPr/>
@@ -35871,7 +35449,7 @@
           <p:cNvPr id="2" name="Title 1">
             <a:extLst>
               <a:ext uri="{FF2B5EF4-FFF2-40B4-BE49-F238E27FC236}">
-                <a16:creationId xmlns:a16="http://schemas.microsoft.com/office/drawing/2014/main" id="{CD98CB92-3A86-0BA9-A0AB-33BE1C1DEBBC}"/>
+                <a16:creationId xmlns:a16="http://schemas.microsoft.com/office/drawing/2014/main" id="{9A922E6F-82ED-EBEE-88F6-576E7674F7AC}"/>
               </a:ext>
             </a:extLst>
           </p:cNvPr>
@@ -35888,9 +35466,10 @@
           <a:lstStyle/>
           <a:p>
             <a:r>
-              <a:rPr lang="et-EE" noProof="0" dirty="0"/>
-              <a:t>Lõputöö ajakava</a:t>
-            </a:r>
+              <a:rPr lang="en-GB" dirty="0" err="1"/>
+              <a:t>Harjutus</a:t>
+            </a:r>
+            <a:endParaRPr lang="en-GB" dirty="0"/>
           </a:p>
         </p:txBody>
       </p:sp>
@@ -35899,7 +35478,7 @@
           <p:cNvPr id="3" name="Content Placeholder 2">
             <a:extLst>
               <a:ext uri="{FF2B5EF4-FFF2-40B4-BE49-F238E27FC236}">
-                <a16:creationId xmlns:a16="http://schemas.microsoft.com/office/drawing/2014/main" id="{7574EBEB-2DAD-CE5A-D9C4-804B7FFDEAFD}"/>
+                <a16:creationId xmlns:a16="http://schemas.microsoft.com/office/drawing/2014/main" id="{76A10827-3340-E047-A445-5343898634FA}"/>
               </a:ext>
             </a:extLst>
           </p:cNvPr>
@@ -35915,33 +35494,128 @@
           <a:bodyPr/>
           <a:lstStyle/>
           <a:p>
-            <a:pPr>
-              <a:lnSpc>
-                <a:spcPct val="150000"/>
-              </a:lnSpc>
-            </a:pPr>
-            <a:r>
-              <a:rPr lang="et-EE" sz="2800" noProof="0" dirty="0"/>
-              <a:t>Reede pärastlõunaks märkida end huvipakkuva teema juurde</a:t>
-            </a:r>
+            <a:r>
+              <a:rPr lang="en-GB" dirty="0" err="1"/>
+              <a:t>Kirjeldame</a:t>
+            </a:r>
+            <a:r>
+              <a:rPr lang="en-GB" dirty="0"/>
+              <a:t> </a:t>
+            </a:r>
+            <a:r>
+              <a:rPr lang="en-GB" dirty="0" err="1"/>
+              <a:t>andmevoo</a:t>
+            </a:r>
+            <a:endParaRPr lang="en-GB" dirty="0"/>
           </a:p>
           <a:p>
-            <a:pPr>
-              <a:lnSpc>
-                <a:spcPct val="150000"/>
-              </a:lnSpc>
-            </a:pPr>
-            <a:r>
-              <a:rPr lang="et-EE" sz="2800" noProof="0" dirty="0"/>
-              <a:t>Teisipäeval kohtumine kliendiga</a:t>
-            </a:r>
+            <a:r>
+              <a:rPr lang="en-GB" dirty="0" err="1"/>
+              <a:t>Kirjeldame</a:t>
+            </a:r>
+            <a:r>
+              <a:rPr lang="en-GB" dirty="0"/>
+              <a:t> </a:t>
+            </a:r>
+            <a:r>
+              <a:rPr lang="en-GB" dirty="0" err="1"/>
+              <a:t>tabelite</a:t>
+            </a:r>
+            <a:r>
+              <a:rPr lang="en-GB" dirty="0"/>
+              <a:t> </a:t>
+            </a:r>
+            <a:r>
+              <a:rPr lang="en-GB" dirty="0" err="1"/>
+              <a:t>veerud</a:t>
+            </a:r>
+            <a:endParaRPr lang="en-GB" dirty="0"/>
+          </a:p>
+          <a:p>
+            <a:r>
+              <a:rPr lang="en-GB" dirty="0" err="1"/>
+              <a:t>Kirjeldame</a:t>
+            </a:r>
+            <a:r>
+              <a:rPr lang="en-GB" dirty="0"/>
+              <a:t> </a:t>
+            </a:r>
+            <a:r>
+              <a:rPr lang="en-GB" dirty="0" err="1"/>
+              <a:t>päringud</a:t>
+            </a:r>
+            <a:endParaRPr lang="en-GB" dirty="0"/>
+          </a:p>
+          <a:p>
+            <a:r>
+              <a:rPr lang="en-GB" dirty="0" err="1"/>
+              <a:t>Kirjeldame</a:t>
+            </a:r>
+            <a:r>
+              <a:rPr lang="en-GB" dirty="0"/>
+              <a:t> Power BI </a:t>
+            </a:r>
+            <a:r>
+              <a:rPr lang="en-GB" dirty="0" err="1"/>
+              <a:t>objektid</a:t>
+            </a:r>
+            <a:r>
+              <a:rPr lang="en-GB" dirty="0"/>
+              <a:t> </a:t>
+            </a:r>
+            <a:r>
+              <a:rPr lang="en-GB" dirty="0" err="1"/>
+              <a:t>ja</a:t>
+            </a:r>
+            <a:r>
+              <a:rPr lang="en-GB" dirty="0"/>
+              <a:t> </a:t>
+            </a:r>
+            <a:r>
+              <a:rPr lang="en-GB" dirty="0" err="1"/>
+              <a:t>mõõdikud</a:t>
+            </a:r>
+            <a:endParaRPr lang="en-GB" dirty="0"/>
+          </a:p>
+          <a:p>
+            <a:r>
+              <a:rPr lang="en-GB" dirty="0" err="1"/>
+              <a:t>Määrame</a:t>
+            </a:r>
+            <a:r>
+              <a:rPr lang="en-GB" dirty="0"/>
+              <a:t> </a:t>
+            </a:r>
+            <a:r>
+              <a:rPr lang="en-GB" dirty="0" err="1"/>
+              <a:t>vastutajad</a:t>
+            </a:r>
+            <a:endParaRPr lang="en-GB" dirty="0"/>
+          </a:p>
+          <a:p>
+            <a:r>
+              <a:rPr lang="en-GB" dirty="0" err="1"/>
+              <a:t>Määrame</a:t>
+            </a:r>
+            <a:r>
+              <a:rPr lang="en-GB" dirty="0"/>
+              <a:t> </a:t>
+            </a:r>
+            <a:r>
+              <a:rPr lang="en-GB"/>
+              <a:t>turvatasemed</a:t>
+            </a:r>
+            <a:endParaRPr lang="en-GB" dirty="0"/>
+          </a:p>
+          <a:p>
+            <a:endParaRPr lang="en-GB" dirty="0"/>
           </a:p>
         </p:txBody>
       </p:sp>
     </p:spTree>
     <p:extLst>
       <p:ext uri="{BB962C8B-B14F-4D97-AF65-F5344CB8AC3E}">
-        <p14:creationId xmlns:p14="http://schemas.microsoft.com/office/powerpoint/2010/main" val="3428811917"/>
+        <p14:creationId xmlns:p14="http://schemas.microsoft.com/office/powerpoint/2010/main" val="3525944081"/>
       </p:ext>
     </p:extLst>
   </p:cSld>
@@ -35951,309 +35625,7 @@
 </p:sld>
 </file>
 
-<file path=ppt/slides/slide25.xml><?xml version="1.0" encoding="utf-8"?>
-<p:sld xmlns:a="http://schemas.openxmlformats.org/drawingml/2006/main" xmlns:r="http://schemas.openxmlformats.org/officeDocument/2006/relationships" xmlns:p="http://schemas.openxmlformats.org/presentationml/2006/main">
-  <p:cSld>
-    <p:spTree>
-      <p:nvGrpSpPr>
-        <p:cNvPr id="1" name="">
-          <a:extLst>
-            <a:ext uri="{FF2B5EF4-FFF2-40B4-BE49-F238E27FC236}">
-              <a16:creationId xmlns:a16="http://schemas.microsoft.com/office/drawing/2014/main" id="{960EA89E-884F-AC22-89E7-4F8E2D577784}"/>
-            </a:ext>
-          </a:extLst>
-        </p:cNvPr>
-        <p:cNvGrpSpPr/>
-        <p:nvPr/>
-      </p:nvGrpSpPr>
-      <p:grpSpPr>
-        <a:xfrm>
-          <a:off x="0" y="0"/>
-          <a:ext cx="0" cy="0"/>
-          <a:chOff x="0" y="0"/>
-          <a:chExt cx="0" cy="0"/>
-        </a:xfrm>
-      </p:grpSpPr>
-      <p:sp>
-        <p:nvSpPr>
-          <p:cNvPr id="2" name="Title 1">
-            <a:extLst>
-              <a:ext uri="{FF2B5EF4-FFF2-40B4-BE49-F238E27FC236}">
-                <a16:creationId xmlns:a16="http://schemas.microsoft.com/office/drawing/2014/main" id="{3025FD5A-6949-7AE2-465F-8F815CD0B51F}"/>
-              </a:ext>
-            </a:extLst>
-          </p:cNvPr>
-          <p:cNvSpPr>
-            <a:spLocks noGrp="1"/>
-          </p:cNvSpPr>
-          <p:nvPr>
-            <p:ph type="ctrTitle"/>
-          </p:nvPr>
-        </p:nvSpPr>
-        <p:spPr/>
-        <p:txBody>
-          <a:bodyPr/>
-          <a:lstStyle/>
-          <a:p>
-            <a:r>
-              <a:rPr lang="et-EE" noProof="0" dirty="0"/>
-              <a:t>Lõputöö soovitused</a:t>
-            </a:r>
-          </a:p>
-        </p:txBody>
-      </p:sp>
-      <p:sp>
-        <p:nvSpPr>
-          <p:cNvPr id="3" name="Content Placeholder 2">
-            <a:extLst>
-              <a:ext uri="{FF2B5EF4-FFF2-40B4-BE49-F238E27FC236}">
-                <a16:creationId xmlns:a16="http://schemas.microsoft.com/office/drawing/2014/main" id="{7676F691-0913-80C5-72FB-1220E70DB644}"/>
-              </a:ext>
-            </a:extLst>
-          </p:cNvPr>
-          <p:cNvSpPr>
-            <a:spLocks noGrp="1"/>
-          </p:cNvSpPr>
-          <p:nvPr>
-            <p:ph sz="quarter" idx="10"/>
-          </p:nvPr>
-        </p:nvSpPr>
-        <p:spPr/>
-        <p:txBody>
-          <a:bodyPr/>
-          <a:lstStyle/>
-          <a:p>
-            <a:pPr>
-              <a:lnSpc>
-                <a:spcPct val="150000"/>
-              </a:lnSpc>
-            </a:pPr>
-            <a:r>
-              <a:rPr lang="et-EE" sz="2400" noProof="0" dirty="0"/>
-              <a:t>Eraldi </a:t>
-            </a:r>
-            <a:r>
-              <a:rPr lang="et-EE" sz="2400" noProof="0" dirty="0" err="1"/>
-              <a:t>GitHub</a:t>
-            </a:r>
-            <a:r>
-              <a:rPr lang="et-EE" sz="2400" noProof="0" dirty="0"/>
-              <a:t> </a:t>
-            </a:r>
-            <a:r>
-              <a:rPr lang="et-EE" sz="2400" noProof="0" dirty="0" err="1"/>
-              <a:t>repository</a:t>
-            </a:r>
-            <a:endParaRPr lang="et-EE" sz="2400" noProof="0" dirty="0"/>
-          </a:p>
-          <a:p>
-            <a:pPr>
-              <a:lnSpc>
-                <a:spcPct val="150000"/>
-              </a:lnSpc>
-            </a:pPr>
-            <a:r>
-              <a:rPr lang="et-EE" sz="2400" noProof="0" dirty="0"/>
-              <a:t>Tiimi sees jagada rollid</a:t>
-            </a:r>
-          </a:p>
-          <a:p>
-            <a:pPr lvl="1">
-              <a:lnSpc>
-                <a:spcPct val="150000"/>
-              </a:lnSpc>
-            </a:pPr>
-            <a:r>
-              <a:rPr lang="et-EE" sz="2400" noProof="0" dirty="0"/>
-              <a:t>Projektijuht – vastutab, et asjad saaks õigeks ajaks tehtud</a:t>
-            </a:r>
-          </a:p>
-          <a:p>
-            <a:pPr lvl="1">
-              <a:lnSpc>
-                <a:spcPct val="150000"/>
-              </a:lnSpc>
-            </a:pPr>
-            <a:r>
-              <a:rPr lang="et-EE" sz="2400" noProof="0" dirty="0"/>
-              <a:t>Tootejuht – viimane sõna, kuidas asju teha</a:t>
-            </a:r>
-          </a:p>
-          <a:p>
-            <a:pPr>
-              <a:lnSpc>
-                <a:spcPct val="150000"/>
-              </a:lnSpc>
-            </a:pPr>
-            <a:r>
-              <a:rPr lang="et-EE" sz="2400" noProof="0" dirty="0"/>
-              <a:t>Igahommikune </a:t>
-            </a:r>
-            <a:r>
-              <a:rPr lang="et-EE" sz="2400" noProof="0" dirty="0" err="1"/>
-              <a:t>standup</a:t>
-            </a:r>
-            <a:r>
-              <a:rPr lang="et-EE" sz="2400" noProof="0" dirty="0"/>
-              <a:t> koosolek</a:t>
-            </a:r>
-          </a:p>
-          <a:p>
-            <a:pPr>
-              <a:lnSpc>
-                <a:spcPct val="150000"/>
-              </a:lnSpc>
-            </a:pPr>
-            <a:r>
-              <a:rPr lang="et-EE" sz="2400" noProof="0" dirty="0"/>
-              <a:t>Jagada ülesanded, nt README linnukestega nimekiri</a:t>
-            </a:r>
-          </a:p>
-        </p:txBody>
-      </p:sp>
-    </p:spTree>
-    <p:extLst>
-      <p:ext uri="{BB962C8B-B14F-4D97-AF65-F5344CB8AC3E}">
-        <p14:creationId xmlns:p14="http://schemas.microsoft.com/office/powerpoint/2010/main" val="2003990942"/>
-      </p:ext>
-    </p:extLst>
-  </p:cSld>
-  <p:clrMapOvr>
-    <a:masterClrMapping/>
-  </p:clrMapOvr>
-</p:sld>
-</file>
-
-<file path=ppt/slides/slide26.xml><?xml version="1.0" encoding="utf-8"?>
-<p:sld xmlns:a="http://schemas.openxmlformats.org/drawingml/2006/main" xmlns:r="http://schemas.openxmlformats.org/officeDocument/2006/relationships" xmlns:p="http://schemas.openxmlformats.org/presentationml/2006/main">
-  <p:cSld>
-    <p:spTree>
-      <p:nvGrpSpPr>
-        <p:cNvPr id="1" name=""/>
-        <p:cNvGrpSpPr/>
-        <p:nvPr/>
-      </p:nvGrpSpPr>
-      <p:grpSpPr>
-        <a:xfrm>
-          <a:off x="0" y="0"/>
-          <a:ext cx="0" cy="0"/>
-          <a:chOff x="0" y="0"/>
-          <a:chExt cx="0" cy="0"/>
-        </a:xfrm>
-      </p:grpSpPr>
-      <p:sp>
-        <p:nvSpPr>
-          <p:cNvPr id="2" name="Title 1">
-            <a:extLst>
-              <a:ext uri="{FF2B5EF4-FFF2-40B4-BE49-F238E27FC236}">
-                <a16:creationId xmlns:a16="http://schemas.microsoft.com/office/drawing/2014/main" id="{87A42149-AC5A-3B03-4256-D54F2918F0FD}"/>
-              </a:ext>
-            </a:extLst>
-          </p:cNvPr>
-          <p:cNvSpPr>
-            <a:spLocks noGrp="1"/>
-          </p:cNvSpPr>
-          <p:nvPr>
-            <p:ph type="ctrTitle"/>
-          </p:nvPr>
-        </p:nvSpPr>
-        <p:spPr/>
-        <p:txBody>
-          <a:bodyPr/>
-          <a:lstStyle/>
-          <a:p>
-            <a:r>
-              <a:rPr lang="et-EE" noProof="0" dirty="0"/>
-              <a:t>Lõputööde teemad</a:t>
-            </a:r>
-          </a:p>
-        </p:txBody>
-      </p:sp>
-      <p:sp>
-        <p:nvSpPr>
-          <p:cNvPr id="3" name="Content Placeholder 2">
-            <a:extLst>
-              <a:ext uri="{FF2B5EF4-FFF2-40B4-BE49-F238E27FC236}">
-                <a16:creationId xmlns:a16="http://schemas.microsoft.com/office/drawing/2014/main" id="{7F12587C-B7F9-B76A-ECA2-EFFF525C0200}"/>
-              </a:ext>
-            </a:extLst>
-          </p:cNvPr>
-          <p:cNvSpPr>
-            <a:spLocks noGrp="1"/>
-          </p:cNvSpPr>
-          <p:nvPr>
-            <p:ph sz="quarter" idx="10"/>
-          </p:nvPr>
-        </p:nvSpPr>
-        <p:spPr/>
-        <p:txBody>
-          <a:bodyPr/>
-          <a:lstStyle/>
-          <a:p>
-            <a:pPr>
-              <a:lnSpc>
-                <a:spcPct val="150000"/>
-              </a:lnSpc>
-            </a:pPr>
-            <a:r>
-              <a:rPr lang="et-EE" sz="2000" noProof="0" dirty="0"/>
-              <a:t>Tutvu pakutud teemadega </a:t>
-            </a:r>
-            <a:r>
-              <a:rPr lang="et-EE" sz="2000" noProof="0" dirty="0" err="1"/>
-              <a:t>Slackis</a:t>
-            </a:r>
-            <a:r>
-              <a:rPr lang="et-EE" sz="2000" noProof="0" dirty="0"/>
-              <a:t> ja nende andmestikega </a:t>
-            </a:r>
-            <a:r>
-              <a:rPr lang="et-EE" sz="2000" noProof="0" dirty="0" err="1"/>
-              <a:t>GitHubis</a:t>
-            </a:r>
-            <a:endParaRPr lang="et-EE" sz="2000" noProof="0" dirty="0"/>
-          </a:p>
-          <a:p>
-            <a:pPr lvl="1">
-              <a:lnSpc>
-                <a:spcPct val="150000"/>
-              </a:lnSpc>
-            </a:pPr>
-            <a:r>
-              <a:rPr lang="et-EE" sz="2000" noProof="0" dirty="0"/>
-              <a:t>Kas mõni neist teemadest kõnetab?</a:t>
-            </a:r>
-          </a:p>
-          <a:p>
-            <a:pPr>
-              <a:lnSpc>
-                <a:spcPct val="150000"/>
-              </a:lnSpc>
-            </a:pPr>
-            <a:r>
-              <a:rPr lang="et-EE" sz="2000" noProof="0" dirty="0"/>
-              <a:t>Kui soovid mõnel teisel teemal teha, siis anna märku</a:t>
-            </a:r>
-          </a:p>
-          <a:p>
-            <a:endParaRPr lang="et-EE" noProof="0" dirty="0"/>
-          </a:p>
-        </p:txBody>
-      </p:sp>
-    </p:spTree>
-    <p:extLst>
-      <p:ext uri="{BB962C8B-B14F-4D97-AF65-F5344CB8AC3E}">
-        <p14:creationId xmlns:p14="http://schemas.microsoft.com/office/powerpoint/2010/main" val="1956567439"/>
-      </p:ext>
-    </p:extLst>
-  </p:cSld>
-  <p:clrMapOvr>
-    <a:masterClrMapping/>
-  </p:clrMapOvr>
-</p:sld>
-</file>
-
-<file path=ppt/slides/slide27.xml><?xml version="1.0" encoding="utf-8"?>
+<file path=ppt/slides/slide24.xml><?xml version="1.0" encoding="utf-8"?>
 <p:sld xmlns:a="http://schemas.openxmlformats.org/drawingml/2006/main" xmlns:r="http://schemas.openxmlformats.org/officeDocument/2006/relationships" xmlns:p="http://schemas.openxmlformats.org/presentationml/2006/main">
   <p:cSld>
     <p:spTree>
@@ -36357,324 +35729,6 @@
     <p:extLst>
       <p:ext uri="{BB962C8B-B14F-4D97-AF65-F5344CB8AC3E}">
         <p14:creationId xmlns:p14="http://schemas.microsoft.com/office/powerpoint/2010/main" val="892811100"/>
-      </p:ext>
-    </p:extLst>
-  </p:cSld>
-  <p:clrMapOvr>
-    <a:masterClrMapping/>
-  </p:clrMapOvr>
-</p:sld>
-</file>
-
-<file path=ppt/slides/slide28.xml><?xml version="1.0" encoding="utf-8"?>
-<p:sld xmlns:a="http://schemas.openxmlformats.org/drawingml/2006/main" xmlns:r="http://schemas.openxmlformats.org/officeDocument/2006/relationships" xmlns:p="http://schemas.openxmlformats.org/presentationml/2006/main">
-  <p:cSld>
-    <p:spTree>
-      <p:nvGrpSpPr>
-        <p:cNvPr id="1" name=""/>
-        <p:cNvGrpSpPr/>
-        <p:nvPr/>
-      </p:nvGrpSpPr>
-      <p:grpSpPr>
-        <a:xfrm>
-          <a:off x="0" y="0"/>
-          <a:ext cx="0" cy="0"/>
-          <a:chOff x="0" y="0"/>
-          <a:chExt cx="0" cy="0"/>
-        </a:xfrm>
-      </p:grpSpPr>
-      <p:sp>
-        <p:nvSpPr>
-          <p:cNvPr id="2" name="Title 1">
-            <a:extLst>
-              <a:ext uri="{FF2B5EF4-FFF2-40B4-BE49-F238E27FC236}">
-                <a16:creationId xmlns:a16="http://schemas.microsoft.com/office/drawing/2014/main" id="{06BE7918-1509-E076-6E6B-F1514D54CCC5}"/>
-              </a:ext>
-            </a:extLst>
-          </p:cNvPr>
-          <p:cNvSpPr>
-            <a:spLocks noGrp="1"/>
-          </p:cNvSpPr>
-          <p:nvPr>
-            <p:ph type="ctrTitle"/>
-          </p:nvPr>
-        </p:nvSpPr>
-        <p:spPr/>
-        <p:txBody>
-          <a:bodyPr/>
-          <a:lstStyle/>
-          <a:p>
-            <a:r>
-              <a:rPr lang="et-EE" noProof="0" dirty="0"/>
-              <a:t>Portfoolio täiendamine ja vormistamine</a:t>
-            </a:r>
-          </a:p>
-        </p:txBody>
-      </p:sp>
-      <p:sp>
-        <p:nvSpPr>
-          <p:cNvPr id="3" name="Content Placeholder 2">
-            <a:extLst>
-              <a:ext uri="{FF2B5EF4-FFF2-40B4-BE49-F238E27FC236}">
-                <a16:creationId xmlns:a16="http://schemas.microsoft.com/office/drawing/2014/main" id="{CEF10F67-7CB6-9337-7DDD-BA275F45E2AB}"/>
-              </a:ext>
-            </a:extLst>
-          </p:cNvPr>
-          <p:cNvSpPr>
-            <a:spLocks noGrp="1"/>
-          </p:cNvSpPr>
-          <p:nvPr>
-            <p:ph sz="quarter" idx="10"/>
-          </p:nvPr>
-        </p:nvSpPr>
-        <p:spPr/>
-        <p:txBody>
-          <a:bodyPr/>
-          <a:lstStyle/>
-          <a:p>
-            <a:r>
-              <a:rPr lang="et-EE" sz="2000" noProof="0" dirty="0"/>
-              <a:t>Täiendame oma </a:t>
-            </a:r>
-            <a:r>
-              <a:rPr lang="et-EE" sz="2000" noProof="0" dirty="0" err="1"/>
-              <a:t>GitHub</a:t>
-            </a:r>
-            <a:r>
-              <a:rPr lang="et-EE" sz="2000" noProof="0" dirty="0"/>
-              <a:t>-i:</a:t>
-            </a:r>
-          </a:p>
-          <a:p>
-            <a:pPr marL="457200" lvl="1" indent="0">
-              <a:buNone/>
-            </a:pPr>
-            <a:r>
-              <a:rPr lang="et-EE" sz="2000" noProof="0" dirty="0"/>
-              <a:t>1) Loome README profiili jaoks: </a:t>
-            </a:r>
-          </a:p>
-          <a:p>
-            <a:pPr marL="1314450" lvl="2" indent="-457200"/>
-            <a:r>
-              <a:rPr lang="et-EE" sz="2000" noProof="0" dirty="0"/>
-              <a:t>New </a:t>
-            </a:r>
-            <a:r>
-              <a:rPr lang="et-EE" sz="2000" noProof="0" dirty="0" err="1"/>
-              <a:t>repository</a:t>
-            </a:r>
-            <a:endParaRPr lang="et-EE" sz="2000" noProof="0" dirty="0"/>
-          </a:p>
-          <a:p>
-            <a:pPr marL="1314450" lvl="2" indent="-457200"/>
-            <a:r>
-              <a:rPr lang="et-EE" sz="2000" noProof="0" dirty="0" err="1"/>
-              <a:t>Repository</a:t>
-            </a:r>
-            <a:r>
-              <a:rPr lang="et-EE" sz="2000" noProof="0" dirty="0"/>
-              <a:t> </a:t>
-            </a:r>
-            <a:r>
-              <a:rPr lang="et-EE" sz="2000" noProof="0" dirty="0" err="1"/>
-              <a:t>name</a:t>
-            </a:r>
-            <a:r>
-              <a:rPr lang="et-EE" sz="2000" noProof="0" dirty="0"/>
-              <a:t>: sinu </a:t>
-            </a:r>
-            <a:r>
-              <a:rPr lang="et-EE" sz="2000" noProof="0" dirty="0" err="1"/>
-              <a:t>GitHubi</a:t>
-            </a:r>
-            <a:r>
-              <a:rPr lang="et-EE" sz="2000" noProof="0" dirty="0"/>
-              <a:t> kasutaja konto</a:t>
-            </a:r>
-          </a:p>
-          <a:p>
-            <a:pPr marL="1771650" lvl="3" indent="-457200"/>
-            <a:r>
-              <a:rPr lang="et-EE" sz="2000" noProof="0" dirty="0"/>
-              <a:t>Peab tulema selline infoaken: </a:t>
-            </a:r>
-          </a:p>
-          <a:p>
-            <a:pPr marL="2228850" lvl="4" indent="-457200"/>
-            <a:endParaRPr lang="et-EE" sz="2000" noProof="0" dirty="0"/>
-          </a:p>
-          <a:p>
-            <a:endParaRPr lang="et-EE" noProof="0" dirty="0"/>
-          </a:p>
-          <a:p>
-            <a:endParaRPr lang="et-EE" noProof="0" dirty="0"/>
-          </a:p>
-          <a:p>
-            <a:pPr lvl="2"/>
-            <a:r>
-              <a:rPr lang="et-EE" noProof="0" dirty="0"/>
-              <a:t>Lisa README</a:t>
-            </a:r>
-          </a:p>
-          <a:p>
-            <a:pPr marL="457200" lvl="1" indent="0">
-              <a:buNone/>
-            </a:pPr>
-            <a:endParaRPr lang="et-EE" noProof="0" dirty="0"/>
-          </a:p>
-          <a:p>
-            <a:pPr marL="457200" lvl="1" indent="0">
-              <a:buNone/>
-            </a:pPr>
-            <a:r>
-              <a:rPr lang="et-EE" sz="2000" noProof="0" dirty="0"/>
-              <a:t>2) Täidame README</a:t>
-            </a:r>
-          </a:p>
-          <a:p>
-            <a:pPr marL="457200" lvl="1" indent="0">
-              <a:buNone/>
-            </a:pPr>
-            <a:r>
-              <a:rPr lang="et-EE" sz="2000" noProof="0" dirty="0"/>
-              <a:t>3) Täiendame Profiili: </a:t>
-            </a:r>
-            <a:r>
-              <a:rPr lang="et-EE" sz="2000" noProof="0" dirty="0" err="1"/>
-              <a:t>Edit</a:t>
-            </a:r>
-            <a:r>
-              <a:rPr lang="et-EE" sz="2000" noProof="0" dirty="0"/>
-              <a:t> profile</a:t>
-            </a:r>
-          </a:p>
-          <a:p>
-            <a:pPr marL="457200" lvl="1" indent="0">
-              <a:buNone/>
-            </a:pPr>
-            <a:r>
-              <a:rPr lang="et-EE" sz="2000" noProof="0" dirty="0"/>
-              <a:t>4) Valime </a:t>
-            </a:r>
-            <a:r>
-              <a:rPr lang="et-EE" sz="2000" noProof="0" dirty="0" err="1"/>
-              <a:t>repositories</a:t>
-            </a:r>
-            <a:r>
-              <a:rPr lang="et-EE" sz="2000" noProof="0" dirty="0"/>
-              <a:t>, mida tahame näidata</a:t>
-            </a:r>
-          </a:p>
-          <a:p>
-            <a:pPr marL="0" indent="0">
-              <a:buNone/>
-            </a:pPr>
-            <a:endParaRPr lang="et-EE" noProof="0" dirty="0"/>
-          </a:p>
-          <a:p>
-            <a:r>
-              <a:rPr lang="et-EE" sz="2000" noProof="0" dirty="0"/>
-              <a:t>Juhend:</a:t>
-            </a:r>
-            <a:endParaRPr lang="et-EE" sz="2000" noProof="0" dirty="0">
-              <a:hlinkClick r:id="rId2"/>
-            </a:endParaRPr>
-          </a:p>
-          <a:p>
-            <a:pPr lvl="1"/>
-            <a:r>
-              <a:rPr lang="et-EE" sz="2000" noProof="0" dirty="0">
-                <a:hlinkClick r:id="rId2"/>
-              </a:rPr>
-              <a:t>https://dev.to/pachicodes/tips-to-use-github-as-your-portfolio-4kb2</a:t>
-            </a:r>
-            <a:r>
-              <a:rPr lang="et-EE" sz="2000" noProof="0" dirty="0"/>
-              <a:t> </a:t>
-            </a:r>
-          </a:p>
-        </p:txBody>
-      </p:sp>
-      <p:sp>
-        <p:nvSpPr>
-          <p:cNvPr id="4" name="AutoShape 2" descr="secret message">
-            <a:extLst>
-              <a:ext uri="{FF2B5EF4-FFF2-40B4-BE49-F238E27FC236}">
-                <a16:creationId xmlns:a16="http://schemas.microsoft.com/office/drawing/2014/main" id="{A3175D4F-E126-32A6-62D6-2DD6C3591152}"/>
-              </a:ext>
-            </a:extLst>
-          </p:cNvPr>
-          <p:cNvSpPr>
-            <a:spLocks noChangeAspect="1" noChangeArrowheads="1"/>
-          </p:cNvSpPr>
-          <p:nvPr/>
-        </p:nvSpPr>
-        <p:spPr bwMode="auto">
-          <a:xfrm>
-            <a:off x="5943600" y="3276600"/>
-            <a:ext cx="304800" cy="304800"/>
-          </a:xfrm>
-          <a:prstGeom prst="rect">
-            <a:avLst/>
-          </a:prstGeom>
-          <a:noFill/>
-          <a:extLst>
-            <a:ext uri="{909E8E84-426E-40DD-AFC4-6F175D3DCCD1}">
-              <a14:hiddenFill xmlns:a14="http://schemas.microsoft.com/office/drawing/2010/main">
-                <a:solidFill>
-                  <a:srgbClr val="FFFFFF"/>
-                </a:solidFill>
-              </a14:hiddenFill>
-            </a:ext>
-          </a:extLst>
-        </p:spPr>
-        <p:txBody>
-          <a:bodyPr vert="horz" wrap="square" lIns="91440" tIns="45720" rIns="91440" bIns="45720" numCol="1" anchor="t" anchorCtr="0" compatLnSpc="1">
-            <a:prstTxWarp prst="textNoShape">
-              <a:avLst/>
-            </a:prstTxWarp>
-          </a:bodyPr>
-          <a:lstStyle/>
-          <a:p>
-            <a:endParaRPr lang="et-EE" noProof="0" dirty="0"/>
-          </a:p>
-        </p:txBody>
-      </p:sp>
-      <p:pic>
-        <p:nvPicPr>
-          <p:cNvPr id="8" name="Picture 7">
-            <a:extLst>
-              <a:ext uri="{FF2B5EF4-FFF2-40B4-BE49-F238E27FC236}">
-                <a16:creationId xmlns:a16="http://schemas.microsoft.com/office/drawing/2014/main" id="{9296259A-BDDE-1E72-A40D-2CCAFBA10677}"/>
-              </a:ext>
-            </a:extLst>
-          </p:cNvPr>
-          <p:cNvPicPr>
-            <a:picLocks noChangeAspect="1"/>
-          </p:cNvPicPr>
-          <p:nvPr/>
-        </p:nvPicPr>
-        <p:blipFill>
-          <a:blip r:embed="rId3"/>
-          <a:stretch>
-            <a:fillRect/>
-          </a:stretch>
-        </p:blipFill>
-        <p:spPr>
-          <a:xfrm>
-            <a:off x="2913222" y="3025294"/>
-            <a:ext cx="8206244" cy="807412"/>
-          </a:xfrm>
-          <a:prstGeom prst="rect">
-            <a:avLst/>
-          </a:prstGeom>
-        </p:spPr>
-      </p:pic>
-    </p:spTree>
-    <p:extLst>
-      <p:ext uri="{BB962C8B-B14F-4D97-AF65-F5344CB8AC3E}">
-        <p14:creationId xmlns:p14="http://schemas.microsoft.com/office/powerpoint/2010/main" val="1417137373"/>
       </p:ext>
     </p:extLst>
   </p:cSld>
@@ -38256,6 +37310,141 @@
         <p:cNvPr id="1" name="">
           <a:extLst>
             <a:ext uri="{FF2B5EF4-FFF2-40B4-BE49-F238E27FC236}">
+              <a16:creationId xmlns:a16="http://schemas.microsoft.com/office/drawing/2014/main" id="{4407A9AA-7FC9-EB58-1478-85637852AA94}"/>
+            </a:ext>
+          </a:extLst>
+        </p:cNvPr>
+        <p:cNvGrpSpPr/>
+        <p:nvPr/>
+      </p:nvGrpSpPr>
+      <p:grpSpPr>
+        <a:xfrm>
+          <a:off x="0" y="0"/>
+          <a:ext cx="0" cy="0"/>
+          <a:chOff x="0" y="0"/>
+          <a:chExt cx="0" cy="0"/>
+        </a:xfrm>
+      </p:grpSpPr>
+      <p:sp>
+        <p:nvSpPr>
+          <p:cNvPr id="2" name="Title 1">
+            <a:extLst>
+              <a:ext uri="{FF2B5EF4-FFF2-40B4-BE49-F238E27FC236}">
+                <a16:creationId xmlns:a16="http://schemas.microsoft.com/office/drawing/2014/main" id="{43B76E1A-6DB3-9248-E8A0-C56FC5FBBB30}"/>
+              </a:ext>
+            </a:extLst>
+          </p:cNvPr>
+          <p:cNvSpPr>
+            <a:spLocks noGrp="1"/>
+          </p:cNvSpPr>
+          <p:nvPr>
+            <p:ph type="ctrTitle"/>
+          </p:nvPr>
+        </p:nvSpPr>
+        <p:spPr/>
+        <p:txBody>
+          <a:bodyPr/>
+          <a:lstStyle/>
+          <a:p>
+            <a:r>
+              <a:rPr lang="et-EE" sz="3600" b="1" noProof="0" dirty="0"/>
+              <a:t>FAIR põhimõtted</a:t>
+            </a:r>
+            <a:endParaRPr lang="et-EE" noProof="0" dirty="0"/>
+          </a:p>
+        </p:txBody>
+      </p:sp>
+      <p:pic>
+        <p:nvPicPr>
+          <p:cNvPr id="6" name="Content Placeholder 5" descr="A diagram of different colored squares&#10;&#10;AI-generated content may be incorrect.">
+            <a:extLst>
+              <a:ext uri="{FF2B5EF4-FFF2-40B4-BE49-F238E27FC236}">
+                <a16:creationId xmlns:a16="http://schemas.microsoft.com/office/drawing/2014/main" id="{8A88CCAA-2057-7AA4-2C4E-26D8CB68EBF5}"/>
+              </a:ext>
+            </a:extLst>
+          </p:cNvPr>
+          <p:cNvPicPr>
+            <a:picLocks noGrp="1" noChangeAspect="1"/>
+          </p:cNvPicPr>
+          <p:nvPr>
+            <p:ph sz="quarter" idx="10"/>
+          </p:nvPr>
+        </p:nvPicPr>
+        <p:blipFill>
+          <a:blip r:embed="rId3"/>
+          <a:stretch>
+            <a:fillRect/>
+          </a:stretch>
+        </p:blipFill>
+        <p:spPr>
+          <a:xfrm>
+            <a:off x="467076" y="1149795"/>
+            <a:ext cx="6055977" cy="4558410"/>
+          </a:xfrm>
+        </p:spPr>
+      </p:pic>
+      <p:sp>
+        <p:nvSpPr>
+          <p:cNvPr id="8" name="TextBox 7">
+            <a:extLst>
+              <a:ext uri="{FF2B5EF4-FFF2-40B4-BE49-F238E27FC236}">
+                <a16:creationId xmlns:a16="http://schemas.microsoft.com/office/drawing/2014/main" id="{D3A36189-7B2E-0F2F-0BB4-7FFE0EB87904}"/>
+              </a:ext>
+            </a:extLst>
+          </p:cNvPr>
+          <p:cNvSpPr txBox="1"/>
+          <p:nvPr/>
+        </p:nvSpPr>
+        <p:spPr>
+          <a:xfrm>
+            <a:off x="-399449" y="5867498"/>
+            <a:ext cx="5955631" cy="307777"/>
+          </a:xfrm>
+          <a:prstGeom prst="rect">
+            <a:avLst/>
+          </a:prstGeom>
+          <a:noFill/>
+        </p:spPr>
+        <p:txBody>
+          <a:bodyPr rot="0" spcFirstLastPara="0" vertOverflow="overflow" horzOverflow="overflow" vert="horz" wrap="square" lIns="91440" tIns="45720" rIns="91440" bIns="45720" numCol="1" spcCol="0" rtlCol="0" fromWordArt="0" anchor="t" anchorCtr="0" forceAA="0" compatLnSpc="1">
+            <a:prstTxWarp prst="textNoShape">
+              <a:avLst/>
+            </a:prstTxWarp>
+            <a:spAutoFit/>
+          </a:bodyPr>
+          <a:lstStyle/>
+          <a:p>
+            <a:pPr algn="ctr"/>
+            <a:r>
+              <a:rPr lang="et-EE" sz="1400" noProof="0" dirty="0">
+                <a:ea typeface="Inter"/>
+              </a:rPr>
+              <a:t>Allikas: Statistikaamet</a:t>
+            </a:r>
+          </a:p>
+        </p:txBody>
+      </p:sp>
+    </p:spTree>
+    <p:extLst>
+      <p:ext uri="{BB962C8B-B14F-4D97-AF65-F5344CB8AC3E}">
+        <p14:creationId xmlns:p14="http://schemas.microsoft.com/office/powerpoint/2010/main" val="1892651774"/>
+      </p:ext>
+    </p:extLst>
+  </p:cSld>
+  <p:clrMapOvr>
+    <a:masterClrMapping/>
+  </p:clrMapOvr>
+</p:sld>
+</file>
+
+<file path=ppt/slides/slide8.xml><?xml version="1.0" encoding="utf-8"?>
+<p:sld xmlns:a="http://schemas.openxmlformats.org/drawingml/2006/main" xmlns:r="http://schemas.openxmlformats.org/officeDocument/2006/relationships" xmlns:p="http://schemas.openxmlformats.org/presentationml/2006/main">
+  <p:cSld>
+    <p:spTree>
+      <p:nvGrpSpPr>
+        <p:cNvPr id="1" name="">
+          <a:extLst>
+            <a:ext uri="{FF2B5EF4-FFF2-40B4-BE49-F238E27FC236}">
               <a16:creationId xmlns:a16="http://schemas.microsoft.com/office/drawing/2014/main" id="{24B182FB-2F15-9946-71BB-F91963A6451E}"/>
             </a:ext>
           </a:extLst>
@@ -39096,7 +38285,7 @@
 </p:sld>
 </file>
 
-<file path=ppt/slides/slide8.xml><?xml version="1.0" encoding="utf-8"?>
+<file path=ppt/slides/slide9.xml><?xml version="1.0" encoding="utf-8"?>
 <p:sld xmlns:a="http://schemas.openxmlformats.org/drawingml/2006/main" xmlns:r="http://schemas.openxmlformats.org/officeDocument/2006/relationships" xmlns:p="http://schemas.openxmlformats.org/presentationml/2006/main">
   <p:cSld>
     <p:spTree>
@@ -39350,141 +38539,6 @@
     <p:extLst>
       <p:ext uri="{BB962C8B-B14F-4D97-AF65-F5344CB8AC3E}">
         <p14:creationId xmlns:p14="http://schemas.microsoft.com/office/powerpoint/2010/main" val="868596080"/>
-      </p:ext>
-    </p:extLst>
-  </p:cSld>
-  <p:clrMapOvr>
-    <a:masterClrMapping/>
-  </p:clrMapOvr>
-</p:sld>
-</file>
-
-<file path=ppt/slides/slide9.xml><?xml version="1.0" encoding="utf-8"?>
-<p:sld xmlns:a="http://schemas.openxmlformats.org/drawingml/2006/main" xmlns:r="http://schemas.openxmlformats.org/officeDocument/2006/relationships" xmlns:p="http://schemas.openxmlformats.org/presentationml/2006/main">
-  <p:cSld>
-    <p:spTree>
-      <p:nvGrpSpPr>
-        <p:cNvPr id="1" name="">
-          <a:extLst>
-            <a:ext uri="{FF2B5EF4-FFF2-40B4-BE49-F238E27FC236}">
-              <a16:creationId xmlns:a16="http://schemas.microsoft.com/office/drawing/2014/main" id="{4407A9AA-7FC9-EB58-1478-85637852AA94}"/>
-            </a:ext>
-          </a:extLst>
-        </p:cNvPr>
-        <p:cNvGrpSpPr/>
-        <p:nvPr/>
-      </p:nvGrpSpPr>
-      <p:grpSpPr>
-        <a:xfrm>
-          <a:off x="0" y="0"/>
-          <a:ext cx="0" cy="0"/>
-          <a:chOff x="0" y="0"/>
-          <a:chExt cx="0" cy="0"/>
-        </a:xfrm>
-      </p:grpSpPr>
-      <p:sp>
-        <p:nvSpPr>
-          <p:cNvPr id="2" name="Title 1">
-            <a:extLst>
-              <a:ext uri="{FF2B5EF4-FFF2-40B4-BE49-F238E27FC236}">
-                <a16:creationId xmlns:a16="http://schemas.microsoft.com/office/drawing/2014/main" id="{43B76E1A-6DB3-9248-E8A0-C56FC5FBBB30}"/>
-              </a:ext>
-            </a:extLst>
-          </p:cNvPr>
-          <p:cNvSpPr>
-            <a:spLocks noGrp="1"/>
-          </p:cNvSpPr>
-          <p:nvPr>
-            <p:ph type="ctrTitle"/>
-          </p:nvPr>
-        </p:nvSpPr>
-        <p:spPr/>
-        <p:txBody>
-          <a:bodyPr/>
-          <a:lstStyle/>
-          <a:p>
-            <a:r>
-              <a:rPr lang="et-EE" sz="3600" b="1" noProof="0" dirty="0"/>
-              <a:t>FAIR põhimõtted</a:t>
-            </a:r>
-            <a:endParaRPr lang="et-EE" noProof="0" dirty="0"/>
-          </a:p>
-        </p:txBody>
-      </p:sp>
-      <p:pic>
-        <p:nvPicPr>
-          <p:cNvPr id="6" name="Content Placeholder 5" descr="A diagram of different colored squares&#10;&#10;AI-generated content may be incorrect.">
-            <a:extLst>
-              <a:ext uri="{FF2B5EF4-FFF2-40B4-BE49-F238E27FC236}">
-                <a16:creationId xmlns:a16="http://schemas.microsoft.com/office/drawing/2014/main" id="{8A88CCAA-2057-7AA4-2C4E-26D8CB68EBF5}"/>
-              </a:ext>
-            </a:extLst>
-          </p:cNvPr>
-          <p:cNvPicPr>
-            <a:picLocks noGrp="1" noChangeAspect="1"/>
-          </p:cNvPicPr>
-          <p:nvPr>
-            <p:ph sz="quarter" idx="10"/>
-          </p:nvPr>
-        </p:nvPicPr>
-        <p:blipFill>
-          <a:blip r:embed="rId3"/>
-          <a:stretch>
-            <a:fillRect/>
-          </a:stretch>
-        </p:blipFill>
-        <p:spPr>
-          <a:xfrm>
-            <a:off x="3621756" y="1201973"/>
-            <a:ext cx="6055977" cy="4558410"/>
-          </a:xfrm>
-        </p:spPr>
-      </p:pic>
-      <p:sp>
-        <p:nvSpPr>
-          <p:cNvPr id="8" name="TextBox 7">
-            <a:extLst>
-              <a:ext uri="{FF2B5EF4-FFF2-40B4-BE49-F238E27FC236}">
-                <a16:creationId xmlns:a16="http://schemas.microsoft.com/office/drawing/2014/main" id="{D3A36189-7B2E-0F2F-0BB4-7FFE0EB87904}"/>
-              </a:ext>
-            </a:extLst>
-          </p:cNvPr>
-          <p:cNvSpPr txBox="1"/>
-          <p:nvPr/>
-        </p:nvSpPr>
-        <p:spPr>
-          <a:xfrm>
-            <a:off x="3669631" y="5905499"/>
-            <a:ext cx="5955631" cy="307777"/>
-          </a:xfrm>
-          <a:prstGeom prst="rect">
-            <a:avLst/>
-          </a:prstGeom>
-          <a:noFill/>
-        </p:spPr>
-        <p:txBody>
-          <a:bodyPr rot="0" spcFirstLastPara="0" vertOverflow="overflow" horzOverflow="overflow" vert="horz" wrap="square" lIns="91440" tIns="45720" rIns="91440" bIns="45720" numCol="1" spcCol="0" rtlCol="0" fromWordArt="0" anchor="t" anchorCtr="0" forceAA="0" compatLnSpc="1">
-            <a:prstTxWarp prst="textNoShape">
-              <a:avLst/>
-            </a:prstTxWarp>
-            <a:spAutoFit/>
-          </a:bodyPr>
-          <a:lstStyle/>
-          <a:p>
-            <a:pPr algn="ctr"/>
-            <a:r>
-              <a:rPr lang="et-EE" sz="1400" noProof="0" dirty="0">
-                <a:ea typeface="Inter"/>
-              </a:rPr>
-              <a:t>Allikas: Statistikaamet</a:t>
-            </a:r>
-          </a:p>
-        </p:txBody>
-      </p:sp>
-    </p:spTree>
-    <p:extLst>
-      <p:ext uri="{BB962C8B-B14F-4D97-AF65-F5344CB8AC3E}">
-        <p14:creationId xmlns:p14="http://schemas.microsoft.com/office/powerpoint/2010/main" val="1892651774"/>
       </p:ext>
     </p:extLst>
   </p:cSld>
@@ -40286,12 +39340,6 @@
 </file>
 
 <file path=customXml/item1.xml><?xml version="1.0" encoding="utf-8"?>
-<p:properties xmlns:p="http://schemas.microsoft.com/office/2006/metadata/properties" xmlns:xsi="http://www.w3.org/2001/XMLSchema-instance" xmlns:pc="http://schemas.microsoft.com/office/infopath/2007/PartnerControls">
-  <documentManagement/>
-</p:properties>
-</file>
-
-<file path=customXml/item2.xml><?xml version="1.0" encoding="utf-8"?>
 <ct:contentTypeSchema xmlns:ct="http://schemas.microsoft.com/office/2006/metadata/contentType" xmlns:ma="http://schemas.microsoft.com/office/2006/metadata/properties/metaAttributes" ct:_="" ma:_="" ma:contentTypeName="Document" ma:contentTypeID="0x010100C4D27B8FA8976546BCD79313C588588D" ma:contentTypeVersion="8" ma:contentTypeDescription="Create a new document." ma:contentTypeScope="" ma:versionID="a112c56f6fe148a79025c76584832af0">
   <xsd:schema xmlns:xsd="http://www.w3.org/2001/XMLSchema" xmlns:xs="http://www.w3.org/2001/XMLSchema" xmlns:p="http://schemas.microsoft.com/office/2006/metadata/properties" xmlns:ns2="a1a2d923-8fea-42f1-bd41-9cdfff65694e" targetNamespace="http://schemas.microsoft.com/office/2006/metadata/properties" ma:root="true" ma:fieldsID="97c8655d467eaa9470a714421e7268c0" ns2:_="">
     <xsd:import namespace="a1a2d923-8fea-42f1-bd41-9cdfff65694e"/>
@@ -40459,7 +39507,7 @@
 </ct:contentTypeSchema>
 </file>
 
-<file path=customXml/item3.xml><?xml version="1.0" encoding="utf-8"?>
+<file path=customXml/item2.xml><?xml version="1.0" encoding="utf-8"?>
 <?mso-contentType ?>
 <FormTemplates xmlns="http://schemas.microsoft.com/sharepoint/v3/contenttype/forms">
   <Display>DocumentLibraryForm</Display>
@@ -40468,16 +39516,13 @@
 </FormTemplates>
 </file>
 
-<file path=customXml/itemProps1.xml><?xml version="1.0" encoding="utf-8"?>
-<ds:datastoreItem xmlns:ds="http://schemas.openxmlformats.org/officeDocument/2006/customXml" ds:itemID="{5BDF4908-A52A-47DD-A794-6E02D71942FC}">
-  <ds:schemaRefs>
-    <ds:schemaRef ds:uri="http://schemas.microsoft.com/office/2006/metadata/properties"/>
-    <ds:schemaRef ds:uri="http://schemas.microsoft.com/office/infopath/2007/PartnerControls"/>
-  </ds:schemaRefs>
-</ds:datastoreItem>
+<file path=customXml/item3.xml><?xml version="1.0" encoding="utf-8"?>
+<p:properties xmlns:p="http://schemas.microsoft.com/office/2006/metadata/properties" xmlns:xsi="http://www.w3.org/2001/XMLSchema-instance" xmlns:pc="http://schemas.microsoft.com/office/infopath/2007/PartnerControls">
+  <documentManagement/>
+</p:properties>
 </file>
 
-<file path=customXml/itemProps2.xml><?xml version="1.0" encoding="utf-8"?>
+<file path=customXml/itemProps1.xml><?xml version="1.0" encoding="utf-8"?>
 <ds:datastoreItem xmlns:ds="http://schemas.openxmlformats.org/officeDocument/2006/customXml" ds:itemID="{9CF4F972-2392-44D0-AA45-41AC4FDC4A59}">
   <ds:schemaRefs>
     <ds:schemaRef ds:uri="a1a2d923-8fea-42f1-bd41-9cdfff65694e"/>
@@ -40495,10 +39540,19 @@
 </ds:datastoreItem>
 </file>
 
-<file path=customXml/itemProps3.xml><?xml version="1.0" encoding="utf-8"?>
+<file path=customXml/itemProps2.xml><?xml version="1.0" encoding="utf-8"?>
 <ds:datastoreItem xmlns:ds="http://schemas.openxmlformats.org/officeDocument/2006/customXml" ds:itemID="{9DC439CA-6F1C-4005-ACA6-A52E04DEE0A7}">
   <ds:schemaRefs>
     <ds:schemaRef ds:uri="http://schemas.microsoft.com/sharepoint/v3/contenttype/forms"/>
   </ds:schemaRefs>
 </ds:datastoreItem>
+</file>
+
+<file path=customXml/itemProps3.xml><?xml version="1.0" encoding="utf-8"?>
+<ds:datastoreItem xmlns:ds="http://schemas.openxmlformats.org/officeDocument/2006/customXml" ds:itemID="{5BDF4908-A52A-47DD-A794-6E02D71942FC}">
+  <ds:schemaRefs>
+    <ds:schemaRef ds:uri="http://schemas.microsoft.com/office/2006/metadata/properties"/>
+    <ds:schemaRef ds:uri="http://schemas.microsoft.com/office/infopath/2007/PartnerControls"/>
+  </ds:schemaRefs>
+</ds:datastoreItem>
 </file>
--- a/Materjalid/Day9 Andmekorraldus Dim Fakt/9-paev-andmetarkus-esitlus.pptx
+++ b/Materjalid/Day9 Andmekorraldus Dim Fakt/9-paev-andmetarkus-esitlus.pptx
@@ -9805,7 +9805,7 @@
             <p:ph sz="quarter" idx="10"/>
             <p:extLst>
               <p:ext uri="{D42A27DB-BD31-4B8C-83A1-F6EECF244321}">
-                <p14:modId xmlns:p14="http://schemas.microsoft.com/office/powerpoint/2010/main" val="1674243627"/>
+                <p14:modId xmlns:p14="http://schemas.microsoft.com/office/powerpoint/2010/main" val="185379410"/>
               </p:ext>
             </p:extLst>
           </p:nvPr>
@@ -10519,7 +10519,27 @@
                           <a:effectLst/>
                           <a:latin typeface="Inter"/>
                         </a:rPr>
-                        <a:t>15:00 – 16:30 – Koolitus – CASE </a:t>
+                        <a:t>15:00 – 16:30 – Koolitus –  </a:t>
+                      </a:r>
+                      <a:r>
+                        <a:rPr lang="en-US" sz="2400" b="0" i="0" dirty="0" err="1">
+                          <a:solidFill>
+                            <a:srgbClr val="121212"/>
+                          </a:solidFill>
+                          <a:effectLst/>
+                          <a:latin typeface="Inter"/>
+                        </a:rPr>
+                        <a:t>Andmehaldus</a:t>
+                      </a:r>
+                      <a:r>
+                        <a:rPr lang="en-US" sz="2400" b="0" i="0" dirty="0">
+                          <a:solidFill>
+                            <a:srgbClr val="121212"/>
+                          </a:solidFill>
+                          <a:effectLst/>
+                          <a:latin typeface="Inter"/>
+                        </a:rPr>
+                        <a:t> </a:t>
                       </a:r>
                       <a:r>
                         <a:rPr lang="en-US" sz="2400" b="0" i="0" dirty="0" err="1">

--- a/Materjalid/Day9 Andmekorraldus Dim Fakt/9-paev-andmetarkus-esitlus.pptx
+++ b/Materjalid/Day9 Andmekorraldus Dim Fakt/9-paev-andmetarkus-esitlus.pptx
@@ -11267,7 +11267,79 @@
                   <a:srgbClr val="334155"/>
                 </a:solidFill>
               </a:rPr>
-              <a:t> </a:t>
+              <a:t>  - Palu </a:t>
+            </a:r>
+            <a:r>
+              <a:rPr lang="en-GB" sz="1600" dirty="0" err="1">
+                <a:solidFill>
+                  <a:srgbClr val="334155"/>
+                </a:solidFill>
+              </a:rPr>
+              <a:t>tehisarul</a:t>
+            </a:r>
+            <a:r>
+              <a:rPr lang="en-GB" sz="1600" dirty="0">
+                <a:solidFill>
+                  <a:srgbClr val="334155"/>
+                </a:solidFill>
+              </a:rPr>
+              <a:t> </a:t>
+            </a:r>
+            <a:r>
+              <a:rPr lang="en-GB" sz="1600" dirty="0" err="1">
+                <a:solidFill>
+                  <a:srgbClr val="334155"/>
+                </a:solidFill>
+              </a:rPr>
+              <a:t>seletada</a:t>
+            </a:r>
+            <a:r>
+              <a:rPr lang="en-GB" sz="1600" dirty="0">
+                <a:solidFill>
+                  <a:srgbClr val="334155"/>
+                </a:solidFill>
+              </a:rPr>
+              <a:t> </a:t>
+            </a:r>
+            <a:r>
+              <a:rPr lang="en-GB" sz="1600" dirty="0" err="1">
+                <a:solidFill>
+                  <a:srgbClr val="334155"/>
+                </a:solidFill>
+              </a:rPr>
+              <a:t>kood</a:t>
+            </a:r>
+            <a:r>
+              <a:rPr lang="en-GB" sz="1600" dirty="0">
+                <a:solidFill>
+                  <a:srgbClr val="334155"/>
+                </a:solidFill>
+              </a:rPr>
+              <a:t> / </a:t>
+            </a:r>
+            <a:r>
+              <a:rPr lang="en-GB" sz="1600" dirty="0" err="1">
+                <a:solidFill>
+                  <a:srgbClr val="334155"/>
+                </a:solidFill>
+              </a:rPr>
+              <a:t>kommenteeri</a:t>
+            </a:r>
+            <a:r>
+              <a:rPr lang="en-GB" sz="1600" dirty="0">
+                <a:solidFill>
+                  <a:srgbClr val="334155"/>
+                </a:solidFill>
+              </a:rPr>
+              <a:t> </a:t>
+            </a:r>
+            <a:r>
+              <a:rPr lang="en-GB" sz="1600" dirty="0" err="1">
+                <a:solidFill>
+                  <a:srgbClr val="334155"/>
+                </a:solidFill>
+              </a:rPr>
+              <a:t>kood</a:t>
             </a:r>
             <a:br>
               <a:rPr lang="en-GB" sz="1600" dirty="0">
@@ -11405,7 +11477,7 @@
         </p:blipFill>
         <p:spPr>
           <a:xfrm>
-            <a:off x="7968143" y="3605817"/>
+            <a:off x="7729226" y="2750359"/>
             <a:ext cx="3177185" cy="3177185"/>
           </a:xfrm>
           <a:prstGeom prst="rect">
@@ -11435,8 +11507,38 @@
         </p:blipFill>
         <p:spPr>
           <a:xfrm>
-            <a:off x="5810416" y="1755648"/>
+            <a:off x="3972989" y="1554536"/>
             <a:ext cx="3312160" cy="1537789"/>
+          </a:xfrm>
+          <a:prstGeom prst="rect">
+            <a:avLst/>
+          </a:prstGeom>
+        </p:spPr>
+      </p:pic>
+      <p:pic>
+        <p:nvPicPr>
+          <p:cNvPr id="7" name="Picture 6">
+            <a:extLst>
+              <a:ext uri="{FF2B5EF4-FFF2-40B4-BE49-F238E27FC236}">
+                <a16:creationId xmlns:a16="http://schemas.microsoft.com/office/drawing/2014/main" id="{C082B8AB-1532-E2A6-3D08-C0E930BC3A14}"/>
+              </a:ext>
+            </a:extLst>
+          </p:cNvPr>
+          <p:cNvPicPr>
+            <a:picLocks noChangeAspect="1"/>
+          </p:cNvPicPr>
+          <p:nvPr/>
+        </p:nvPicPr>
+        <p:blipFill>
+          <a:blip r:embed="rId5"/>
+          <a:stretch>
+            <a:fillRect/>
+          </a:stretch>
+        </p:blipFill>
+        <p:spPr>
+          <a:xfrm>
+            <a:off x="4867930" y="4881499"/>
+            <a:ext cx="2789452" cy="2092089"/>
           </a:xfrm>
           <a:prstGeom prst="rect">
             <a:avLst/>
@@ -48224,7 +48326,7 @@
         </p:nvSpPr>
         <p:spPr>
           <a:xfrm>
-            <a:off x="0" y="841248"/>
+            <a:off x="305" y="842355"/>
             <a:ext cx="12191695" cy="73152"/>
           </a:xfrm>
           <a:prstGeom prst="rect">
@@ -48364,7 +48466,7 @@
         </p:nvSpPr>
         <p:spPr>
           <a:xfrm>
-            <a:off x="9601200" y="6601968"/>
+            <a:off x="9632651" y="6991193"/>
             <a:ext cx="2194560" cy="256032"/>
           </a:xfrm>
           <a:prstGeom prst="rect">
@@ -48399,8 +48501,8 @@
         </p:nvSpPr>
         <p:spPr>
           <a:xfrm>
-            <a:off x="365760" y="1097280"/>
-            <a:ext cx="5120640" cy="584775"/>
+            <a:off x="397211" y="1486505"/>
+            <a:ext cx="5120640" cy="830997"/>
           </a:xfrm>
           <a:prstGeom prst="rect">
             <a:avLst/>
@@ -48447,7 +48549,24 @@
                 </a:solidFill>
                 <a:latin typeface="Calibri"/>
               </a:rPr>
-              <a:t>: «</a:t>
+              <a:t>:</a:t>
+            </a:r>
+            <a:endParaRPr lang="en-GB" sz="1600" b="0" dirty="0">
+              <a:solidFill>
+                <a:srgbClr val="334155"/>
+              </a:solidFill>
+              <a:latin typeface="Calibri"/>
+            </a:endParaRPr>
+          </a:p>
+          <a:p>
+            <a:r>
+              <a:rPr sz="1600" b="0" dirty="0">
+                <a:solidFill>
+                  <a:srgbClr val="334155"/>
+                </a:solidFill>
+                <a:latin typeface="Calibri"/>
+              </a:rPr>
+              <a:t> «</a:t>
             </a:r>
             <a:r>
               <a:rPr lang="fi-FI" sz="1600" dirty="0">
@@ -48522,7 +48641,7 @@
         </p:nvSpPr>
         <p:spPr>
           <a:xfrm>
-            <a:off x="6141889" y="1919347"/>
+            <a:off x="6173340" y="2308572"/>
             <a:ext cx="5658684" cy="2926080"/>
           </a:xfrm>
           <a:prstGeom prst="roundRect">
@@ -48569,7 +48688,7 @@
         </p:nvSpPr>
         <p:spPr>
           <a:xfrm>
-            <a:off x="892912" y="2228225"/>
+            <a:off x="924363" y="2617450"/>
             <a:ext cx="4343231" cy="2308324"/>
           </a:xfrm>
           <a:prstGeom prst="rect">
@@ -49116,8 +49235,8 @@
         </p:nvSpPr>
         <p:spPr>
           <a:xfrm>
-            <a:off x="396240" y="5065544"/>
-            <a:ext cx="11247120" cy="830997"/>
+            <a:off x="462815" y="5445174"/>
+            <a:ext cx="11247120" cy="969496"/>
           </a:xfrm>
           <a:prstGeom prst="rect">
             <a:avLst/>
@@ -49291,7 +49410,7 @@
           <a:p>
             <a:pPr algn="l"/>
             <a:r>
-              <a:rPr lang="en-GB" sz="1500" dirty="0">
+              <a:rPr lang="en-GB" sz="2400" dirty="0">
                 <a:solidFill>
                   <a:srgbClr val="64748B"/>
                 </a:solidFill>
@@ -49300,7 +49419,7 @@
               <a:t>Loo </a:t>
             </a:r>
             <a:r>
-              <a:rPr lang="en-GB" sz="1500" dirty="0" err="1">
+              <a:rPr lang="en-GB" sz="2400" dirty="0" err="1">
                 <a:solidFill>
                   <a:srgbClr val="64748B"/>
                 </a:solidFill>
@@ -49309,7 +49428,7 @@
               <a:t>selle</a:t>
             </a:r>
             <a:r>
-              <a:rPr lang="en-GB" sz="1500" dirty="0">
+              <a:rPr lang="en-GB" sz="2400" dirty="0">
                 <a:solidFill>
                   <a:srgbClr val="64748B"/>
                 </a:solidFill>
@@ -49318,7 +49437,7 @@
               <a:t> </a:t>
             </a:r>
             <a:r>
-              <a:rPr lang="en-GB" sz="1500" dirty="0" err="1">
+              <a:rPr lang="en-GB" sz="2400" dirty="0" err="1">
                 <a:solidFill>
                   <a:srgbClr val="64748B"/>
                 </a:solidFill>
@@ -49327,7 +49446,7 @@
               <a:t>jaoks</a:t>
             </a:r>
             <a:r>
-              <a:rPr lang="en-GB" sz="1500" dirty="0">
+              <a:rPr lang="en-GB" sz="2400" dirty="0">
                 <a:solidFill>
                   <a:srgbClr val="64748B"/>
                 </a:solidFill>
@@ -49336,7 +49455,7 @@
               <a:t> </a:t>
             </a:r>
             <a:r>
-              <a:rPr lang="en-GB" sz="1500" dirty="0" err="1">
+              <a:rPr lang="en-GB" sz="2400" dirty="0" err="1">
                 <a:solidFill>
                   <a:srgbClr val="64748B"/>
                 </a:solidFill>
@@ -49345,7 +49464,7 @@
               <a:t>VIEW’d</a:t>
             </a:r>
             <a:r>
-              <a:rPr lang="en-GB" sz="1500" dirty="0">
+              <a:rPr lang="en-GB" sz="2400" dirty="0">
                 <a:solidFill>
                   <a:srgbClr val="64748B"/>
                 </a:solidFill>
@@ -49353,7 +49472,7 @@
               </a:rPr>
               <a:t>.</a:t>
             </a:r>
-            <a:endParaRPr sz="1500" b="0" dirty="0">
+            <a:endParaRPr sz="2400" b="0" dirty="0">
               <a:solidFill>
                 <a:srgbClr val="64748B"/>
               </a:solidFill>
@@ -49376,7 +49495,7 @@
         </p:nvSpPr>
         <p:spPr>
           <a:xfrm>
-            <a:off x="442445" y="1965960"/>
+            <a:off x="426679" y="2383949"/>
             <a:ext cx="5244164" cy="2926080"/>
           </a:xfrm>
           <a:prstGeom prst="roundRect">
@@ -49429,8 +49548,8 @@
         </p:nvSpPr>
         <p:spPr>
           <a:xfrm>
-            <a:off x="6137076" y="1097279"/>
-            <a:ext cx="5658684" cy="584775"/>
+            <a:off x="6168527" y="1486504"/>
+            <a:ext cx="5658684" cy="830997"/>
           </a:xfrm>
           <a:prstGeom prst="rect">
             <a:avLst/>
@@ -49477,7 +49596,24 @@
                 </a:solidFill>
                 <a:latin typeface="Calibri"/>
               </a:rPr>
-              <a:t>: «</a:t>
+              <a:t>: </a:t>
+            </a:r>
+            <a:endParaRPr lang="en-GB" sz="1600" b="0" dirty="0">
+              <a:solidFill>
+                <a:srgbClr val="334155"/>
+              </a:solidFill>
+              <a:latin typeface="Calibri"/>
+            </a:endParaRPr>
+          </a:p>
+          <a:p>
+            <a:r>
+              <a:rPr sz="1600" b="0" dirty="0">
+                <a:solidFill>
+                  <a:srgbClr val="334155"/>
+                </a:solidFill>
+                <a:latin typeface="Calibri"/>
+              </a:rPr>
+              <a:t>«</a:t>
             </a:r>
             <a:r>
               <a:rPr lang="fi-FI" sz="1600" b="0" dirty="0">
@@ -49511,7 +49647,7 @@
         </p:nvSpPr>
         <p:spPr>
           <a:xfrm>
-            <a:off x="6509889" y="2355353"/>
+            <a:off x="6541340" y="2744578"/>
             <a:ext cx="5094657" cy="2000548"/>
           </a:xfrm>
           <a:prstGeom prst="rect">
@@ -50799,7 +50935,7 @@
         </p:nvSpPr>
         <p:spPr>
           <a:xfrm>
-            <a:off x="6129291" y="1975555"/>
+            <a:off x="6190148" y="2316377"/>
             <a:ext cx="5658684" cy="2926080"/>
           </a:xfrm>
           <a:prstGeom prst="roundRect">
@@ -50860,7 +50996,7 @@
         </p:blipFill>
         <p:spPr>
           <a:xfrm>
-            <a:off x="587454" y="2800262"/>
+            <a:off x="618905" y="3189487"/>
             <a:ext cx="5077534" cy="1257475"/>
           </a:xfrm>
           <a:prstGeom prst="rect">
@@ -50882,7 +51018,7 @@
         </p:nvSpPr>
         <p:spPr>
           <a:xfrm>
-            <a:off x="1837426" y="3165894"/>
+            <a:off x="1868877" y="3555119"/>
             <a:ext cx="3849183" cy="887339"/>
           </a:xfrm>
           <a:prstGeom prst="rect">
@@ -50934,7 +51070,7 @@
         </p:blipFill>
         <p:spPr>
           <a:xfrm>
-            <a:off x="5661013" y="3165894"/>
+            <a:off x="5692464" y="3555119"/>
             <a:ext cx="6610809" cy="1368160"/>
           </a:xfrm>
           <a:prstGeom prst="rect">
@@ -50942,6 +51078,520 @@
           </a:prstGeom>
         </p:spPr>
       </p:pic>
+      <p:sp>
+        <p:nvSpPr>
+          <p:cNvPr id="16" name="TextBox 15">
+            <a:extLst>
+              <a:ext uri="{FF2B5EF4-FFF2-40B4-BE49-F238E27FC236}">
+                <a16:creationId xmlns:a16="http://schemas.microsoft.com/office/drawing/2014/main" id="{1EF051B0-42C7-DF22-E3A4-7BEAB82701C1}"/>
+              </a:ext>
+            </a:extLst>
+          </p:cNvPr>
+          <p:cNvSpPr txBox="1"/>
+          <p:nvPr/>
+        </p:nvSpPr>
+        <p:spPr>
+          <a:xfrm>
+            <a:off x="2011291" y="1232836"/>
+            <a:ext cx="5120640" cy="338554"/>
+          </a:xfrm>
+          <a:prstGeom prst="rect">
+            <a:avLst/>
+          </a:prstGeom>
+          <a:noFill/>
+        </p:spPr>
+        <p:txBody>
+          <a:bodyPr wrap="square" anchor="t">
+            <a:spAutoFit/>
+          </a:bodyPr>
+          <a:lstStyle/>
+          <a:p>
+            <a:r>
+              <a:rPr sz="1600" b="0" dirty="0" err="1">
+                <a:solidFill>
+                  <a:srgbClr val="334155"/>
+                </a:solidFill>
+                <a:latin typeface="Calibri"/>
+              </a:rPr>
+              <a:t>Ülesanne</a:t>
+            </a:r>
+            <a:r>
+              <a:rPr sz="1600" b="0" dirty="0">
+                <a:solidFill>
+                  <a:srgbClr val="334155"/>
+                </a:solidFill>
+                <a:latin typeface="Calibri"/>
+              </a:rPr>
+              <a:t> </a:t>
+            </a:r>
+            <a:r>
+              <a:rPr sz="1600" b="0" dirty="0" err="1">
+                <a:solidFill>
+                  <a:srgbClr val="334155"/>
+                </a:solidFill>
+                <a:latin typeface="Calibri"/>
+              </a:rPr>
+              <a:t>tehisarule</a:t>
+            </a:r>
+            <a:r>
+              <a:rPr sz="1600" b="0" dirty="0">
+                <a:solidFill>
+                  <a:srgbClr val="334155"/>
+                </a:solidFill>
+                <a:latin typeface="Calibri"/>
+              </a:rPr>
+              <a:t>:</a:t>
+            </a:r>
+            <a:r>
+              <a:rPr lang="en-GB" sz="1600" b="0" dirty="0" err="1">
+                <a:solidFill>
+                  <a:srgbClr val="334155"/>
+                </a:solidFill>
+                <a:latin typeface="Calibri"/>
+              </a:rPr>
+              <a:t>Uus</a:t>
+            </a:r>
+            <a:r>
+              <a:rPr lang="en-GB" sz="1600" b="0" dirty="0">
+                <a:solidFill>
+                  <a:srgbClr val="334155"/>
+                </a:solidFill>
+                <a:latin typeface="Calibri"/>
+              </a:rPr>
+              <a:t> SQL script</a:t>
+            </a:r>
+          </a:p>
+        </p:txBody>
+      </p:sp>
+      <p:sp>
+        <p:nvSpPr>
+          <p:cNvPr id="19" name="Rectangle 18">
+            <a:extLst>
+              <a:ext uri="{FF2B5EF4-FFF2-40B4-BE49-F238E27FC236}">
+                <a16:creationId xmlns:a16="http://schemas.microsoft.com/office/drawing/2014/main" id="{196741E1-DCA5-DF15-4C83-D3DB6AE0EDD4}"/>
+              </a:ext>
+            </a:extLst>
+          </p:cNvPr>
+          <p:cNvSpPr/>
+          <p:nvPr/>
+        </p:nvSpPr>
+        <p:spPr>
+          <a:xfrm>
+            <a:off x="6331789" y="3821502"/>
+            <a:ext cx="6143126" cy="1104272"/>
+          </a:xfrm>
+          <a:prstGeom prst="rect">
+            <a:avLst/>
+          </a:prstGeom>
+        </p:spPr>
+        <p:style>
+          <a:lnRef idx="1">
+            <a:schemeClr val="accent1"/>
+          </a:lnRef>
+          <a:fillRef idx="3">
+            <a:schemeClr val="accent1"/>
+          </a:fillRef>
+          <a:effectRef idx="2">
+            <a:schemeClr val="accent1"/>
+          </a:effectRef>
+          <a:fontRef idx="minor">
+            <a:schemeClr val="lt1"/>
+          </a:fontRef>
+        </p:style>
+        <p:txBody>
+          <a:bodyPr rtlCol="0" anchor="ctr"/>
+          <a:lstStyle/>
+          <a:p>
+            <a:pPr algn="ctr"/>
+            <a:endParaRPr lang="en-GB"/>
+          </a:p>
+        </p:txBody>
+      </p:sp>
+      <p:sp>
+        <p:nvSpPr>
+          <p:cNvPr id="20" name="TextBox 19">
+            <a:extLst>
+              <a:ext uri="{FF2B5EF4-FFF2-40B4-BE49-F238E27FC236}">
+                <a16:creationId xmlns:a16="http://schemas.microsoft.com/office/drawing/2014/main" id="{0D38D28C-CF55-EA3A-4B1D-8CB9C73585F6}"/>
+              </a:ext>
+            </a:extLst>
+          </p:cNvPr>
+          <p:cNvSpPr txBox="1"/>
+          <p:nvPr/>
+        </p:nvSpPr>
+        <p:spPr>
+          <a:xfrm>
+            <a:off x="5401472" y="5310029"/>
+            <a:ext cx="5120640" cy="830997"/>
+          </a:xfrm>
+          <a:prstGeom prst="rect">
+            <a:avLst/>
+          </a:prstGeom>
+          <a:noFill/>
+        </p:spPr>
+        <p:txBody>
+          <a:bodyPr wrap="square" anchor="t">
+            <a:spAutoFit/>
+          </a:bodyPr>
+          <a:lstStyle/>
+          <a:p>
+            <a:r>
+              <a:rPr lang="en-GB" sz="2400" b="0" dirty="0" err="1">
+                <a:solidFill>
+                  <a:srgbClr val="334155"/>
+                </a:solidFill>
+                <a:latin typeface="Calibri"/>
+              </a:rPr>
+              <a:t>Mõtle</a:t>
+            </a:r>
+            <a:r>
+              <a:rPr lang="en-GB" sz="2400" b="0" dirty="0">
+                <a:solidFill>
+                  <a:srgbClr val="334155"/>
+                </a:solidFill>
+                <a:latin typeface="Calibri"/>
+              </a:rPr>
+              <a:t> </a:t>
+            </a:r>
+            <a:r>
+              <a:rPr lang="en-GB" sz="2400" b="0" dirty="0" err="1">
+                <a:solidFill>
+                  <a:srgbClr val="334155"/>
+                </a:solidFill>
+                <a:latin typeface="Calibri"/>
+              </a:rPr>
+              <a:t>ise</a:t>
+            </a:r>
+            <a:r>
+              <a:rPr lang="en-GB" sz="2400" b="0" dirty="0">
+                <a:solidFill>
+                  <a:srgbClr val="334155"/>
+                </a:solidFill>
+                <a:latin typeface="Calibri"/>
+              </a:rPr>
+              <a:t> </a:t>
+            </a:r>
+            <a:r>
+              <a:rPr lang="en-GB" sz="2400" b="0" dirty="0" err="1">
+                <a:solidFill>
+                  <a:srgbClr val="334155"/>
+                </a:solidFill>
+                <a:latin typeface="Calibri"/>
+              </a:rPr>
+              <a:t>üks</a:t>
+            </a:r>
+            <a:r>
+              <a:rPr lang="en-GB" sz="2400" b="0" dirty="0">
+                <a:solidFill>
+                  <a:srgbClr val="334155"/>
+                </a:solidFill>
+                <a:latin typeface="Calibri"/>
+              </a:rPr>
+              <a:t> </a:t>
+            </a:r>
+            <a:r>
+              <a:rPr lang="en-GB" sz="2400" b="0" dirty="0" err="1">
+                <a:solidFill>
+                  <a:srgbClr val="334155"/>
+                </a:solidFill>
+                <a:latin typeface="Calibri"/>
+              </a:rPr>
+              <a:t>keeruline</a:t>
+            </a:r>
+            <a:r>
+              <a:rPr lang="en-GB" sz="2400" b="0" dirty="0">
+                <a:solidFill>
+                  <a:srgbClr val="334155"/>
+                </a:solidFill>
+                <a:latin typeface="Calibri"/>
+              </a:rPr>
+              <a:t> </a:t>
+            </a:r>
+            <a:r>
+              <a:rPr lang="en-GB" sz="2400" b="0" dirty="0" err="1">
+                <a:solidFill>
+                  <a:srgbClr val="334155"/>
+                </a:solidFill>
+                <a:latin typeface="Calibri"/>
+              </a:rPr>
+              <a:t>ülesanne</a:t>
+            </a:r>
+            <a:r>
+              <a:rPr lang="en-GB" sz="2400" b="0" dirty="0">
+                <a:solidFill>
+                  <a:srgbClr val="334155"/>
+                </a:solidFill>
+                <a:latin typeface="Calibri"/>
+              </a:rPr>
+              <a:t> AI-le </a:t>
+            </a:r>
+            <a:r>
+              <a:rPr lang="en-GB" sz="2400" b="0" dirty="0" err="1">
+                <a:solidFill>
+                  <a:srgbClr val="334155"/>
+                </a:solidFill>
+                <a:latin typeface="Calibri"/>
+              </a:rPr>
+              <a:t>ja</a:t>
+            </a:r>
+            <a:r>
+              <a:rPr lang="en-GB" sz="2400" b="0" dirty="0">
+                <a:solidFill>
+                  <a:srgbClr val="334155"/>
+                </a:solidFill>
+                <a:latin typeface="Calibri"/>
+              </a:rPr>
+              <a:t> </a:t>
+            </a:r>
+            <a:r>
+              <a:rPr lang="en-GB" sz="2400" b="0" dirty="0" err="1">
+                <a:solidFill>
+                  <a:srgbClr val="334155"/>
+                </a:solidFill>
+                <a:latin typeface="Calibri"/>
+              </a:rPr>
+              <a:t>teosta</a:t>
+            </a:r>
+            <a:r>
+              <a:rPr lang="en-GB" sz="2400" b="0" dirty="0">
+                <a:solidFill>
+                  <a:srgbClr val="334155"/>
+                </a:solidFill>
+                <a:latin typeface="Calibri"/>
+              </a:rPr>
+              <a:t>: </a:t>
+            </a:r>
+            <a:r>
+              <a:rPr lang="en-GB" sz="2400" b="0" dirty="0" err="1">
+                <a:solidFill>
+                  <a:srgbClr val="334155"/>
+                </a:solidFill>
+                <a:latin typeface="Calibri"/>
+              </a:rPr>
+              <a:t>kood</a:t>
+            </a:r>
+            <a:r>
+              <a:rPr lang="en-GB" sz="2400" b="0" dirty="0">
+                <a:solidFill>
+                  <a:srgbClr val="334155"/>
+                </a:solidFill>
+                <a:latin typeface="Calibri"/>
+              </a:rPr>
+              <a:t>, </a:t>
+            </a:r>
+            <a:r>
+              <a:rPr lang="en-GB" sz="2400" b="0" dirty="0" err="1">
+                <a:solidFill>
+                  <a:srgbClr val="334155"/>
+                </a:solidFill>
+                <a:latin typeface="Calibri"/>
+              </a:rPr>
+              <a:t>kommentaarid</a:t>
+            </a:r>
+            <a:r>
+              <a:rPr lang="en-GB" sz="2400" b="0" dirty="0">
+                <a:solidFill>
+                  <a:srgbClr val="334155"/>
+                </a:solidFill>
+                <a:latin typeface="Calibri"/>
+              </a:rPr>
+              <a:t>, VIEW</a:t>
+            </a:r>
+          </a:p>
+        </p:txBody>
+      </p:sp>
+      <p:sp>
+        <p:nvSpPr>
+          <p:cNvPr id="22" name="TextBox 21">
+            <a:extLst>
+              <a:ext uri="{FF2B5EF4-FFF2-40B4-BE49-F238E27FC236}">
+                <a16:creationId xmlns:a16="http://schemas.microsoft.com/office/drawing/2014/main" id="{AF1C8260-4E84-C332-FD12-739ED2CF09D7}"/>
+              </a:ext>
+            </a:extLst>
+          </p:cNvPr>
+          <p:cNvSpPr txBox="1"/>
+          <p:nvPr/>
+        </p:nvSpPr>
+        <p:spPr>
+          <a:xfrm>
+            <a:off x="3709358" y="6091806"/>
+            <a:ext cx="7539486" cy="646331"/>
+          </a:xfrm>
+          <a:prstGeom prst="rect">
+            <a:avLst/>
+          </a:prstGeom>
+          <a:noFill/>
+        </p:spPr>
+        <p:txBody>
+          <a:bodyPr wrap="square">
+            <a:spAutoFit/>
+          </a:bodyPr>
+          <a:lstStyle/>
+          <a:p>
+            <a:r>
+              <a:rPr lang="en-GB" dirty="0" err="1"/>
+              <a:t>Turundus</a:t>
+            </a:r>
+            <a:r>
+              <a:rPr lang="en-GB" dirty="0"/>
+              <a:t> </a:t>
+            </a:r>
+            <a:r>
+              <a:rPr lang="en-GB" dirty="0" err="1"/>
+              <a:t>küsib</a:t>
+            </a:r>
+            <a:r>
+              <a:rPr lang="en-GB" dirty="0"/>
+              <a:t>: </a:t>
+            </a:r>
+            <a:r>
+              <a:rPr lang="en-GB" i="1" dirty="0" err="1"/>
+              <a:t>kui</a:t>
+            </a:r>
+            <a:r>
+              <a:rPr lang="en-GB" i="1" dirty="0"/>
+              <a:t> </a:t>
+            </a:r>
+            <a:r>
+              <a:rPr lang="en-GB" i="1" dirty="0" err="1"/>
+              <a:t>klient</a:t>
+            </a:r>
+            <a:r>
+              <a:rPr lang="en-GB" i="1" dirty="0"/>
+              <a:t> </a:t>
+            </a:r>
+            <a:r>
+              <a:rPr lang="en-GB" i="1" dirty="0" err="1"/>
+              <a:t>tuleb</a:t>
+            </a:r>
+            <a:r>
+              <a:rPr lang="en-GB" i="1" dirty="0"/>
+              <a:t> </a:t>
+            </a:r>
+            <a:r>
+              <a:rPr lang="en-GB" i="1" dirty="0" err="1"/>
+              <a:t>teist</a:t>
+            </a:r>
+            <a:r>
+              <a:rPr lang="en-GB" i="1" dirty="0"/>
+              <a:t> </a:t>
+            </a:r>
+            <a:r>
+              <a:rPr lang="en-GB" i="1" dirty="0" err="1"/>
+              <a:t>korda</a:t>
+            </a:r>
+            <a:r>
+              <a:rPr lang="en-GB" i="1" dirty="0"/>
+              <a:t>, kas </a:t>
+            </a:r>
+            <a:r>
+              <a:rPr lang="en-GB" i="1" dirty="0" err="1"/>
+              <a:t>ostukorv</a:t>
+            </a:r>
+            <a:r>
+              <a:rPr lang="en-GB" i="1" dirty="0"/>
+              <a:t> on </a:t>
+            </a:r>
+            <a:r>
+              <a:rPr lang="en-GB" i="1" dirty="0" err="1"/>
+              <a:t>suurem</a:t>
+            </a:r>
+            <a:r>
+              <a:rPr lang="en-GB" i="1" dirty="0"/>
+              <a:t> </a:t>
+            </a:r>
+            <a:r>
+              <a:rPr lang="en-GB" i="1" dirty="0" err="1"/>
+              <a:t>või</a:t>
+            </a:r>
+            <a:r>
+              <a:rPr lang="en-GB" i="1" dirty="0"/>
+              <a:t> </a:t>
+            </a:r>
+            <a:r>
+              <a:rPr lang="en-GB" i="1" dirty="0" err="1"/>
+              <a:t>väiksem</a:t>
+            </a:r>
+            <a:r>
+              <a:rPr lang="en-GB" i="1" dirty="0"/>
+              <a:t> </a:t>
+            </a:r>
+            <a:r>
+              <a:rPr lang="en-GB" i="1" dirty="0" err="1"/>
+              <a:t>kui</a:t>
+            </a:r>
+            <a:r>
+              <a:rPr lang="en-GB" i="1" dirty="0"/>
+              <a:t> </a:t>
+            </a:r>
+            <a:r>
+              <a:rPr lang="en-GB" i="1" dirty="0" err="1"/>
+              <a:t>esimesel</a:t>
+            </a:r>
+            <a:r>
+              <a:rPr lang="en-GB" i="1" dirty="0"/>
+              <a:t> </a:t>
+            </a:r>
+            <a:r>
+              <a:rPr lang="en-GB" i="1" dirty="0" err="1"/>
+              <a:t>korral</a:t>
+            </a:r>
+            <a:r>
+              <a:rPr lang="en-GB" i="1" dirty="0"/>
+              <a:t> — </a:t>
+            </a:r>
+            <a:r>
+              <a:rPr lang="en-GB" i="1" dirty="0" err="1"/>
+              <a:t>ja</a:t>
+            </a:r>
+            <a:r>
+              <a:rPr lang="en-GB" i="1" dirty="0"/>
+              <a:t> kas </a:t>
+            </a:r>
+            <a:r>
+              <a:rPr lang="en-GB" i="1" dirty="0" err="1"/>
+              <a:t>esimese</a:t>
+            </a:r>
+            <a:r>
+              <a:rPr lang="en-GB" i="1" dirty="0"/>
+              <a:t> </a:t>
+            </a:r>
+            <a:r>
+              <a:rPr lang="en-GB" i="1" dirty="0" err="1"/>
+              <a:t>korra</a:t>
+            </a:r>
+            <a:r>
+              <a:rPr lang="en-GB" i="1" dirty="0"/>
+              <a:t> </a:t>
+            </a:r>
+            <a:r>
+              <a:rPr lang="en-GB" i="1" dirty="0" err="1"/>
+              <a:t>soodustus</a:t>
+            </a:r>
+            <a:r>
+              <a:rPr lang="en-GB" i="1" dirty="0"/>
+              <a:t> </a:t>
+            </a:r>
+            <a:r>
+              <a:rPr lang="en-GB" i="1" dirty="0" err="1"/>
+              <a:t>seda</a:t>
+            </a:r>
+            <a:r>
+              <a:rPr lang="en-GB" i="1" dirty="0"/>
+              <a:t> </a:t>
+            </a:r>
+            <a:r>
+              <a:rPr lang="en-GB" i="1" dirty="0" err="1"/>
+              <a:t>muudab</a:t>
+            </a:r>
+            <a:r>
+              <a:rPr lang="en-GB" i="1" dirty="0"/>
+              <a:t>?</a:t>
+            </a:r>
+            <a:endParaRPr lang="en-GB" dirty="0"/>
+          </a:p>
+        </p:txBody>
+      </p:sp>
     </p:spTree>
   </p:cSld>
   <p:clrMapOvr>
@@ -51253,6 +51903,15 @@
           <a:p>
             <a:pPr algn="ctr"/>
             <a:r>
+              <a:rPr lang="en-GB" sz="2000" b="1" dirty="0">
+                <a:solidFill>
+                  <a:srgbClr val="FFFFFF"/>
+                </a:solidFill>
+                <a:latin typeface="Calibri"/>
+              </a:rPr>
+              <a:t>30 - 45 min </a:t>
+            </a:r>
+            <a:r>
               <a:rPr lang="et-EE" sz="2000" b="1" dirty="0">
                 <a:solidFill>
                   <a:srgbClr val="FFFFFF"/>
@@ -51304,11 +51963,20 @@
                 </a:solidFill>
                 <a:latin typeface="Calibri"/>
               </a:rPr>
-              <a:t>: joonista</a:t>
+              <a:t>: </a:t>
+            </a:r>
+            <a:r>
+              <a:rPr lang="et-EE" sz="2000" b="1" dirty="0">
+                <a:solidFill>
+                  <a:srgbClr val="FF0000"/>
+                </a:solidFill>
+                <a:latin typeface="Calibri"/>
+              </a:rPr>
+              <a:t>joonista</a:t>
             </a:r>
             <a:endParaRPr sz="2000" b="1" dirty="0">
               <a:solidFill>
-                <a:srgbClr val="FFFFFF"/>
+                <a:srgbClr val="FF0000"/>
               </a:solidFill>
               <a:latin typeface="Calibri"/>
             </a:endParaRPr>
@@ -52219,6 +52887,53 @@
           </a:prstGeom>
         </p:spPr>
       </p:pic>
+      <p:sp>
+        <p:nvSpPr>
+          <p:cNvPr id="6" name="TextBox 5">
+            <a:extLst>
+              <a:ext uri="{FF2B5EF4-FFF2-40B4-BE49-F238E27FC236}">
+                <a16:creationId xmlns:a16="http://schemas.microsoft.com/office/drawing/2014/main" id="{5C74BE69-2D26-3169-43CA-C04B3DE4E50C}"/>
+              </a:ext>
+            </a:extLst>
+          </p:cNvPr>
+          <p:cNvSpPr txBox="1"/>
+          <p:nvPr/>
+        </p:nvSpPr>
+        <p:spPr>
+          <a:xfrm>
+            <a:off x="560716" y="5512278"/>
+            <a:ext cx="4252823" cy="923330"/>
+          </a:xfrm>
+          <a:prstGeom prst="rect">
+            <a:avLst/>
+          </a:prstGeom>
+          <a:noFill/>
+        </p:spPr>
+        <p:txBody>
+          <a:bodyPr wrap="square" rtlCol="0">
+            <a:spAutoFit/>
+          </a:bodyPr>
+          <a:lstStyle/>
+          <a:p>
+            <a:r>
+              <a:rPr lang="en-GB" sz="5400" dirty="0" err="1">
+                <a:solidFill>
+                  <a:srgbClr val="FF0000"/>
+                </a:solidFill>
+              </a:rPr>
+              <a:t>kuni</a:t>
+            </a:r>
+            <a:r>
+              <a:rPr lang="en-GB" sz="5400" dirty="0">
+                <a:solidFill>
+                  <a:srgbClr val="FF0000"/>
+                </a:solidFill>
+              </a:rPr>
+              <a:t> 14:30</a:t>
+            </a:r>
+          </a:p>
+        </p:txBody>
+      </p:sp>
     </p:spTree>
     <p:extLst>
       <p:ext uri="{BB962C8B-B14F-4D97-AF65-F5344CB8AC3E}">

--- a/Materjalid/Day9 Andmekorraldus Dim Fakt/9-paev-andmetarkus-esitlus.pptx
+++ b/Materjalid/Day9 Andmekorraldus Dim Fakt/9-paev-andmetarkus-esitlus.pptx
@@ -10967,7 +10967,7 @@
         <p:spPr>
           <a:xfrm>
             <a:off x="270344" y="1649007"/>
-            <a:ext cx="11080144" cy="3354765"/>
+            <a:ext cx="11080144" cy="3600986"/>
           </a:xfrm>
           <a:prstGeom prst="rect">
             <a:avLst/>
@@ -11450,8 +11450,28 @@
                   <a:srgbClr val="334155"/>
                 </a:solidFill>
               </a:rPr>
-              <a:t> VIEW’s  KAS ON?</a:t>
-            </a:r>
+              <a:t> VIEW’s  </a:t>
+            </a:r>
+            <a:br>
+              <a:rPr lang="en-GB" sz="1600" b="1" dirty="0">
+                <a:solidFill>
+                  <a:srgbClr val="334155"/>
+                </a:solidFill>
+              </a:rPr>
+            </a:br>
+            <a:r>
+              <a:rPr lang="en-GB" sz="1600" b="1" dirty="0" err="1">
+                <a:solidFill>
+                  <a:srgbClr val="334155"/>
+                </a:solidFill>
+              </a:rPr>
+              <a:t>klientide_myygisummad</a:t>
+            </a:r>
+            <a:endParaRPr lang="en-GB" sz="1600" b="1" dirty="0">
+              <a:solidFill>
+                <a:srgbClr val="334155"/>
+              </a:solidFill>
+            </a:endParaRPr>
           </a:p>
         </p:txBody>
       </p:sp>
@@ -11537,7 +11557,7 @@
         </p:blipFill>
         <p:spPr>
           <a:xfrm>
-            <a:off x="4867930" y="4881499"/>
+            <a:off x="4867930" y="4970707"/>
             <a:ext cx="2789452" cy="2092089"/>
           </a:xfrm>
           <a:prstGeom prst="rect">
@@ -30076,25 +30096,26 @@
           <a:lstStyle/>
           <a:p>
             <a:r>
-              <a:rPr lang="en-US" err="1"/>
+              <a:rPr lang="en-US" dirty="0" err="1"/>
               <a:t>Lõimitud</a:t>
             </a:r>
             <a:r>
-              <a:rPr lang="en-US"/>
-              <a:t> </a:t>
-            </a:r>
-            <a:r>
-              <a:rPr lang="en-US" err="1"/>
+              <a:rPr lang="en-US" dirty="0"/>
+              <a:t> </a:t>
+            </a:r>
+            <a:r>
+              <a:rPr lang="en-US" dirty="0" err="1"/>
               <a:t>andmekaitse</a:t>
             </a:r>
             <a:r>
-              <a:rPr lang="en-US"/>
-              <a:t> </a:t>
-            </a:r>
-            <a:r>
-              <a:rPr lang="en-US" err="1"/>
+              <a:rPr lang="en-US" dirty="0"/>
+              <a:t> </a:t>
+            </a:r>
+            <a:r>
+              <a:rPr lang="en-US" dirty="0" err="1"/>
               <a:t>põhimõtted</a:t>
             </a:r>
+            <a:endParaRPr lang="en-US" dirty="0"/>
           </a:p>
         </p:txBody>
       </p:sp>
